--- a/DataCo_Global_Supply_Chain_Diagnostic.pptx
+++ b/DataCo_Global_Supply_Chain_Diagnostic.pptx
@@ -19,13 +19,14 @@
     <p:sldId id="263" r:id="rId15"/>
     <p:sldId id="264" r:id="rId16"/>
     <p:sldId id="265" r:id="rId17"/>
+    <p:sldId id="266" r:id="rId18"/>
   </p:sldIdLst>
   <p:sldSz cy="5143500" cx="9144000"/>
   <p:notesSz cx="6858000" cy="9144000"/>
   <p:embeddedFontLst>
     <p:embeddedFont>
       <p:font typeface="Arial Black"/>
-      <p:regular r:id="rId18"/>
+      <p:regular r:id="rId19"/>
     </p:embeddedFont>
   </p:embeddedFontLst>
   <p:defaultTextStyle>
@@ -864,7 +865,7 @@
   <p:cSld>
     <p:spTree>
       <p:nvGrpSpPr>
-        <p:cNvPr id="208" name="Shape 208"/>
+        <p:cNvPr id="213" name="Shape 213"/>
         <p:cNvGrpSpPr/>
         <p:nvPr/>
       </p:nvGrpSpPr>
@@ -878,7 +879,7 @@
       </p:grpSpPr>
       <p:sp>
         <p:nvSpPr>
-          <p:cNvPr id="209" name="Google Shape;209;g3d877d20414_3_183:notes"/>
+          <p:cNvPr id="214" name="Google Shape;214;g3d877d20414_3_159:notes"/>
           <p:cNvSpPr/>
           <p:nvPr>
             <p:ph idx="2" type="sldImg"/>
@@ -923,7 +924,7 @@
       </p:sp>
       <p:sp>
         <p:nvSpPr>
-          <p:cNvPr id="210" name="Google Shape;210;g3d877d20414_3_183:notes"/>
+          <p:cNvPr id="215" name="Google Shape;215;g3d877d20414_3_159:notes"/>
           <p:cNvSpPr txBox="1"/>
           <p:nvPr>
             <p:ph idx="1" type="body"/>
@@ -966,7 +967,164 @@
       </p:sp>
       <p:sp>
         <p:nvSpPr>
-          <p:cNvPr id="211" name="Google Shape;211;g3d877d20414_3_183:notes"/>
+          <p:cNvPr id="216" name="Google Shape;216;g3d877d20414_3_159:notes"/>
+          <p:cNvSpPr txBox="1"/>
+          <p:nvPr>
+            <p:ph idx="12" type="sldNum"/>
+          </p:nvPr>
+        </p:nvSpPr>
+        <p:spPr>
+          <a:xfrm>
+            <a:off x="5179484" y="8685213"/>
+            <a:ext cx="3962400" cy="458787"/>
+          </a:xfrm>
+          <a:prstGeom prst="rect">
+            <a:avLst/>
+          </a:prstGeom>
+          <a:noFill/>
+          <a:ln>
+            <a:noFill/>
+          </a:ln>
+        </p:spPr>
+        <p:txBody>
+          <a:bodyPr anchorCtr="0" anchor="b" bIns="45700" lIns="91425" spcFirstLastPara="1" rIns="91425" wrap="square" tIns="45700">
+            <a:noAutofit/>
+          </a:bodyPr>
+          <a:lstStyle/>
+          <a:p>
+            <a:pPr indent="0" lvl="0" marL="0" rtl="0" algn="r">
+              <a:spcBef>
+                <a:spcPts val="0"/>
+              </a:spcBef>
+              <a:spcAft>
+                <a:spcPts val="0"/>
+              </a:spcAft>
+              <a:buNone/>
+            </a:pPr>
+            <a:fld id="{00000000-1234-1234-1234-123412341234}" type="slidenum">
+              <a:rPr lang="en-GB"/>
+              <a:t>‹#›</a:t>
+            </a:fld>
+            <a:endParaRPr/>
+          </a:p>
+        </p:txBody>
+      </p:sp>
+    </p:spTree>
+  </p:cSld>
+  <p:clrMapOvr>
+    <a:masterClrMapping/>
+  </p:clrMapOvr>
+</p:notes>
+</file>
+
+<file path=ppt/notesSlides/notesSlide11.xml><?xml version="1.0" encoding="utf-8"?>
+<p:notes xmlns:a="http://schemas.openxmlformats.org/drawingml/2006/main" xmlns:r="http://schemas.openxmlformats.org/officeDocument/2006/relationships" xmlns:mc="http://schemas.openxmlformats.org/markup-compatibility/2006" xmlns:mv="urn:schemas-microsoft-com:mac:vml" xmlns:p="http://schemas.openxmlformats.org/presentationml/2006/main" xmlns:c="http://schemas.openxmlformats.org/drawingml/2006/chart" xmlns:dgm="http://schemas.openxmlformats.org/drawingml/2006/diagram" xmlns:o="urn:schemas-microsoft-com:office:office" xmlns:v="urn:schemas-microsoft-com:vml" xmlns:pvml="urn:schemas-microsoft-com:office:powerpoint" xmlns:com="http://schemas.openxmlformats.org/drawingml/2006/compatibility" xmlns:p14="http://schemas.microsoft.com/office/powerpoint/2010/main" xmlns:p15="http://schemas.microsoft.com/office/powerpoint/2012/main" xmlns:ahyp="http://schemas.microsoft.com/office/drawing/2018/hyperlinkcolor" showMasterPhAnim="0" showMasterSp="0">
+  <p:cSld>
+    <p:spTree>
+      <p:nvGrpSpPr>
+        <p:cNvPr id="226" name="Shape 226"/>
+        <p:cNvGrpSpPr/>
+        <p:nvPr/>
+      </p:nvGrpSpPr>
+      <p:grpSpPr>
+        <a:xfrm>
+          <a:off x="0" y="0"/>
+          <a:ext cx="0" cy="0"/>
+          <a:chOff x="0" y="0"/>
+          <a:chExt cx="0" cy="0"/>
+        </a:xfrm>
+      </p:grpSpPr>
+      <p:sp>
+        <p:nvSpPr>
+          <p:cNvPr id="227" name="Google Shape;227;g3d877d20414_3_183:notes"/>
+          <p:cNvSpPr/>
+          <p:nvPr>
+            <p:ph idx="2" type="sldImg"/>
+          </p:nvPr>
+        </p:nvSpPr>
+        <p:spPr>
+          <a:xfrm>
+            <a:off x="914400" y="1143000"/>
+            <a:ext cx="7315200" cy="3086100"/>
+          </a:xfrm>
+          <a:custGeom>
+            <a:rect b="b" l="l" r="r" t="t"/>
+            <a:pathLst>
+              <a:path extrusionOk="0" h="120000" w="120000">
+                <a:moveTo>
+                  <a:pt x="0" y="0"/>
+                </a:moveTo>
+                <a:lnTo>
+                  <a:pt x="120000" y="0"/>
+                </a:lnTo>
+                <a:lnTo>
+                  <a:pt x="120000" y="120000"/>
+                </a:lnTo>
+                <a:lnTo>
+                  <a:pt x="0" y="120000"/>
+                </a:lnTo>
+                <a:close/>
+              </a:path>
+            </a:pathLst>
+          </a:custGeom>
+          <a:noFill/>
+          <a:ln cap="flat" cmpd="sng" w="12700">
+            <a:solidFill>
+              <a:srgbClr val="000000"/>
+            </a:solidFill>
+            <a:prstDash val="solid"/>
+            <a:round/>
+            <a:headEnd len="sm" w="sm" type="none"/>
+            <a:tailEnd len="sm" w="sm" type="none"/>
+          </a:ln>
+        </p:spPr>
+      </p:sp>
+      <p:sp>
+        <p:nvSpPr>
+          <p:cNvPr id="228" name="Google Shape;228;g3d877d20414_3_183:notes"/>
+          <p:cNvSpPr txBox="1"/>
+          <p:nvPr>
+            <p:ph idx="1" type="body"/>
+          </p:nvPr>
+        </p:nvSpPr>
+        <p:spPr>
+          <a:xfrm>
+            <a:off x="914400" y="4400550"/>
+            <a:ext cx="7315200" cy="3600450"/>
+          </a:xfrm>
+          <a:prstGeom prst="rect">
+            <a:avLst/>
+          </a:prstGeom>
+          <a:noFill/>
+          <a:ln>
+            <a:noFill/>
+          </a:ln>
+        </p:spPr>
+        <p:txBody>
+          <a:bodyPr anchorCtr="0" anchor="t" bIns="45700" lIns="91425" spcFirstLastPara="1" rIns="91425" wrap="square" tIns="45700">
+            <a:noAutofit/>
+          </a:bodyPr>
+          <a:lstStyle/>
+          <a:p>
+            <a:pPr indent="0" lvl="0" marL="0" rtl="0" algn="l">
+              <a:spcBef>
+                <a:spcPts val="0"/>
+              </a:spcBef>
+              <a:spcAft>
+                <a:spcPts val="0"/>
+              </a:spcAft>
+              <a:buNone/>
+            </a:pPr>
+            <a:r>
+              <a:t/>
+            </a:r>
+            <a:endParaRPr/>
+          </a:p>
+        </p:txBody>
+      </p:sp>
+      <p:sp>
+        <p:nvSpPr>
+          <p:cNvPr id="229" name="Google Shape;229;g3d877d20414_3_183:notes"/>
           <p:cNvSpPr txBox="1"/>
           <p:nvPr>
             <p:ph idx="12" type="sldNum"/>
@@ -1506,7 +1664,7 @@
       </p:grpSpPr>
       <p:sp>
         <p:nvSpPr>
-          <p:cNvPr id="132" name="Google Shape;132;g3d877d20414_3_99:notes"/>
+          <p:cNvPr id="132" name="Google Shape;132;g3d877d20414_3_82:notes"/>
           <p:cNvSpPr/>
           <p:nvPr>
             <p:ph idx="2" type="sldImg"/>
@@ -1551,7 +1709,7 @@
       </p:sp>
       <p:sp>
         <p:nvSpPr>
-          <p:cNvPr id="133" name="Google Shape;133;g3d877d20414_3_99:notes"/>
+          <p:cNvPr id="133" name="Google Shape;133;g3d877d20414_3_82:notes"/>
           <p:cNvSpPr txBox="1"/>
           <p:nvPr>
             <p:ph idx="1" type="body"/>
@@ -1560,7 +1718,7 @@
         <p:spPr>
           <a:xfrm>
             <a:off x="914400" y="4400550"/>
-            <a:ext cx="7315200" cy="3600450"/>
+            <a:ext cx="7315200" cy="3600600"/>
           </a:xfrm>
           <a:prstGeom prst="rect">
             <a:avLst/>
@@ -1594,7 +1752,7 @@
       </p:sp>
       <p:sp>
         <p:nvSpPr>
-          <p:cNvPr id="134" name="Google Shape;134;g3d877d20414_3_99:notes"/>
+          <p:cNvPr id="134" name="Google Shape;134;g3d877d20414_3_82:notes"/>
           <p:cNvSpPr txBox="1"/>
           <p:nvPr>
             <p:ph idx="12" type="sldNum"/>
@@ -1603,7 +1761,7 @@
         <p:spPr>
           <a:xfrm>
             <a:off x="5179484" y="8685213"/>
-            <a:ext cx="3962400" cy="458787"/>
+            <a:ext cx="3962400" cy="458700"/>
           </a:xfrm>
           <a:prstGeom prst="rect">
             <a:avLst/>
@@ -1649,7 +1807,7 @@
   <p:cSld>
     <p:spTree>
       <p:nvGrpSpPr>
-        <p:cNvPr id="141" name="Shape 141"/>
+        <p:cNvPr id="149" name="Shape 149"/>
         <p:cNvGrpSpPr/>
         <p:nvPr/>
       </p:nvGrpSpPr>
@@ -1663,7 +1821,7 @@
       </p:grpSpPr>
       <p:sp>
         <p:nvSpPr>
-          <p:cNvPr id="142" name="Google Shape;142;g3d877d20414_3_108:notes"/>
+          <p:cNvPr id="150" name="Google Shape;150;g3d877d20414_3_99:notes"/>
           <p:cNvSpPr/>
           <p:nvPr>
             <p:ph idx="2" type="sldImg"/>
@@ -1708,7 +1866,7 @@
       </p:sp>
       <p:sp>
         <p:nvSpPr>
-          <p:cNvPr id="143" name="Google Shape;143;g3d877d20414_3_108:notes"/>
+          <p:cNvPr id="151" name="Google Shape;151;g3d877d20414_3_99:notes"/>
           <p:cNvSpPr txBox="1"/>
           <p:nvPr>
             <p:ph idx="1" type="body"/>
@@ -1751,7 +1909,7 @@
       </p:sp>
       <p:sp>
         <p:nvSpPr>
-          <p:cNvPr id="144" name="Google Shape;144;g3d877d20414_3_108:notes"/>
+          <p:cNvPr id="152" name="Google Shape;152;g3d877d20414_3_99:notes"/>
           <p:cNvSpPr txBox="1"/>
           <p:nvPr>
             <p:ph idx="12" type="sldNum"/>
@@ -1806,7 +1964,7 @@
   <p:cSld>
     <p:spTree>
       <p:nvGrpSpPr>
-        <p:cNvPr id="165" name="Shape 165"/>
+        <p:cNvPr id="159" name="Shape 159"/>
         <p:cNvGrpSpPr/>
         <p:nvPr/>
       </p:nvGrpSpPr>
@@ -1820,7 +1978,7 @@
       </p:grpSpPr>
       <p:sp>
         <p:nvSpPr>
-          <p:cNvPr id="166" name="Google Shape;166;g3d877d20414_3_131:notes"/>
+          <p:cNvPr id="160" name="Google Shape;160;g3d877d20414_3_108:notes"/>
           <p:cNvSpPr/>
           <p:nvPr>
             <p:ph idx="2" type="sldImg"/>
@@ -1865,7 +2023,7 @@
       </p:sp>
       <p:sp>
         <p:nvSpPr>
-          <p:cNvPr id="167" name="Google Shape;167;g3d877d20414_3_131:notes"/>
+          <p:cNvPr id="161" name="Google Shape;161;g3d877d20414_3_108:notes"/>
           <p:cNvSpPr txBox="1"/>
           <p:nvPr>
             <p:ph idx="1" type="body"/>
@@ -1908,7 +2066,7 @@
       </p:sp>
       <p:sp>
         <p:nvSpPr>
-          <p:cNvPr id="168" name="Google Shape;168;g3d877d20414_3_131:notes"/>
+          <p:cNvPr id="162" name="Google Shape;162;g3d877d20414_3_108:notes"/>
           <p:cNvSpPr txBox="1"/>
           <p:nvPr>
             <p:ph idx="12" type="sldNum"/>
@@ -1963,7 +2121,7 @@
   <p:cSld>
     <p:spTree>
       <p:nvGrpSpPr>
-        <p:cNvPr id="176" name="Shape 176"/>
+        <p:cNvPr id="183" name="Shape 183"/>
         <p:cNvGrpSpPr/>
         <p:nvPr/>
       </p:nvGrpSpPr>
@@ -1977,7 +2135,7 @@
       </p:grpSpPr>
       <p:sp>
         <p:nvSpPr>
-          <p:cNvPr id="177" name="Google Shape;177;g3d877d20414_3_141:notes"/>
+          <p:cNvPr id="184" name="Google Shape;184;g3d877d20414_3_131:notes"/>
           <p:cNvSpPr/>
           <p:nvPr>
             <p:ph idx="2" type="sldImg"/>
@@ -2022,7 +2180,7 @@
       </p:sp>
       <p:sp>
         <p:nvSpPr>
-          <p:cNvPr id="178" name="Google Shape;178;g3d877d20414_3_141:notes"/>
+          <p:cNvPr id="185" name="Google Shape;185;g3d877d20414_3_131:notes"/>
           <p:cNvSpPr txBox="1"/>
           <p:nvPr>
             <p:ph idx="1" type="body"/>
@@ -2065,7 +2223,7 @@
       </p:sp>
       <p:sp>
         <p:nvSpPr>
-          <p:cNvPr id="179" name="Google Shape;179;g3d877d20414_3_141:notes"/>
+          <p:cNvPr id="186" name="Google Shape;186;g3d877d20414_3_131:notes"/>
           <p:cNvSpPr txBox="1"/>
           <p:nvPr>
             <p:ph idx="12" type="sldNum"/>
@@ -2120,7 +2278,7 @@
   <p:cSld>
     <p:spTree>
       <p:nvGrpSpPr>
-        <p:cNvPr id="195" name="Shape 195"/>
+        <p:cNvPr id="194" name="Shape 194"/>
         <p:cNvGrpSpPr/>
         <p:nvPr/>
       </p:nvGrpSpPr>
@@ -2134,7 +2292,7 @@
       </p:grpSpPr>
       <p:sp>
         <p:nvSpPr>
-          <p:cNvPr id="196" name="Google Shape;196;g3d877d20414_3_159:notes"/>
+          <p:cNvPr id="195" name="Google Shape;195;g3d877d20414_3_141:notes"/>
           <p:cNvSpPr/>
           <p:nvPr>
             <p:ph idx="2" type="sldImg"/>
@@ -2179,7 +2337,7 @@
       </p:sp>
       <p:sp>
         <p:nvSpPr>
-          <p:cNvPr id="197" name="Google Shape;197;g3d877d20414_3_159:notes"/>
+          <p:cNvPr id="196" name="Google Shape;196;g3d877d20414_3_141:notes"/>
           <p:cNvSpPr txBox="1"/>
           <p:nvPr>
             <p:ph idx="1" type="body"/>
@@ -2222,7 +2380,7 @@
       </p:sp>
       <p:sp>
         <p:nvSpPr>
-          <p:cNvPr id="198" name="Google Shape;198;g3d877d20414_3_159:notes"/>
+          <p:cNvPr id="197" name="Google Shape;197;g3d877d20414_3_141:notes"/>
           <p:cNvSpPr txBox="1"/>
           <p:nvPr>
             <p:ph idx="12" type="sldNum"/>
@@ -8093,13 +8251,13 @@
     <p:bg>
       <p:bgPr>
         <a:solidFill>
-          <a:srgbClr val="0F172A"/>
+          <a:srgbClr val="F8FAFC"/>
         </a:solidFill>
       </p:bgPr>
     </p:bg>
     <p:spTree>
       <p:nvGrpSpPr>
-        <p:cNvPr id="212" name="Shape 212"/>
+        <p:cNvPr id="217" name="Shape 217"/>
         <p:cNvGrpSpPr/>
         <p:nvPr/>
       </p:nvGrpSpPr>
@@ -8113,57 +8271,14 @@
       </p:grpSpPr>
       <p:sp>
         <p:nvSpPr>
-          <p:cNvPr id="213" name="Google Shape;213;p24"/>
+          <p:cNvPr id="218" name="Google Shape;218;p24"/>
           <p:cNvSpPr/>
           <p:nvPr/>
         </p:nvSpPr>
         <p:spPr>
           <a:xfrm>
-            <a:off x="0" y="0"/>
-            <a:ext cx="9144000" cy="137160"/>
-          </a:xfrm>
-          <a:prstGeom prst="rect">
-            <a:avLst/>
-          </a:prstGeom>
-          <a:solidFill>
-            <a:srgbClr val="DC2626"/>
-          </a:solidFill>
-          <a:ln>
-            <a:noFill/>
-          </a:ln>
-        </p:spPr>
-        <p:txBody>
-          <a:bodyPr anchorCtr="0" anchor="ctr" bIns="91425" lIns="91425" spcFirstLastPara="1" rIns="91425" wrap="square" tIns="91425">
-            <a:noAutofit/>
-          </a:bodyPr>
-          <a:lstStyle/>
-          <a:p>
-            <a:pPr indent="0" lvl="0" marL="0" rtl="0" algn="l">
-              <a:spcBef>
-                <a:spcPts val="0"/>
-              </a:spcBef>
-              <a:spcAft>
-                <a:spcPts val="0"/>
-              </a:spcAft>
-              <a:buNone/>
-            </a:pPr>
-            <a:r>
-              <a:t/>
-            </a:r>
-            <a:endParaRPr/>
-          </a:p>
-        </p:txBody>
-      </p:sp>
-      <p:sp>
-        <p:nvSpPr>
-          <p:cNvPr id="214" name="Google Shape;214;p24"/>
-          <p:cNvSpPr/>
-          <p:nvPr/>
-        </p:nvSpPr>
-        <p:spPr>
-          <a:xfrm>
-            <a:off x="457200" y="457200"/>
-            <a:ext cx="8229600" cy="320040"/>
+            <a:off x="457200" y="228600"/>
+            <a:ext cx="8229600" cy="274320"/>
           </a:xfrm>
           <a:prstGeom prst="rect">
             <a:avLst/>
@@ -8203,239 +8318,7 @@
                 <a:cs typeface="Arial"/>
                 <a:sym typeface="Arial"/>
               </a:rPr>
-              <a:t>NEXT STEPS</a:t>
-            </a:r>
-            <a:endParaRPr b="0" i="0" sz="1100" u="none" cap="none" strike="noStrike">
-              <a:solidFill>
-                <a:schemeClr val="dk1"/>
-              </a:solidFill>
-              <a:latin typeface="Calibri"/>
-              <a:ea typeface="Calibri"/>
-              <a:cs typeface="Calibri"/>
-              <a:sym typeface="Calibri"/>
-            </a:endParaRPr>
-          </a:p>
-        </p:txBody>
-      </p:sp>
-      <p:sp>
-        <p:nvSpPr>
-          <p:cNvPr id="215" name="Google Shape;215;p24"/>
-          <p:cNvSpPr/>
-          <p:nvPr/>
-        </p:nvSpPr>
-        <p:spPr>
-          <a:xfrm>
-            <a:off x="457200" y="777240"/>
-            <a:ext cx="8229600" cy="548640"/>
-          </a:xfrm>
-          <a:prstGeom prst="rect">
-            <a:avLst/>
-          </a:prstGeom>
-          <a:noFill/>
-          <a:ln>
-            <a:noFill/>
-          </a:ln>
-        </p:spPr>
-        <p:txBody>
-          <a:bodyPr anchorCtr="0" anchor="ctr" bIns="45700" lIns="91425" spcFirstLastPara="1" rIns="91425" wrap="square" tIns="45700">
-            <a:noAutofit/>
-          </a:bodyPr>
-          <a:lstStyle/>
-          <a:p>
-            <a:pPr indent="0" lvl="0" marL="0" marR="0" rtl="0" algn="l">
-              <a:spcBef>
-                <a:spcPts val="0"/>
-              </a:spcBef>
-              <a:spcAft>
-                <a:spcPts val="0"/>
-              </a:spcAft>
-              <a:buClr>
-                <a:srgbClr val="FFFFFF"/>
-              </a:buClr>
-              <a:buSzPts val="2400"/>
-              <a:buFont typeface="Arial Black"/>
-              <a:buNone/>
-            </a:pPr>
-            <a:r>
-              <a:rPr b="0" i="0" lang="en-GB" sz="2400" u="none" cap="none" strike="noStrike">
-                <a:solidFill>
-                  <a:srgbClr val="FFFFFF"/>
-                </a:solidFill>
-                <a:latin typeface="Arial Black"/>
-                <a:ea typeface="Arial Black"/>
-                <a:cs typeface="Arial Black"/>
-                <a:sym typeface="Arial Black"/>
-              </a:rPr>
-              <a:t>Stop the Bleed. Turn Data into Control.</a:t>
-            </a:r>
-            <a:endParaRPr b="0" i="0" sz="2400" u="none" cap="none" strike="noStrike">
-              <a:solidFill>
-                <a:schemeClr val="dk1"/>
-              </a:solidFill>
-              <a:latin typeface="Calibri"/>
-              <a:ea typeface="Calibri"/>
-              <a:cs typeface="Calibri"/>
-              <a:sym typeface="Calibri"/>
-            </a:endParaRPr>
-          </a:p>
-        </p:txBody>
-      </p:sp>
-      <p:sp>
-        <p:nvSpPr>
-          <p:cNvPr id="216" name="Google Shape;216;p24"/>
-          <p:cNvSpPr/>
-          <p:nvPr/>
-        </p:nvSpPr>
-        <p:spPr>
-          <a:xfrm>
-            <a:off x="457200" y="1463040"/>
-            <a:ext cx="1463040" cy="457200"/>
-          </a:xfrm>
-          <a:prstGeom prst="rect">
-            <a:avLst/>
-          </a:prstGeom>
-          <a:solidFill>
-            <a:srgbClr val="DC2626"/>
-          </a:solidFill>
-          <a:ln>
-            <a:noFill/>
-          </a:ln>
-        </p:spPr>
-        <p:txBody>
-          <a:bodyPr anchorCtr="0" anchor="ctr" bIns="91425" lIns="91425" spcFirstLastPara="1" rIns="91425" wrap="square" tIns="91425">
-            <a:noAutofit/>
-          </a:bodyPr>
-          <a:lstStyle/>
-          <a:p>
-            <a:pPr indent="0" lvl="0" marL="0" rtl="0" algn="l">
-              <a:spcBef>
-                <a:spcPts val="0"/>
-              </a:spcBef>
-              <a:spcAft>
-                <a:spcPts val="0"/>
-              </a:spcAft>
-              <a:buNone/>
-            </a:pPr>
-            <a:r>
-              <a:t/>
-            </a:r>
-            <a:endParaRPr/>
-          </a:p>
-        </p:txBody>
-      </p:sp>
-      <p:sp>
-        <p:nvSpPr>
-          <p:cNvPr id="217" name="Google Shape;217;p24"/>
-          <p:cNvSpPr/>
-          <p:nvPr/>
-        </p:nvSpPr>
-        <p:spPr>
-          <a:xfrm>
-            <a:off x="457200" y="1463040"/>
-            <a:ext cx="1463040" cy="457200"/>
-          </a:xfrm>
-          <a:prstGeom prst="rect">
-            <a:avLst/>
-          </a:prstGeom>
-          <a:noFill/>
-          <a:ln>
-            <a:noFill/>
-          </a:ln>
-        </p:spPr>
-        <p:txBody>
-          <a:bodyPr anchorCtr="0" anchor="ctr" bIns="45700" lIns="91425" spcFirstLastPara="1" rIns="91425" wrap="square" tIns="45700">
-            <a:noAutofit/>
-          </a:bodyPr>
-          <a:lstStyle/>
-          <a:p>
-            <a:pPr indent="0" lvl="0" marL="0" marR="0" rtl="0" algn="ctr">
-              <a:spcBef>
-                <a:spcPts val="0"/>
-              </a:spcBef>
-              <a:spcAft>
-                <a:spcPts val="0"/>
-              </a:spcAft>
-              <a:buClr>
-                <a:srgbClr val="FFFFFF"/>
-              </a:buClr>
-              <a:buSzPts val="900"/>
-              <a:buFont typeface="Arial Black"/>
-              <a:buNone/>
-            </a:pPr>
-            <a:r>
-              <a:rPr b="0" i="0" lang="en-GB" sz="900" u="none" cap="none" strike="noStrike">
-                <a:solidFill>
-                  <a:srgbClr val="FFFFFF"/>
-                </a:solidFill>
-                <a:latin typeface="Arial Black"/>
-                <a:ea typeface="Arial Black"/>
-                <a:cs typeface="Arial Black"/>
-                <a:sym typeface="Arial Black"/>
-              </a:rPr>
-              <a:t>THIS WEEK</a:t>
-            </a:r>
-            <a:endParaRPr b="0" i="0" sz="900" u="none" cap="none" strike="noStrike">
-              <a:solidFill>
-                <a:schemeClr val="dk1"/>
-              </a:solidFill>
-              <a:latin typeface="Calibri"/>
-              <a:ea typeface="Calibri"/>
-              <a:cs typeface="Calibri"/>
-              <a:sym typeface="Calibri"/>
-            </a:endParaRPr>
-          </a:p>
-        </p:txBody>
-      </p:sp>
-      <p:sp>
-        <p:nvSpPr>
-          <p:cNvPr id="218" name="Google Shape;218;p24"/>
-          <p:cNvSpPr/>
-          <p:nvPr/>
-        </p:nvSpPr>
-        <p:spPr>
-          <a:xfrm>
-            <a:off x="2103120" y="1508760"/>
-            <a:ext cx="6583680" cy="365760"/>
-          </a:xfrm>
-          <a:prstGeom prst="rect">
-            <a:avLst/>
-          </a:prstGeom>
-          <a:noFill/>
-          <a:ln>
-            <a:noFill/>
-          </a:ln>
-        </p:spPr>
-        <p:txBody>
-          <a:bodyPr anchorCtr="0" anchor="ctr" bIns="45700" lIns="91425" spcFirstLastPara="1" rIns="91425" wrap="square" tIns="45700">
-            <a:noAutofit/>
-          </a:bodyPr>
-          <a:lstStyle/>
-          <a:p>
-            <a:pPr indent="0" lvl="0" marL="0" marR="0" rtl="0" algn="l">
-              <a:spcBef>
-                <a:spcPts val="0"/>
-              </a:spcBef>
-              <a:spcAft>
-                <a:spcPts val="0"/>
-              </a:spcAft>
-              <a:buClr>
-                <a:srgbClr val="FFFFFF"/>
-              </a:buClr>
-              <a:buSzPts val="1100"/>
-              <a:buFont typeface="Arial"/>
-              <a:buNone/>
-            </a:pPr>
-            <a:r>
-              <a:rPr b="0" i="0" lang="en-GB" sz="1100" u="none" cap="none" strike="noStrike">
-                <a:solidFill>
-                  <a:srgbClr val="FFFFFF"/>
-                </a:solidFill>
-                <a:latin typeface="Arial"/>
-                <a:ea typeface="Arial"/>
-                <a:cs typeface="Arial"/>
-                <a:sym typeface="Arial"/>
-              </a:rPr>
-              <a:t>Form cross-functional task force (Ops + Finance + IT + Risk)</a:t>
+              <a:t>RECOMMENDATIONS</a:t>
             </a:r>
             <a:endParaRPr b="0" i="0" sz="1100" u="none" cap="none" strike="noStrike">
               <a:solidFill>
@@ -8457,8 +8340,71 @@
         </p:nvSpPr>
         <p:spPr>
           <a:xfrm>
-            <a:off x="457200" y="2057400"/>
-            <a:ext cx="1463040" cy="457200"/>
+            <a:off x="457200" y="457200"/>
+            <a:ext cx="8229600" cy="411480"/>
+          </a:xfrm>
+          <a:prstGeom prst="rect">
+            <a:avLst/>
+          </a:prstGeom>
+          <a:noFill/>
+          <a:ln>
+            <a:noFill/>
+          </a:ln>
+        </p:spPr>
+        <p:txBody>
+          <a:bodyPr anchorCtr="0" anchor="ctr" bIns="45700" lIns="91425" spcFirstLastPara="1" rIns="91425" wrap="square" tIns="45700">
+            <a:noAutofit/>
+          </a:bodyPr>
+          <a:lstStyle/>
+          <a:p>
+            <a:pPr indent="0" lvl="0" marL="0" marR="0" rtl="0" algn="l">
+              <a:spcBef>
+                <a:spcPts val="0"/>
+              </a:spcBef>
+              <a:spcAft>
+                <a:spcPts val="0"/>
+              </a:spcAft>
+              <a:buClr>
+                <a:srgbClr val="1E293B"/>
+              </a:buClr>
+              <a:buSzPts val="1800"/>
+              <a:buFont typeface="Arial Black"/>
+              <a:buNone/>
+            </a:pPr>
+            <a:r>
+              <a:rPr b="0" i="0" lang="en-GB" sz="1800" u="none" cap="none" strike="noStrike">
+                <a:solidFill>
+                  <a:srgbClr val="1E293B"/>
+                </a:solidFill>
+                <a:latin typeface="Arial Black"/>
+                <a:ea typeface="Arial Black"/>
+                <a:cs typeface="Arial Black"/>
+                <a:sym typeface="Arial Black"/>
+              </a:rPr>
+              <a:t>Ranked Action Plan with Owners &amp; Timelines</a:t>
+            </a:r>
+            <a:endParaRPr b="0" i="0" sz="1800" u="none" cap="none" strike="noStrike">
+              <a:solidFill>
+                <a:schemeClr val="dk1"/>
+              </a:solidFill>
+              <a:latin typeface="Calibri"/>
+              <a:ea typeface="Calibri"/>
+              <a:cs typeface="Calibri"/>
+              <a:sym typeface="Calibri"/>
+            </a:endParaRPr>
+          </a:p>
+        </p:txBody>
+      </p:sp>
+      <p:sp>
+        <p:nvSpPr>
+          <p:cNvPr id="220" name="Google Shape;220;p24"/>
+          <p:cNvSpPr/>
+          <p:nvPr/>
+        </p:nvSpPr>
+        <p:spPr>
+          <a:xfrm>
+            <a:off x="457200" y="914400"/>
+            <a:ext cx="8229600" cy="320040"/>
           </a:xfrm>
           <a:prstGeom prst="rect">
             <a:avLst/>
@@ -8494,77 +8440,14 @@
       </p:sp>
       <p:sp>
         <p:nvSpPr>
-          <p:cNvPr id="220" name="Google Shape;220;p24"/>
-          <p:cNvSpPr/>
-          <p:nvPr/>
-        </p:nvSpPr>
-        <p:spPr>
-          <a:xfrm>
-            <a:off x="457200" y="2057400"/>
-            <a:ext cx="1463040" cy="457200"/>
-          </a:xfrm>
-          <a:prstGeom prst="rect">
-            <a:avLst/>
-          </a:prstGeom>
-          <a:noFill/>
-          <a:ln>
-            <a:noFill/>
-          </a:ln>
-        </p:spPr>
-        <p:txBody>
-          <a:bodyPr anchorCtr="0" anchor="ctr" bIns="45700" lIns="91425" spcFirstLastPara="1" rIns="91425" wrap="square" tIns="45700">
-            <a:noAutofit/>
-          </a:bodyPr>
-          <a:lstStyle/>
-          <a:p>
-            <a:pPr indent="0" lvl="0" marL="0" marR="0" rtl="0" algn="ctr">
-              <a:spcBef>
-                <a:spcPts val="0"/>
-              </a:spcBef>
-              <a:spcAft>
-                <a:spcPts val="0"/>
-              </a:spcAft>
-              <a:buClr>
-                <a:srgbClr val="FFFFFF"/>
-              </a:buClr>
-              <a:buSzPts val="900"/>
-              <a:buFont typeface="Arial Black"/>
-              <a:buNone/>
-            </a:pPr>
-            <a:r>
-              <a:rPr b="0" i="0" lang="en-GB" sz="900" u="none" cap="none" strike="noStrike">
-                <a:solidFill>
-                  <a:srgbClr val="FFFFFF"/>
-                </a:solidFill>
-                <a:latin typeface="Arial Black"/>
-                <a:ea typeface="Arial Black"/>
-                <a:cs typeface="Arial Black"/>
-                <a:sym typeface="Arial Black"/>
-              </a:rPr>
-              <a:t>30 DAYS</a:t>
-            </a:r>
-            <a:endParaRPr b="0" i="0" sz="900" u="none" cap="none" strike="noStrike">
-              <a:solidFill>
-                <a:schemeClr val="dk1"/>
-              </a:solidFill>
-              <a:latin typeface="Calibri"/>
-              <a:ea typeface="Calibri"/>
-              <a:cs typeface="Calibri"/>
-              <a:sym typeface="Calibri"/>
-            </a:endParaRPr>
-          </a:p>
-        </p:txBody>
-      </p:sp>
-      <p:sp>
-        <p:nvSpPr>
           <p:cNvPr id="221" name="Google Shape;221;p24"/>
           <p:cNvSpPr/>
           <p:nvPr/>
         </p:nvSpPr>
         <p:spPr>
           <a:xfrm>
-            <a:off x="2103120" y="2103120"/>
-            <a:ext cx="6583680" cy="365760"/>
+            <a:off x="548640" y="932688"/>
+            <a:ext cx="8046720" cy="274320"/>
           </a:xfrm>
           <a:prstGeom prst="rect">
             <a:avLst/>
@@ -8590,12 +8473,12 @@
               <a:buClr>
                 <a:srgbClr val="FFFFFF"/>
               </a:buClr>
-              <a:buSzPts val="1100"/>
+              <a:buSzPts val="900"/>
               <a:buFont typeface="Arial"/>
               <a:buNone/>
             </a:pPr>
             <a:r>
-              <a:rPr b="0" i="0" lang="en-GB" sz="1100" u="none" cap="none" strike="noStrike">
+              <a:rPr b="1" i="0" lang="en-GB" sz="900" u="none" cap="none" strike="noStrike">
                 <a:solidFill>
                   <a:srgbClr val="FFFFFF"/>
                 </a:solidFill>
@@ -8604,9 +8487,9 @@
                 <a:cs typeface="Arial"/>
                 <a:sym typeface="Arial"/>
               </a:rPr>
-              <a:t>Clean top 20% of aged-stuck value by $ impact</a:t>
+              <a:t>PRIORITY 1 — IMMEDIATE (30 DAYS)</a:t>
             </a:r>
-            <a:endParaRPr b="0" i="0" sz="1100" u="none" cap="none" strike="noStrike">
+            <a:endParaRPr b="0" i="0" sz="900" u="none" cap="none" strike="noStrike">
               <a:solidFill>
                 <a:schemeClr val="dk1"/>
               </a:solidFill>
@@ -8626,114 +8509,8 @@
         </p:nvSpPr>
         <p:spPr>
           <a:xfrm>
-            <a:off x="457200" y="2651760"/>
-            <a:ext cx="1463040" cy="457200"/>
-          </a:xfrm>
-          <a:prstGeom prst="rect">
-            <a:avLst/>
-          </a:prstGeom>
-          <a:solidFill>
-            <a:srgbClr val="DC2626"/>
-          </a:solidFill>
-          <a:ln>
-            <a:noFill/>
-          </a:ln>
-        </p:spPr>
-        <p:txBody>
-          <a:bodyPr anchorCtr="0" anchor="ctr" bIns="91425" lIns="91425" spcFirstLastPara="1" rIns="91425" wrap="square" tIns="91425">
-            <a:noAutofit/>
-          </a:bodyPr>
-          <a:lstStyle/>
-          <a:p>
-            <a:pPr indent="0" lvl="0" marL="0" rtl="0" algn="l">
-              <a:spcBef>
-                <a:spcPts val="0"/>
-              </a:spcBef>
-              <a:spcAft>
-                <a:spcPts val="0"/>
-              </a:spcAft>
-              <a:buNone/>
-            </a:pPr>
-            <a:r>
-              <a:t/>
-            </a:r>
-            <a:endParaRPr/>
-          </a:p>
-        </p:txBody>
-      </p:sp>
-      <p:sp>
-        <p:nvSpPr>
-          <p:cNvPr id="223" name="Google Shape;223;p24"/>
-          <p:cNvSpPr/>
-          <p:nvPr/>
-        </p:nvSpPr>
-        <p:spPr>
-          <a:xfrm>
-            <a:off x="457200" y="2651760"/>
-            <a:ext cx="1463040" cy="457200"/>
-          </a:xfrm>
-          <a:prstGeom prst="rect">
-            <a:avLst/>
-          </a:prstGeom>
-          <a:noFill/>
-          <a:ln>
-            <a:noFill/>
-          </a:ln>
-        </p:spPr>
-        <p:txBody>
-          <a:bodyPr anchorCtr="0" anchor="ctr" bIns="45700" lIns="91425" spcFirstLastPara="1" rIns="91425" wrap="square" tIns="45700">
-            <a:noAutofit/>
-          </a:bodyPr>
-          <a:lstStyle/>
-          <a:p>
-            <a:pPr indent="0" lvl="0" marL="0" marR="0" rtl="0" algn="ctr">
-              <a:spcBef>
-                <a:spcPts val="0"/>
-              </a:spcBef>
-              <a:spcAft>
-                <a:spcPts val="0"/>
-              </a:spcAft>
-              <a:buClr>
-                <a:srgbClr val="FFFFFF"/>
-              </a:buClr>
-              <a:buSzPts val="900"/>
-              <a:buFont typeface="Arial Black"/>
-              <a:buNone/>
-            </a:pPr>
-            <a:r>
-              <a:rPr b="0" i="0" lang="en-GB" sz="900" u="none" cap="none" strike="noStrike">
-                <a:solidFill>
-                  <a:srgbClr val="FFFFFF"/>
-                </a:solidFill>
-                <a:latin typeface="Arial Black"/>
-                <a:ea typeface="Arial Black"/>
-                <a:cs typeface="Arial Black"/>
-                <a:sym typeface="Arial Black"/>
-              </a:rPr>
-              <a:t>60 DAYS</a:t>
-            </a:r>
-            <a:endParaRPr b="0" i="0" sz="900" u="none" cap="none" strike="noStrike">
-              <a:solidFill>
-                <a:schemeClr val="dk1"/>
-              </a:solidFill>
-              <a:latin typeface="Calibri"/>
-              <a:ea typeface="Calibri"/>
-              <a:cs typeface="Calibri"/>
-              <a:sym typeface="Calibri"/>
-            </a:endParaRPr>
-          </a:p>
-        </p:txBody>
-      </p:sp>
-      <p:sp>
-        <p:nvSpPr>
-          <p:cNvPr id="224" name="Google Shape;224;p24"/>
-          <p:cNvSpPr/>
-          <p:nvPr/>
-        </p:nvSpPr>
-        <p:spPr>
-          <a:xfrm>
-            <a:off x="2103120" y="2697480"/>
-            <a:ext cx="6583680" cy="365760"/>
+            <a:off x="457200" y="1280160"/>
+            <a:ext cx="8229600" cy="1463040"/>
           </a:xfrm>
           <a:prstGeom prst="rect">
             <a:avLst/>
@@ -8750,6 +8527,9 @@
           <a:lstStyle/>
           <a:p>
             <a:pPr indent="0" lvl="0" marL="0" marR="0" rtl="0" algn="l">
+              <a:lnSpc>
+                <a:spcPct val="133333"/>
+              </a:lnSpc>
               <a:spcBef>
                 <a:spcPts val="0"/>
               </a:spcBef>
@@ -8757,25 +8537,282 @@
                 <a:spcPts val="0"/>
               </a:spcAft>
               <a:buClr>
-                <a:srgbClr val="FFFFFF"/>
+                <a:srgbClr val="1E293B"/>
               </a:buClr>
-              <a:buSzPts val="1100"/>
+              <a:buSzPts val="900"/>
               <a:buFont typeface="Arial"/>
               <a:buNone/>
             </a:pPr>
             <a:r>
-              <a:rPr b="0" i="0" lang="en-GB" sz="1100" u="none" cap="none" strike="noStrike">
+              <a:rPr b="1" i="0" lang="en-GB" sz="900" u="none" cap="none" strike="noStrike">
                 <a:solidFill>
-                  <a:srgbClr val="FFFFFF"/>
+                  <a:srgbClr val="1E293B"/>
                 </a:solidFill>
                 <a:latin typeface="Arial"/>
                 <a:ea typeface="Arial"/>
                 <a:cs typeface="Arial"/>
                 <a:sym typeface="Arial"/>
               </a:rPr>
-              <a:t>Full escalation framework + mandatory status policy live</a:t>
+              <a:t>Mandatory real-time status updates</a:t>
             </a:r>
-            <a:endParaRPr b="0" i="0" sz="1100" u="none" cap="none" strike="noStrike">
+            <a:endParaRPr b="0" i="0" sz="900" u="none" cap="none" strike="noStrike">
+              <a:solidFill>
+                <a:schemeClr val="dk1"/>
+              </a:solidFill>
+              <a:latin typeface="Calibri"/>
+              <a:ea typeface="Calibri"/>
+              <a:cs typeface="Calibri"/>
+              <a:sym typeface="Calibri"/>
+            </a:endParaRPr>
+          </a:p>
+          <a:p>
+            <a:pPr indent="0" lvl="0" marL="0" marR="0" rtl="0" algn="l">
+              <a:lnSpc>
+                <a:spcPct val="133333"/>
+              </a:lnSpc>
+              <a:spcBef>
+                <a:spcPts val="0"/>
+              </a:spcBef>
+              <a:spcAft>
+                <a:spcPts val="0"/>
+              </a:spcAft>
+              <a:buClr>
+                <a:srgbClr val="1E293B"/>
+              </a:buClr>
+              <a:buSzPts val="900"/>
+              <a:buFont typeface="Arial"/>
+              <a:buNone/>
+            </a:pPr>
+            <a:r>
+              <a:rPr b="0" i="0" lang="en-GB" sz="900" u="none" cap="none" strike="noStrike">
+                <a:solidFill>
+                  <a:srgbClr val="1E293B"/>
+                </a:solidFill>
+                <a:latin typeface="Arial"/>
+                <a:ea typeface="Arial"/>
+                <a:cs typeface="Arial"/>
+                <a:sym typeface="Arial"/>
+              </a:rPr>
+              <a:t>Require fulfillment teams to update every order to 'payment received/cleared' before any shipment leaves the warehouse. No exceptions. Owner: Ops + Finance. Impact: Stops the blind spot at source.</a:t>
+            </a:r>
+            <a:endParaRPr b="0" i="0" sz="900" u="none" cap="none" strike="noStrike">
+              <a:solidFill>
+                <a:schemeClr val="dk1"/>
+              </a:solidFill>
+              <a:latin typeface="Calibri"/>
+              <a:ea typeface="Calibri"/>
+              <a:cs typeface="Calibri"/>
+              <a:sym typeface="Calibri"/>
+            </a:endParaRPr>
+          </a:p>
+          <a:p>
+            <a:pPr indent="0" lvl="0" marL="0" marR="0" rtl="0" algn="l">
+              <a:lnSpc>
+                <a:spcPct val="133333"/>
+              </a:lnSpc>
+              <a:spcBef>
+                <a:spcPts val="0"/>
+              </a:spcBef>
+              <a:spcAft>
+                <a:spcPts val="0"/>
+              </a:spcAft>
+              <a:buClr>
+                <a:schemeClr val="dk1"/>
+              </a:buClr>
+              <a:buSzPts val="900"/>
+              <a:buFont typeface="Calibri"/>
+              <a:buNone/>
+            </a:pPr>
+            <a:r>
+              <a:t/>
+            </a:r>
+            <a:endParaRPr b="0" i="0" sz="900" u="none" cap="none" strike="noStrike">
+              <a:solidFill>
+                <a:schemeClr val="dk1"/>
+              </a:solidFill>
+              <a:latin typeface="Calibri"/>
+              <a:ea typeface="Calibri"/>
+              <a:cs typeface="Calibri"/>
+              <a:sym typeface="Calibri"/>
+            </a:endParaRPr>
+          </a:p>
+          <a:p>
+            <a:pPr indent="0" lvl="0" marL="0" marR="0" rtl="0" algn="l">
+              <a:lnSpc>
+                <a:spcPct val="133333"/>
+              </a:lnSpc>
+              <a:spcBef>
+                <a:spcPts val="0"/>
+              </a:spcBef>
+              <a:spcAft>
+                <a:spcPts val="0"/>
+              </a:spcAft>
+              <a:buClr>
+                <a:srgbClr val="1E293B"/>
+              </a:buClr>
+              <a:buSzPts val="900"/>
+              <a:buFont typeface="Arial"/>
+              <a:buNone/>
+            </a:pPr>
+            <a:r>
+              <a:rPr b="1" i="0" lang="en-GB" sz="900" u="none" cap="none" strike="noStrike">
+                <a:solidFill>
+                  <a:srgbClr val="1E293B"/>
+                </a:solidFill>
+                <a:latin typeface="Arial"/>
+                <a:ea typeface="Arial"/>
+                <a:cs typeface="Arial"/>
+                <a:sym typeface="Arial"/>
+              </a:rPr>
+              <a:t>Auto-cancellation triggers for aged orders</a:t>
+            </a:r>
+            <a:endParaRPr b="0" i="0" sz="900" u="none" cap="none" strike="noStrike">
+              <a:solidFill>
+                <a:schemeClr val="dk1"/>
+              </a:solidFill>
+              <a:latin typeface="Calibri"/>
+              <a:ea typeface="Calibri"/>
+              <a:cs typeface="Calibri"/>
+              <a:sym typeface="Calibri"/>
+            </a:endParaRPr>
+          </a:p>
+          <a:p>
+            <a:pPr indent="0" lvl="0" marL="0" marR="0" rtl="0" algn="l">
+              <a:lnSpc>
+                <a:spcPct val="133333"/>
+              </a:lnSpc>
+              <a:spcBef>
+                <a:spcPts val="0"/>
+              </a:spcBef>
+              <a:spcAft>
+                <a:spcPts val="0"/>
+              </a:spcAft>
+              <a:buClr>
+                <a:srgbClr val="1E293B"/>
+              </a:buClr>
+              <a:buSzPts val="900"/>
+              <a:buFont typeface="Arial"/>
+              <a:buNone/>
+            </a:pPr>
+            <a:r>
+              <a:rPr b="0" i="0" lang="en-GB" sz="900" u="none" cap="none" strike="noStrike">
+                <a:solidFill>
+                  <a:srgbClr val="1E293B"/>
+                </a:solidFill>
+                <a:latin typeface="Arial"/>
+                <a:ea typeface="Arial"/>
+                <a:cs typeface="Arial"/>
+                <a:sym typeface="Arial"/>
+              </a:rPr>
+              <a:t>Auto-flag or cancel orders stuck &gt;30/60/90 days in pending/on-hold/suspected fraud. Frees $2M+ working capital. Owner: IT + Finance. Impact: Cleans data model, reduces fraud exposure.</a:t>
+            </a:r>
+            <a:endParaRPr b="0" i="0" sz="900" u="none" cap="none" strike="noStrike">
+              <a:solidFill>
+                <a:schemeClr val="dk1"/>
+              </a:solidFill>
+              <a:latin typeface="Calibri"/>
+              <a:ea typeface="Calibri"/>
+              <a:cs typeface="Calibri"/>
+              <a:sym typeface="Calibri"/>
+            </a:endParaRPr>
+          </a:p>
+        </p:txBody>
+      </p:sp>
+      <p:sp>
+        <p:nvSpPr>
+          <p:cNvPr id="223" name="Google Shape;223;p24"/>
+          <p:cNvSpPr/>
+          <p:nvPr/>
+        </p:nvSpPr>
+        <p:spPr>
+          <a:xfrm>
+            <a:off x="457200" y="2834640"/>
+            <a:ext cx="8229600" cy="320040"/>
+          </a:xfrm>
+          <a:prstGeom prst="rect">
+            <a:avLst/>
+          </a:prstGeom>
+          <a:solidFill>
+            <a:srgbClr val="F59E0B"/>
+          </a:solidFill>
+          <a:ln>
+            <a:noFill/>
+          </a:ln>
+        </p:spPr>
+        <p:txBody>
+          <a:bodyPr anchorCtr="0" anchor="ctr" bIns="91425" lIns="91425" spcFirstLastPara="1" rIns="91425" wrap="square" tIns="91425">
+            <a:noAutofit/>
+          </a:bodyPr>
+          <a:lstStyle/>
+          <a:p>
+            <a:pPr indent="0" lvl="0" marL="0" rtl="0" algn="l">
+              <a:spcBef>
+                <a:spcPts val="0"/>
+              </a:spcBef>
+              <a:spcAft>
+                <a:spcPts val="0"/>
+              </a:spcAft>
+              <a:buNone/>
+            </a:pPr>
+            <a:r>
+              <a:t/>
+            </a:r>
+            <a:endParaRPr/>
+          </a:p>
+        </p:txBody>
+      </p:sp>
+      <p:sp>
+        <p:nvSpPr>
+          <p:cNvPr id="224" name="Google Shape;224;p24"/>
+          <p:cNvSpPr/>
+          <p:nvPr/>
+        </p:nvSpPr>
+        <p:spPr>
+          <a:xfrm>
+            <a:off x="548640" y="2852928"/>
+            <a:ext cx="8046720" cy="274320"/>
+          </a:xfrm>
+          <a:prstGeom prst="rect">
+            <a:avLst/>
+          </a:prstGeom>
+          <a:noFill/>
+          <a:ln>
+            <a:noFill/>
+          </a:ln>
+        </p:spPr>
+        <p:txBody>
+          <a:bodyPr anchorCtr="0" anchor="ctr" bIns="45700" lIns="91425" spcFirstLastPara="1" rIns="91425" wrap="square" tIns="45700">
+            <a:noAutofit/>
+          </a:bodyPr>
+          <a:lstStyle/>
+          <a:p>
+            <a:pPr indent="0" lvl="0" marL="0" marR="0" rtl="0" algn="l">
+              <a:spcBef>
+                <a:spcPts val="0"/>
+              </a:spcBef>
+              <a:spcAft>
+                <a:spcPts val="0"/>
+              </a:spcAft>
+              <a:buClr>
+                <a:srgbClr val="1E293B"/>
+              </a:buClr>
+              <a:buSzPts val="900"/>
+              <a:buFont typeface="Arial"/>
+              <a:buNone/>
+            </a:pPr>
+            <a:r>
+              <a:rPr b="1" i="0" lang="en-GB" sz="900" u="none" cap="none" strike="noStrike">
+                <a:solidFill>
+                  <a:srgbClr val="1E293B"/>
+                </a:solidFill>
+                <a:latin typeface="Arial"/>
+                <a:ea typeface="Arial"/>
+                <a:cs typeface="Arial"/>
+                <a:sym typeface="Arial"/>
+              </a:rPr>
+              <a:t>PRIORITY 2 — 45 DAYS</a:t>
+            </a:r>
+            <a:endParaRPr b="0" i="0" sz="900" u="none" cap="none" strike="noStrike">
               <a:solidFill>
                 <a:schemeClr val="dk1"/>
               </a:solidFill>
@@ -8795,114 +8832,8 @@
         </p:nvSpPr>
         <p:spPr>
           <a:xfrm>
-            <a:off x="457200" y="3246120"/>
-            <a:ext cx="1463040" cy="457200"/>
-          </a:xfrm>
-          <a:prstGeom prst="rect">
-            <a:avLst/>
-          </a:prstGeom>
-          <a:solidFill>
-            <a:srgbClr val="DC2626"/>
-          </a:solidFill>
-          <a:ln>
-            <a:noFill/>
-          </a:ln>
-        </p:spPr>
-        <p:txBody>
-          <a:bodyPr anchorCtr="0" anchor="ctr" bIns="91425" lIns="91425" spcFirstLastPara="1" rIns="91425" wrap="square" tIns="91425">
-            <a:noAutofit/>
-          </a:bodyPr>
-          <a:lstStyle/>
-          <a:p>
-            <a:pPr indent="0" lvl="0" marL="0" rtl="0" algn="l">
-              <a:spcBef>
-                <a:spcPts val="0"/>
-              </a:spcBef>
-              <a:spcAft>
-                <a:spcPts val="0"/>
-              </a:spcAft>
-              <a:buNone/>
-            </a:pPr>
-            <a:r>
-              <a:t/>
-            </a:r>
-            <a:endParaRPr/>
-          </a:p>
-        </p:txBody>
-      </p:sp>
-      <p:sp>
-        <p:nvSpPr>
-          <p:cNvPr id="226" name="Google Shape;226;p24"/>
-          <p:cNvSpPr/>
-          <p:nvPr/>
-        </p:nvSpPr>
-        <p:spPr>
-          <a:xfrm>
-            <a:off x="457200" y="3246120"/>
-            <a:ext cx="1463040" cy="457200"/>
-          </a:xfrm>
-          <a:prstGeom prst="rect">
-            <a:avLst/>
-          </a:prstGeom>
-          <a:noFill/>
-          <a:ln>
-            <a:noFill/>
-          </a:ln>
-        </p:spPr>
-        <p:txBody>
-          <a:bodyPr anchorCtr="0" anchor="ctr" bIns="45700" lIns="91425" spcFirstLastPara="1" rIns="91425" wrap="square" tIns="45700">
-            <a:noAutofit/>
-          </a:bodyPr>
-          <a:lstStyle/>
-          <a:p>
-            <a:pPr indent="0" lvl="0" marL="0" marR="0" rtl="0" algn="ctr">
-              <a:spcBef>
-                <a:spcPts val="0"/>
-              </a:spcBef>
-              <a:spcAft>
-                <a:spcPts val="0"/>
-              </a:spcAft>
-              <a:buClr>
-                <a:srgbClr val="FFFFFF"/>
-              </a:buClr>
-              <a:buSzPts val="900"/>
-              <a:buFont typeface="Arial Black"/>
-              <a:buNone/>
-            </a:pPr>
-            <a:r>
-              <a:rPr b="0" i="0" lang="en-GB" sz="900" u="none" cap="none" strike="noStrike">
-                <a:solidFill>
-                  <a:srgbClr val="FFFFFF"/>
-                </a:solidFill>
-                <a:latin typeface="Arial Black"/>
-                <a:ea typeface="Arial Black"/>
-                <a:cs typeface="Arial Black"/>
-                <a:sym typeface="Arial Black"/>
-              </a:rPr>
-              <a:t>90 DAYS</a:t>
-            </a:r>
-            <a:endParaRPr b="0" i="0" sz="900" u="none" cap="none" strike="noStrike">
-              <a:solidFill>
-                <a:schemeClr val="dk1"/>
-              </a:solidFill>
-              <a:latin typeface="Calibri"/>
-              <a:ea typeface="Calibri"/>
-              <a:cs typeface="Calibri"/>
-              <a:sym typeface="Calibri"/>
-            </a:endParaRPr>
-          </a:p>
-        </p:txBody>
-      </p:sp>
-      <p:sp>
-        <p:nvSpPr>
-          <p:cNvPr id="227" name="Google Shape;227;p24"/>
-          <p:cNvSpPr/>
-          <p:nvPr/>
-        </p:nvSpPr>
-        <p:spPr>
-          <a:xfrm>
-            <a:off x="2103120" y="3291840"/>
-            <a:ext cx="6583800" cy="365700"/>
+            <a:off x="457200" y="3200400"/>
+            <a:ext cx="8229600" cy="1554480"/>
           </a:xfrm>
           <a:prstGeom prst="rect">
             <a:avLst/>
@@ -8919,6 +8850,9 @@
           <a:lstStyle/>
           <a:p>
             <a:pPr indent="0" lvl="0" marL="0" marR="0" rtl="0" algn="l">
+              <a:lnSpc>
+                <a:spcPct val="133333"/>
+              </a:lnSpc>
               <a:spcBef>
                 <a:spcPts val="0"/>
               </a:spcBef>
@@ -8926,25 +8860,25 @@
                 <a:spcPts val="0"/>
               </a:spcAft>
               <a:buClr>
-                <a:srgbClr val="FFFFFF"/>
+                <a:srgbClr val="1E293B"/>
               </a:buClr>
-              <a:buSzPts val="1100"/>
+              <a:buSzPts val="900"/>
               <a:buFont typeface="Arial"/>
               <a:buNone/>
             </a:pPr>
             <a:r>
-              <a:rPr b="0" i="0" lang="en-GB" sz="1100" u="none" cap="none" strike="noStrike">
+              <a:rPr b="1" i="0" lang="en-GB" sz="900" u="none" cap="none" strike="noStrike">
                 <a:solidFill>
-                  <a:srgbClr val="FFFFFF"/>
+                  <a:srgbClr val="1E293B"/>
                 </a:solidFill>
                 <a:latin typeface="Arial"/>
                 <a:ea typeface="Arial"/>
                 <a:cs typeface="Arial"/>
                 <a:sym typeface="Arial"/>
               </a:rPr>
-              <a:t>Re-audit P&amp;L with stable unit cost baseline; measure late rate reduction</a:t>
+              <a:t>Tiered escalation framework</a:t>
             </a:r>
-            <a:endParaRPr b="0" i="0" sz="1100" u="none" cap="none" strike="noStrike">
+            <a:endParaRPr b="0" i="0" sz="900" u="none" cap="none" strike="noStrike">
               <a:solidFill>
                 <a:schemeClr val="dk1"/>
               </a:solidFill>
@@ -8954,34 +8888,11 @@
               <a:sym typeface="Calibri"/>
             </a:endParaRPr>
           </a:p>
-        </p:txBody>
-      </p:sp>
-      <p:sp>
-        <p:nvSpPr>
-          <p:cNvPr id="228" name="Google Shape;228;p24"/>
-          <p:cNvSpPr/>
-          <p:nvPr/>
-        </p:nvSpPr>
-        <p:spPr>
-          <a:xfrm>
-            <a:off x="457200" y="3931920"/>
-            <a:ext cx="8229600" cy="365760"/>
-          </a:xfrm>
-          <a:prstGeom prst="rect">
-            <a:avLst/>
-          </a:prstGeom>
-          <a:noFill/>
-          <a:ln>
-            <a:noFill/>
-          </a:ln>
-        </p:spPr>
-        <p:txBody>
-          <a:bodyPr anchorCtr="0" anchor="ctr" bIns="45700" lIns="91425" spcFirstLastPara="1" rIns="91425" wrap="square" tIns="45700">
-            <a:noAutofit/>
-          </a:bodyPr>
-          <a:lstStyle/>
           <a:p>
             <a:pPr indent="0" lvl="0" marL="0" marR="0" rtl="0" algn="l">
+              <a:lnSpc>
+                <a:spcPct val="133333"/>
+              </a:lnSpc>
               <a:spcBef>
                 <a:spcPts val="0"/>
               </a:spcBef>
@@ -8989,45 +8900,25 @@
                 <a:spcPts val="0"/>
               </a:spcAft>
               <a:buClr>
-                <a:srgbClr val="DC2626"/>
+                <a:srgbClr val="1E293B"/>
               </a:buClr>
-              <a:buSzPts val="1100"/>
+              <a:buSzPts val="900"/>
               <a:buFont typeface="Arial"/>
               <a:buNone/>
             </a:pPr>
             <a:r>
-              <a:rPr b="0" i="1" lang="en-GB" sz="1100" u="none" cap="none" strike="noStrike">
+              <a:rPr b="0" i="0" lang="en-GB" sz="900" u="none" cap="none" strike="noStrike">
                 <a:solidFill>
-                  <a:srgbClr val="DC2626"/>
+                  <a:srgbClr val="1E293B"/>
                 </a:solidFill>
                 <a:latin typeface="Arial"/>
                 <a:ea typeface="Arial"/>
                 <a:cs typeface="Arial"/>
                 <a:sym typeface="Arial"/>
               </a:rPr>
-              <a:t>The data model is currently lying to </a:t>
+              <a:t>2-day: warehouse reminder → 3-day: manager notification → 4-day: district manager escalation. Targets the 23.68% in the 2–4 day window. Owner: Site Ops. Impact: Cuts late shipments, protects customer experience.</a:t>
             </a:r>
-            <a:r>
-              <a:rPr i="1" lang="en-GB" sz="1100">
-                <a:solidFill>
-                  <a:srgbClr val="DC2626"/>
-                </a:solidFill>
-              </a:rPr>
-              <a:t>us</a:t>
-            </a:r>
-            <a:r>
-              <a:rPr b="0" i="1" lang="en-GB" sz="1100" u="none" cap="none" strike="noStrike">
-                <a:solidFill>
-                  <a:srgbClr val="DC2626"/>
-                </a:solidFill>
-                <a:latin typeface="Arial"/>
-                <a:ea typeface="Arial"/>
-                <a:cs typeface="Arial"/>
-                <a:sym typeface="Arial"/>
-              </a:rPr>
-              <a:t>. Every day of delay costs real money and real trust.</a:t>
-            </a:r>
-            <a:endParaRPr b="0" i="0" sz="1100" u="none" cap="none" strike="noStrike">
+            <a:endParaRPr b="0" i="0" sz="900" u="none" cap="none" strike="noStrike">
               <a:solidFill>
                 <a:schemeClr val="dk1"/>
               </a:solidFill>
@@ -9037,34 +8928,11 @@
               <a:sym typeface="Calibri"/>
             </a:endParaRPr>
           </a:p>
-        </p:txBody>
-      </p:sp>
-      <p:sp>
-        <p:nvSpPr>
-          <p:cNvPr id="229" name="Google Shape;229;p24"/>
-          <p:cNvSpPr/>
-          <p:nvPr/>
-        </p:nvSpPr>
-        <p:spPr>
-          <a:xfrm>
-            <a:off x="457200" y="4389120"/>
-            <a:ext cx="8229600" cy="365760"/>
-          </a:xfrm>
-          <a:prstGeom prst="rect">
-            <a:avLst/>
-          </a:prstGeom>
-          <a:noFill/>
-          <a:ln>
-            <a:noFill/>
-          </a:ln>
-        </p:spPr>
-        <p:txBody>
-          <a:bodyPr anchorCtr="0" anchor="ctr" bIns="45700" lIns="91425" spcFirstLastPara="1" rIns="91425" wrap="square" tIns="45700">
-            <a:noAutofit/>
-          </a:bodyPr>
-          <a:lstStyle/>
           <a:p>
             <a:pPr indent="0" lvl="0" marL="0" marR="0" rtl="0" algn="l">
+              <a:lnSpc>
+                <a:spcPct val="133333"/>
+              </a:lnSpc>
               <a:spcBef>
                 <a:spcPts val="0"/>
               </a:spcBef>
@@ -9072,25 +8940,96 @@
                 <a:spcPts val="0"/>
               </a:spcAft>
               <a:buClr>
-                <a:srgbClr val="FFFFFF"/>
+                <a:schemeClr val="dk1"/>
               </a:buClr>
-              <a:buSzPts val="1400"/>
-              <a:buFont typeface="Arial Black"/>
+              <a:buSzPts val="900"/>
+              <a:buFont typeface="Calibri"/>
               <a:buNone/>
             </a:pPr>
             <a:r>
-              <a:rPr b="0" i="0" lang="en-GB" sz="1400" u="none" cap="none" strike="noStrike">
+              <a:t/>
+            </a:r>
+            <a:endParaRPr b="0" i="0" sz="900" u="none" cap="none" strike="noStrike">
+              <a:solidFill>
+                <a:schemeClr val="dk1"/>
+              </a:solidFill>
+              <a:latin typeface="Calibri"/>
+              <a:ea typeface="Calibri"/>
+              <a:cs typeface="Calibri"/>
+              <a:sym typeface="Calibri"/>
+            </a:endParaRPr>
+          </a:p>
+          <a:p>
+            <a:pPr indent="0" lvl="0" marL="0" marR="0" rtl="0" algn="l">
+              <a:lnSpc>
+                <a:spcPct val="133333"/>
+              </a:lnSpc>
+              <a:spcBef>
+                <a:spcPts val="0"/>
+              </a:spcBef>
+              <a:spcAft>
+                <a:spcPts val="0"/>
+              </a:spcAft>
+              <a:buClr>
+                <a:srgbClr val="1E293B"/>
+              </a:buClr>
+              <a:buSzPts val="900"/>
+              <a:buFont typeface="Arial"/>
+              <a:buNone/>
+            </a:pPr>
+            <a:r>
+              <a:rPr b="1" i="0" lang="en-GB" sz="900" u="none" cap="none" strike="noStrike">
                 <a:solidFill>
-                  <a:srgbClr val="FFFFFF"/>
+                  <a:srgbClr val="1E293B"/>
                 </a:solidFill>
-                <a:latin typeface="Arial Black"/>
-                <a:ea typeface="Arial Black"/>
-                <a:cs typeface="Arial Black"/>
-                <a:sym typeface="Arial Black"/>
+                <a:latin typeface="Arial"/>
+                <a:ea typeface="Arial"/>
+                <a:cs typeface="Arial"/>
+                <a:sym typeface="Arial"/>
               </a:rPr>
-              <a:t>Let's schedule the kickoff.</a:t>
+              <a:t>Deprioritize/restrict First Class for high-bleed categories</a:t>
             </a:r>
-            <a:endParaRPr b="0" i="0" sz="1400" u="none" cap="none" strike="noStrike">
+            <a:endParaRPr b="0" i="0" sz="900" u="none" cap="none" strike="noStrike">
+              <a:solidFill>
+                <a:schemeClr val="dk1"/>
+              </a:solidFill>
+              <a:latin typeface="Calibri"/>
+              <a:ea typeface="Calibri"/>
+              <a:cs typeface="Calibri"/>
+              <a:sym typeface="Calibri"/>
+            </a:endParaRPr>
+          </a:p>
+          <a:p>
+            <a:pPr indent="0" lvl="0" marL="0" marR="0" rtl="0" algn="l">
+              <a:lnSpc>
+                <a:spcPct val="133333"/>
+              </a:lnSpc>
+              <a:spcBef>
+                <a:spcPts val="0"/>
+              </a:spcBef>
+              <a:spcAft>
+                <a:spcPts val="0"/>
+              </a:spcAft>
+              <a:buClr>
+                <a:srgbClr val="1E293B"/>
+              </a:buClr>
+              <a:buSzPts val="900"/>
+              <a:buFont typeface="Arial"/>
+              <a:buNone/>
+            </a:pPr>
+            <a:r>
+              <a:rPr b="0" i="0" lang="en-GB" sz="900" u="none" cap="none" strike="noStrike">
+                <a:solidFill>
+                  <a:srgbClr val="1E293B"/>
+                </a:solidFill>
+                <a:latin typeface="Arial"/>
+                <a:ea typeface="Arial"/>
+                <a:cs typeface="Arial"/>
+                <a:sym typeface="Arial"/>
+              </a:rPr>
+              <a:t>Immediately limit First Class for Fishing, Cleats, Camping &amp; Hiking (highest failure categories). Owner: Logistics. Impact: Kills 95%+ late rate on premium service.</a:t>
+            </a:r>
+            <a:endParaRPr b="0" i="0" sz="900" u="none" cap="none" strike="noStrike">
               <a:solidFill>
                 <a:schemeClr val="dk1"/>
               </a:solidFill>
@@ -9107,6 +9046,9 @@
   <p:clrMapOvr>
     <a:masterClrMapping/>
   </p:clrMapOvr>
+  <p:transition spd="med">
+    <p:push/>
+  </p:transition>
   <p:timing>
     <p:tnLst>
       <p:par>
@@ -9115,109 +9057,6 @@
             <p:seq concurrent="1" nextAc="seek">
               <p:cTn dur="indefinite" id="2" nodeType="mainSeq">
                 <p:childTnLst>
-                  <p:par>
-                    <p:cTn fill="hold">
-                      <p:stCondLst>
-                        <p:cond delay="indefinite"/>
-                      </p:stCondLst>
-                      <p:childTnLst>
-                        <p:par>
-                          <p:cTn fill="hold">
-                            <p:stCondLst>
-                              <p:cond delay="0"/>
-                            </p:stCondLst>
-                            <p:childTnLst>
-                              <p:par>
-                                <p:cTn fill="hold" nodeType="clickEffect" presetClass="entr" presetID="10" presetSubtype="0">
-                                  <p:stCondLst>
-                                    <p:cond delay="0"/>
-                                  </p:stCondLst>
-                                  <p:childTnLst>
-                                    <p:set>
-                                      <p:cBhvr>
-                                        <p:cTn dur="1" fill="hold">
-                                          <p:stCondLst>
-                                            <p:cond delay="0"/>
-                                          </p:stCondLst>
-                                        </p:cTn>
-                                        <p:tgtEl>
-                                          <p:spTgt spid="217"/>
-                                        </p:tgtEl>
-                                        <p:attrNameLst>
-                                          <p:attrName>style.visibility</p:attrName>
-                                        </p:attrNameLst>
-                                      </p:cBhvr>
-                                      <p:to>
-                                        <p:strVal val="visible"/>
-                                      </p:to>
-                                    </p:set>
-                                    <p:animEffect filter="fade" transition="in">
-                                      <p:cBhvr>
-                                        <p:cTn dur="1000"/>
-                                        <p:tgtEl>
-                                          <p:spTgt spid="217"/>
-                                        </p:tgtEl>
-                                      </p:cBhvr>
-                                    </p:animEffect>
-                                  </p:childTnLst>
-                                </p:cTn>
-                              </p:par>
-                              <p:par>
-                                <p:cTn fill="hold" nodeType="withEffect" presetClass="entr" presetID="2" presetSubtype="2">
-                                  <p:stCondLst>
-                                    <p:cond delay="0"/>
-                                  </p:stCondLst>
-                                  <p:childTnLst>
-                                    <p:set>
-                                      <p:cBhvr>
-                                        <p:cTn dur="1" fill="hold">
-                                          <p:stCondLst>
-                                            <p:cond delay="0"/>
-                                          </p:stCondLst>
-                                        </p:cTn>
-                                        <p:tgtEl>
-                                          <p:spTgt spid="218"/>
-                                        </p:tgtEl>
-                                        <p:attrNameLst>
-                                          <p:attrName>style.visibility</p:attrName>
-                                        </p:attrNameLst>
-                                      </p:cBhvr>
-                                      <p:to>
-                                        <p:strVal val="visible"/>
-                                      </p:to>
-                                    </p:set>
-                                    <p:anim calcmode="lin" valueType="num">
-                                      <p:cBhvr additive="base">
-                                        <p:cTn dur="1000"/>
-                                        <p:tgtEl>
-                                          <p:spTgt spid="218"/>
-                                        </p:tgtEl>
-                                        <p:attrNameLst>
-                                          <p:attrName>ppt_x</p:attrName>
-                                        </p:attrNameLst>
-                                      </p:cBhvr>
-                                      <p:tavLst>
-                                        <p:tav fmla="" tm="0">
-                                          <p:val>
-                                            <p:strVal val="#ppt_x+1"/>
-                                          </p:val>
-                                        </p:tav>
-                                        <p:tav fmla="" tm="100000">
-                                          <p:val>
-                                            <p:strVal val="#ppt_x"/>
-                                          </p:val>
-                                        </p:tav>
-                                      </p:tavLst>
-                                    </p:anim>
-                                  </p:childTnLst>
-                                </p:cTn>
-                              </p:par>
-                            </p:childTnLst>
-                          </p:cTn>
-                        </p:par>
-                      </p:childTnLst>
-                    </p:cTn>
-                  </p:par>
                   <p:par>
                     <p:cTn fill="hold">
                       <p:stCondLst>
@@ -9265,8 +9104,17 @@
                                   </p:childTnLst>
                                 </p:cTn>
                               </p:par>
+                            </p:childTnLst>
+                          </p:cTn>
+                        </p:par>
+                        <p:par>
+                          <p:cTn fill="hold">
+                            <p:stCondLst>
+                              <p:cond delay="1000"/>
+                            </p:stCondLst>
+                            <p:childTnLst>
                               <p:par>
-                                <p:cTn fill="hold" nodeType="withEffect" presetClass="entr" presetID="2" presetSubtype="2">
+                                <p:cTn fill="hold" nodeType="afterEffect" presetClass="entr" presetID="10" presetSubtype="0">
                                   <p:stCondLst>
                                     <p:cond delay="0"/>
                                   </p:stCondLst>
@@ -9289,11 +9137,46 @@
                                         <p:strVal val="visible"/>
                                       </p:to>
                                     </p:set>
+                                    <p:animEffect filter="fade" transition="in">
+                                      <p:cBhvr>
+                                        <p:cTn dur="1000"/>
+                                        <p:tgtEl>
+                                          <p:spTgt spid="221"/>
+                                        </p:tgtEl>
+                                      </p:cBhvr>
+                                    </p:animEffect>
+                                  </p:childTnLst>
+                                </p:cTn>
+                              </p:par>
+                              <p:par>
+                                <p:cTn fill="hold" nodeType="withEffect" presetClass="entr" presetID="2" presetSubtype="2">
+                                  <p:stCondLst>
+                                    <p:cond delay="0"/>
+                                  </p:stCondLst>
+                                  <p:childTnLst>
+                                    <p:set>
+                                      <p:cBhvr>
+                                        <p:cTn dur="1" fill="hold">
+                                          <p:stCondLst>
+                                            <p:cond delay="0"/>
+                                          </p:stCondLst>
+                                        </p:cTn>
+                                        <p:tgtEl>
+                                          <p:spTgt spid="222"/>
+                                        </p:tgtEl>
+                                        <p:attrNameLst>
+                                          <p:attrName>style.visibility</p:attrName>
+                                        </p:attrNameLst>
+                                      </p:cBhvr>
+                                      <p:to>
+                                        <p:strVal val="visible"/>
+                                      </p:to>
+                                    </p:set>
                                     <p:anim calcmode="lin" valueType="num">
                                       <p:cBhvr additive="base">
                                         <p:cTn dur="1000"/>
                                         <p:tgtEl>
-                                          <p:spTgt spid="221"/>
+                                          <p:spTgt spid="222"/>
                                         </p:tgtEl>
                                         <p:attrNameLst>
                                           <p:attrName>ppt_x</p:attrName>
@@ -9368,8 +9251,17 @@
                                   </p:childTnLst>
                                 </p:cTn>
                               </p:par>
+                            </p:childTnLst>
+                          </p:cTn>
+                        </p:par>
+                        <p:par>
+                          <p:cTn fill="hold">
+                            <p:stCondLst>
+                              <p:cond delay="1000"/>
+                            </p:stCondLst>
+                            <p:childTnLst>
                               <p:par>
-                                <p:cTn fill="hold" nodeType="withEffect" presetClass="entr" presetID="2" presetSubtype="2">
+                                <p:cTn fill="hold" nodeType="afterEffect" presetClass="entr" presetID="10" presetSubtype="0">
                                   <p:stCondLst>
                                     <p:cond delay="0"/>
                                   </p:stCondLst>
@@ -9392,11 +9284,1182 @@
                                         <p:strVal val="visible"/>
                                       </p:to>
                                     </p:set>
+                                    <p:animEffect filter="fade" transition="in">
+                                      <p:cBhvr>
+                                        <p:cTn dur="1000"/>
+                                        <p:tgtEl>
+                                          <p:spTgt spid="224"/>
+                                        </p:tgtEl>
+                                      </p:cBhvr>
+                                    </p:animEffect>
+                                  </p:childTnLst>
+                                </p:cTn>
+                              </p:par>
+                              <p:par>
+                                <p:cTn fill="hold" nodeType="withEffect" presetClass="entr" presetID="2" presetSubtype="2">
+                                  <p:stCondLst>
+                                    <p:cond delay="0"/>
+                                  </p:stCondLst>
+                                  <p:childTnLst>
+                                    <p:set>
+                                      <p:cBhvr>
+                                        <p:cTn dur="1" fill="hold">
+                                          <p:stCondLst>
+                                            <p:cond delay="0"/>
+                                          </p:stCondLst>
+                                        </p:cTn>
+                                        <p:tgtEl>
+                                          <p:spTgt spid="225"/>
+                                        </p:tgtEl>
+                                        <p:attrNameLst>
+                                          <p:attrName>style.visibility</p:attrName>
+                                        </p:attrNameLst>
+                                      </p:cBhvr>
+                                      <p:to>
+                                        <p:strVal val="visible"/>
+                                      </p:to>
+                                    </p:set>
                                     <p:anim calcmode="lin" valueType="num">
                                       <p:cBhvr additive="base">
                                         <p:cTn dur="1000"/>
                                         <p:tgtEl>
-                                          <p:spTgt spid="224"/>
+                                          <p:spTgt spid="225"/>
+                                        </p:tgtEl>
+                                        <p:attrNameLst>
+                                          <p:attrName>ppt_x</p:attrName>
+                                        </p:attrNameLst>
+                                      </p:cBhvr>
+                                      <p:tavLst>
+                                        <p:tav fmla="" tm="0">
+                                          <p:val>
+                                            <p:strVal val="#ppt_x+1"/>
+                                          </p:val>
+                                        </p:tav>
+                                        <p:tav fmla="" tm="100000">
+                                          <p:val>
+                                            <p:strVal val="#ppt_x"/>
+                                          </p:val>
+                                        </p:tav>
+                                      </p:tavLst>
+                                    </p:anim>
+                                  </p:childTnLst>
+                                </p:cTn>
+                              </p:par>
+                            </p:childTnLst>
+                          </p:cTn>
+                        </p:par>
+                      </p:childTnLst>
+                    </p:cTn>
+                  </p:par>
+                </p:childTnLst>
+              </p:cTn>
+              <p:prevCondLst>
+                <p:cond evt="onPrev">
+                  <p:tgtEl>
+                    <p:sldTgt/>
+                  </p:tgtEl>
+                </p:cond>
+              </p:prevCondLst>
+              <p:nextCondLst>
+                <p:cond evt="onNext">
+                  <p:tgtEl>
+                    <p:sldTgt/>
+                  </p:tgtEl>
+                </p:cond>
+              </p:nextCondLst>
+            </p:seq>
+          </p:childTnLst>
+        </p:cTn>
+      </p:par>
+    </p:tnLst>
+  </p:timing>
+</p:sld>
+</file>
+
+<file path=ppt/slides/slide11.xml><?xml version="1.0" encoding="utf-8"?>
+<p:sld xmlns:a="http://schemas.openxmlformats.org/drawingml/2006/main" xmlns:r="http://schemas.openxmlformats.org/officeDocument/2006/relationships" xmlns:mc="http://schemas.openxmlformats.org/markup-compatibility/2006" xmlns:mv="urn:schemas-microsoft-com:mac:vml" xmlns:p="http://schemas.openxmlformats.org/presentationml/2006/main" xmlns:c="http://schemas.openxmlformats.org/drawingml/2006/chart" xmlns:dgm="http://schemas.openxmlformats.org/drawingml/2006/diagram" xmlns:o="urn:schemas-microsoft-com:office:office" xmlns:v="urn:schemas-microsoft-com:vml" xmlns:pvml="urn:schemas-microsoft-com:office:powerpoint" xmlns:com="http://schemas.openxmlformats.org/drawingml/2006/compatibility" xmlns:p14="http://schemas.microsoft.com/office/powerpoint/2010/main" xmlns:p15="http://schemas.microsoft.com/office/powerpoint/2012/main" xmlns:ahyp="http://schemas.microsoft.com/office/drawing/2018/hyperlinkcolor">
+  <p:cSld>
+    <p:bg>
+      <p:bgPr>
+        <a:solidFill>
+          <a:srgbClr val="0F172A"/>
+        </a:solidFill>
+      </p:bgPr>
+    </p:bg>
+    <p:spTree>
+      <p:nvGrpSpPr>
+        <p:cNvPr id="230" name="Shape 230"/>
+        <p:cNvGrpSpPr/>
+        <p:nvPr/>
+      </p:nvGrpSpPr>
+      <p:grpSpPr>
+        <a:xfrm>
+          <a:off x="0" y="0"/>
+          <a:ext cx="0" cy="0"/>
+          <a:chOff x="0" y="0"/>
+          <a:chExt cx="0" cy="0"/>
+        </a:xfrm>
+      </p:grpSpPr>
+      <p:sp>
+        <p:nvSpPr>
+          <p:cNvPr id="231" name="Google Shape;231;p25"/>
+          <p:cNvSpPr/>
+          <p:nvPr/>
+        </p:nvSpPr>
+        <p:spPr>
+          <a:xfrm>
+            <a:off x="0" y="0"/>
+            <a:ext cx="9144000" cy="137160"/>
+          </a:xfrm>
+          <a:prstGeom prst="rect">
+            <a:avLst/>
+          </a:prstGeom>
+          <a:solidFill>
+            <a:srgbClr val="DC2626"/>
+          </a:solidFill>
+          <a:ln>
+            <a:noFill/>
+          </a:ln>
+        </p:spPr>
+        <p:txBody>
+          <a:bodyPr anchorCtr="0" anchor="ctr" bIns="91425" lIns="91425" spcFirstLastPara="1" rIns="91425" wrap="square" tIns="91425">
+            <a:noAutofit/>
+          </a:bodyPr>
+          <a:lstStyle/>
+          <a:p>
+            <a:pPr indent="0" lvl="0" marL="0" rtl="0" algn="l">
+              <a:spcBef>
+                <a:spcPts val="0"/>
+              </a:spcBef>
+              <a:spcAft>
+                <a:spcPts val="0"/>
+              </a:spcAft>
+              <a:buNone/>
+            </a:pPr>
+            <a:r>
+              <a:t/>
+            </a:r>
+            <a:endParaRPr/>
+          </a:p>
+        </p:txBody>
+      </p:sp>
+      <p:sp>
+        <p:nvSpPr>
+          <p:cNvPr id="232" name="Google Shape;232;p25"/>
+          <p:cNvSpPr/>
+          <p:nvPr/>
+        </p:nvSpPr>
+        <p:spPr>
+          <a:xfrm>
+            <a:off x="457200" y="457200"/>
+            <a:ext cx="8229600" cy="320040"/>
+          </a:xfrm>
+          <a:prstGeom prst="rect">
+            <a:avLst/>
+          </a:prstGeom>
+          <a:noFill/>
+          <a:ln>
+            <a:noFill/>
+          </a:ln>
+        </p:spPr>
+        <p:txBody>
+          <a:bodyPr anchorCtr="0" anchor="ctr" bIns="45700" lIns="91425" spcFirstLastPara="1" rIns="91425" wrap="square" tIns="45700">
+            <a:noAutofit/>
+          </a:bodyPr>
+          <a:lstStyle/>
+          <a:p>
+            <a:pPr indent="0" lvl="0" marL="0" marR="0" rtl="0" algn="l">
+              <a:spcBef>
+                <a:spcPts val="0"/>
+              </a:spcBef>
+              <a:spcAft>
+                <a:spcPts val="0"/>
+              </a:spcAft>
+              <a:buClr>
+                <a:srgbClr val="DC2626"/>
+              </a:buClr>
+              <a:buSzPts val="1100"/>
+              <a:buFont typeface="Arial"/>
+              <a:buNone/>
+            </a:pPr>
+            <a:r>
+              <a:rPr b="1" i="0" lang="en-GB" sz="1100" u="none" cap="none" strike="noStrike">
+                <a:solidFill>
+                  <a:srgbClr val="DC2626"/>
+                </a:solidFill>
+                <a:latin typeface="Arial"/>
+                <a:ea typeface="Arial"/>
+                <a:cs typeface="Arial"/>
+                <a:sym typeface="Arial"/>
+              </a:rPr>
+              <a:t>NEXT STEPS</a:t>
+            </a:r>
+            <a:endParaRPr b="0" i="0" sz="1100" u="none" cap="none" strike="noStrike">
+              <a:solidFill>
+                <a:schemeClr val="dk1"/>
+              </a:solidFill>
+              <a:latin typeface="Calibri"/>
+              <a:ea typeface="Calibri"/>
+              <a:cs typeface="Calibri"/>
+              <a:sym typeface="Calibri"/>
+            </a:endParaRPr>
+          </a:p>
+        </p:txBody>
+      </p:sp>
+      <p:sp>
+        <p:nvSpPr>
+          <p:cNvPr id="233" name="Google Shape;233;p25"/>
+          <p:cNvSpPr/>
+          <p:nvPr/>
+        </p:nvSpPr>
+        <p:spPr>
+          <a:xfrm>
+            <a:off x="457200" y="777240"/>
+            <a:ext cx="8229600" cy="548640"/>
+          </a:xfrm>
+          <a:prstGeom prst="rect">
+            <a:avLst/>
+          </a:prstGeom>
+          <a:noFill/>
+          <a:ln>
+            <a:noFill/>
+          </a:ln>
+        </p:spPr>
+        <p:txBody>
+          <a:bodyPr anchorCtr="0" anchor="ctr" bIns="45700" lIns="91425" spcFirstLastPara="1" rIns="91425" wrap="square" tIns="45700">
+            <a:noAutofit/>
+          </a:bodyPr>
+          <a:lstStyle/>
+          <a:p>
+            <a:pPr indent="0" lvl="0" marL="0" marR="0" rtl="0" algn="l">
+              <a:spcBef>
+                <a:spcPts val="0"/>
+              </a:spcBef>
+              <a:spcAft>
+                <a:spcPts val="0"/>
+              </a:spcAft>
+              <a:buClr>
+                <a:srgbClr val="FFFFFF"/>
+              </a:buClr>
+              <a:buSzPts val="2400"/>
+              <a:buFont typeface="Arial Black"/>
+              <a:buNone/>
+            </a:pPr>
+            <a:r>
+              <a:rPr b="0" i="0" lang="en-GB" sz="2400" u="none" cap="none" strike="noStrike">
+                <a:solidFill>
+                  <a:srgbClr val="FFFFFF"/>
+                </a:solidFill>
+                <a:latin typeface="Arial Black"/>
+                <a:ea typeface="Arial Black"/>
+                <a:cs typeface="Arial Black"/>
+                <a:sym typeface="Arial Black"/>
+              </a:rPr>
+              <a:t>Stop the Bleed. Turn Data into Control.</a:t>
+            </a:r>
+            <a:endParaRPr b="0" i="0" sz="2400" u="none" cap="none" strike="noStrike">
+              <a:solidFill>
+                <a:schemeClr val="dk1"/>
+              </a:solidFill>
+              <a:latin typeface="Calibri"/>
+              <a:ea typeface="Calibri"/>
+              <a:cs typeface="Calibri"/>
+              <a:sym typeface="Calibri"/>
+            </a:endParaRPr>
+          </a:p>
+        </p:txBody>
+      </p:sp>
+      <p:sp>
+        <p:nvSpPr>
+          <p:cNvPr id="234" name="Google Shape;234;p25"/>
+          <p:cNvSpPr/>
+          <p:nvPr/>
+        </p:nvSpPr>
+        <p:spPr>
+          <a:xfrm>
+            <a:off x="457200" y="1463040"/>
+            <a:ext cx="1463040" cy="457200"/>
+          </a:xfrm>
+          <a:prstGeom prst="rect">
+            <a:avLst/>
+          </a:prstGeom>
+          <a:solidFill>
+            <a:srgbClr val="DC2626"/>
+          </a:solidFill>
+          <a:ln>
+            <a:noFill/>
+          </a:ln>
+        </p:spPr>
+        <p:txBody>
+          <a:bodyPr anchorCtr="0" anchor="ctr" bIns="91425" lIns="91425" spcFirstLastPara="1" rIns="91425" wrap="square" tIns="91425">
+            <a:noAutofit/>
+          </a:bodyPr>
+          <a:lstStyle/>
+          <a:p>
+            <a:pPr indent="0" lvl="0" marL="0" rtl="0" algn="l">
+              <a:spcBef>
+                <a:spcPts val="0"/>
+              </a:spcBef>
+              <a:spcAft>
+                <a:spcPts val="0"/>
+              </a:spcAft>
+              <a:buNone/>
+            </a:pPr>
+            <a:r>
+              <a:t/>
+            </a:r>
+            <a:endParaRPr/>
+          </a:p>
+        </p:txBody>
+      </p:sp>
+      <p:sp>
+        <p:nvSpPr>
+          <p:cNvPr id="235" name="Google Shape;235;p25"/>
+          <p:cNvSpPr/>
+          <p:nvPr/>
+        </p:nvSpPr>
+        <p:spPr>
+          <a:xfrm>
+            <a:off x="457200" y="1463040"/>
+            <a:ext cx="1463100" cy="457200"/>
+          </a:xfrm>
+          <a:prstGeom prst="rect">
+            <a:avLst/>
+          </a:prstGeom>
+          <a:noFill/>
+          <a:ln>
+            <a:noFill/>
+          </a:ln>
+        </p:spPr>
+        <p:txBody>
+          <a:bodyPr anchorCtr="0" anchor="ctr" bIns="45700" lIns="91425" spcFirstLastPara="1" rIns="91425" wrap="square" tIns="45700">
+            <a:noAutofit/>
+          </a:bodyPr>
+          <a:lstStyle/>
+          <a:p>
+            <a:pPr indent="0" lvl="0" marL="0" marR="0" rtl="0" algn="ctr">
+              <a:spcBef>
+                <a:spcPts val="0"/>
+              </a:spcBef>
+              <a:spcAft>
+                <a:spcPts val="0"/>
+              </a:spcAft>
+              <a:buClr>
+                <a:srgbClr val="FFFFFF"/>
+              </a:buClr>
+              <a:buSzPts val="900"/>
+              <a:buFont typeface="Arial Black"/>
+              <a:buNone/>
+            </a:pPr>
+            <a:r>
+              <a:rPr b="0" i="0" lang="en-GB" sz="900" u="none" cap="none" strike="noStrike">
+                <a:solidFill>
+                  <a:srgbClr val="FFFFFF"/>
+                </a:solidFill>
+                <a:latin typeface="Arial Black"/>
+                <a:ea typeface="Arial Black"/>
+                <a:cs typeface="Arial Black"/>
+                <a:sym typeface="Arial Black"/>
+              </a:rPr>
+              <a:t>THIS WEEK</a:t>
+            </a:r>
+            <a:endParaRPr b="0" i="0" sz="900" u="none" cap="none" strike="noStrike">
+              <a:solidFill>
+                <a:schemeClr val="dk1"/>
+              </a:solidFill>
+              <a:latin typeface="Calibri"/>
+              <a:ea typeface="Calibri"/>
+              <a:cs typeface="Calibri"/>
+              <a:sym typeface="Calibri"/>
+            </a:endParaRPr>
+          </a:p>
+        </p:txBody>
+      </p:sp>
+      <p:sp>
+        <p:nvSpPr>
+          <p:cNvPr id="236" name="Google Shape;236;p25"/>
+          <p:cNvSpPr/>
+          <p:nvPr/>
+        </p:nvSpPr>
+        <p:spPr>
+          <a:xfrm>
+            <a:off x="2103120" y="1508760"/>
+            <a:ext cx="6583680" cy="365760"/>
+          </a:xfrm>
+          <a:prstGeom prst="rect">
+            <a:avLst/>
+          </a:prstGeom>
+          <a:noFill/>
+          <a:ln>
+            <a:noFill/>
+          </a:ln>
+        </p:spPr>
+        <p:txBody>
+          <a:bodyPr anchorCtr="0" anchor="ctr" bIns="45700" lIns="91425" spcFirstLastPara="1" rIns="91425" wrap="square" tIns="45700">
+            <a:noAutofit/>
+          </a:bodyPr>
+          <a:lstStyle/>
+          <a:p>
+            <a:pPr indent="0" lvl="0" marL="0" marR="0" rtl="0" algn="l">
+              <a:spcBef>
+                <a:spcPts val="0"/>
+              </a:spcBef>
+              <a:spcAft>
+                <a:spcPts val="0"/>
+              </a:spcAft>
+              <a:buClr>
+                <a:srgbClr val="FFFFFF"/>
+              </a:buClr>
+              <a:buSzPts val="1100"/>
+              <a:buFont typeface="Arial"/>
+              <a:buNone/>
+            </a:pPr>
+            <a:r>
+              <a:rPr b="0" i="0" lang="en-GB" sz="1100" u="none" cap="none" strike="noStrike">
+                <a:solidFill>
+                  <a:srgbClr val="FFFFFF"/>
+                </a:solidFill>
+                <a:latin typeface="Arial"/>
+                <a:ea typeface="Arial"/>
+                <a:cs typeface="Arial"/>
+                <a:sym typeface="Arial"/>
+              </a:rPr>
+              <a:t>Form cross-functional task force (Ops + Finance + IT + Risk)</a:t>
+            </a:r>
+            <a:endParaRPr b="0" i="0" sz="1100" u="none" cap="none" strike="noStrike">
+              <a:solidFill>
+                <a:schemeClr val="dk1"/>
+              </a:solidFill>
+              <a:latin typeface="Calibri"/>
+              <a:ea typeface="Calibri"/>
+              <a:cs typeface="Calibri"/>
+              <a:sym typeface="Calibri"/>
+            </a:endParaRPr>
+          </a:p>
+        </p:txBody>
+      </p:sp>
+      <p:sp>
+        <p:nvSpPr>
+          <p:cNvPr id="237" name="Google Shape;237;p25"/>
+          <p:cNvSpPr/>
+          <p:nvPr/>
+        </p:nvSpPr>
+        <p:spPr>
+          <a:xfrm>
+            <a:off x="457200" y="2057400"/>
+            <a:ext cx="1463040" cy="457200"/>
+          </a:xfrm>
+          <a:prstGeom prst="rect">
+            <a:avLst/>
+          </a:prstGeom>
+          <a:solidFill>
+            <a:srgbClr val="DC2626"/>
+          </a:solidFill>
+          <a:ln>
+            <a:noFill/>
+          </a:ln>
+        </p:spPr>
+        <p:txBody>
+          <a:bodyPr anchorCtr="0" anchor="ctr" bIns="91425" lIns="91425" spcFirstLastPara="1" rIns="91425" wrap="square" tIns="91425">
+            <a:noAutofit/>
+          </a:bodyPr>
+          <a:lstStyle/>
+          <a:p>
+            <a:pPr indent="0" lvl="0" marL="0" rtl="0" algn="l">
+              <a:spcBef>
+                <a:spcPts val="0"/>
+              </a:spcBef>
+              <a:spcAft>
+                <a:spcPts val="0"/>
+              </a:spcAft>
+              <a:buNone/>
+            </a:pPr>
+            <a:r>
+              <a:t/>
+            </a:r>
+            <a:endParaRPr/>
+          </a:p>
+        </p:txBody>
+      </p:sp>
+      <p:sp>
+        <p:nvSpPr>
+          <p:cNvPr id="238" name="Google Shape;238;p25"/>
+          <p:cNvSpPr/>
+          <p:nvPr/>
+        </p:nvSpPr>
+        <p:spPr>
+          <a:xfrm>
+            <a:off x="457200" y="2057400"/>
+            <a:ext cx="1463040" cy="457200"/>
+          </a:xfrm>
+          <a:prstGeom prst="rect">
+            <a:avLst/>
+          </a:prstGeom>
+          <a:noFill/>
+          <a:ln>
+            <a:noFill/>
+          </a:ln>
+        </p:spPr>
+        <p:txBody>
+          <a:bodyPr anchorCtr="0" anchor="ctr" bIns="45700" lIns="91425" spcFirstLastPara="1" rIns="91425" wrap="square" tIns="45700">
+            <a:noAutofit/>
+          </a:bodyPr>
+          <a:lstStyle/>
+          <a:p>
+            <a:pPr indent="0" lvl="0" marL="0" marR="0" rtl="0" algn="ctr">
+              <a:spcBef>
+                <a:spcPts val="0"/>
+              </a:spcBef>
+              <a:spcAft>
+                <a:spcPts val="0"/>
+              </a:spcAft>
+              <a:buClr>
+                <a:srgbClr val="FFFFFF"/>
+              </a:buClr>
+              <a:buSzPts val="900"/>
+              <a:buFont typeface="Arial Black"/>
+              <a:buNone/>
+            </a:pPr>
+            <a:r>
+              <a:rPr b="0" i="0" lang="en-GB" sz="900" u="none" cap="none" strike="noStrike">
+                <a:solidFill>
+                  <a:srgbClr val="FFFFFF"/>
+                </a:solidFill>
+                <a:latin typeface="Arial Black"/>
+                <a:ea typeface="Arial Black"/>
+                <a:cs typeface="Arial Black"/>
+                <a:sym typeface="Arial Black"/>
+              </a:rPr>
+              <a:t>30 DAYS</a:t>
+            </a:r>
+            <a:endParaRPr b="0" i="0" sz="900" u="none" cap="none" strike="noStrike">
+              <a:solidFill>
+                <a:schemeClr val="dk1"/>
+              </a:solidFill>
+              <a:latin typeface="Calibri"/>
+              <a:ea typeface="Calibri"/>
+              <a:cs typeface="Calibri"/>
+              <a:sym typeface="Calibri"/>
+            </a:endParaRPr>
+          </a:p>
+        </p:txBody>
+      </p:sp>
+      <p:sp>
+        <p:nvSpPr>
+          <p:cNvPr id="239" name="Google Shape;239;p25"/>
+          <p:cNvSpPr/>
+          <p:nvPr/>
+        </p:nvSpPr>
+        <p:spPr>
+          <a:xfrm>
+            <a:off x="2103120" y="2103120"/>
+            <a:ext cx="6583680" cy="365760"/>
+          </a:xfrm>
+          <a:prstGeom prst="rect">
+            <a:avLst/>
+          </a:prstGeom>
+          <a:noFill/>
+          <a:ln>
+            <a:noFill/>
+          </a:ln>
+        </p:spPr>
+        <p:txBody>
+          <a:bodyPr anchorCtr="0" anchor="ctr" bIns="45700" lIns="91425" spcFirstLastPara="1" rIns="91425" wrap="square" tIns="45700">
+            <a:noAutofit/>
+          </a:bodyPr>
+          <a:lstStyle/>
+          <a:p>
+            <a:pPr indent="0" lvl="0" marL="0" marR="0" rtl="0" algn="l">
+              <a:spcBef>
+                <a:spcPts val="0"/>
+              </a:spcBef>
+              <a:spcAft>
+                <a:spcPts val="0"/>
+              </a:spcAft>
+              <a:buClr>
+                <a:srgbClr val="FFFFFF"/>
+              </a:buClr>
+              <a:buSzPts val="1100"/>
+              <a:buFont typeface="Arial"/>
+              <a:buNone/>
+            </a:pPr>
+            <a:r>
+              <a:rPr b="0" i="0" lang="en-GB" sz="1100" u="none" cap="none" strike="noStrike">
+                <a:solidFill>
+                  <a:srgbClr val="FFFFFF"/>
+                </a:solidFill>
+                <a:latin typeface="Arial"/>
+                <a:ea typeface="Arial"/>
+                <a:cs typeface="Arial"/>
+                <a:sym typeface="Arial"/>
+              </a:rPr>
+              <a:t>Clean top 20% of aged-stuck value by $ impact</a:t>
+            </a:r>
+            <a:endParaRPr b="0" i="0" sz="1100" u="none" cap="none" strike="noStrike">
+              <a:solidFill>
+                <a:schemeClr val="dk1"/>
+              </a:solidFill>
+              <a:latin typeface="Calibri"/>
+              <a:ea typeface="Calibri"/>
+              <a:cs typeface="Calibri"/>
+              <a:sym typeface="Calibri"/>
+            </a:endParaRPr>
+          </a:p>
+        </p:txBody>
+      </p:sp>
+      <p:sp>
+        <p:nvSpPr>
+          <p:cNvPr id="240" name="Google Shape;240;p25"/>
+          <p:cNvSpPr/>
+          <p:nvPr/>
+        </p:nvSpPr>
+        <p:spPr>
+          <a:xfrm>
+            <a:off x="457200" y="2651760"/>
+            <a:ext cx="1463040" cy="457200"/>
+          </a:xfrm>
+          <a:prstGeom prst="rect">
+            <a:avLst/>
+          </a:prstGeom>
+          <a:solidFill>
+            <a:srgbClr val="DC2626"/>
+          </a:solidFill>
+          <a:ln>
+            <a:noFill/>
+          </a:ln>
+        </p:spPr>
+        <p:txBody>
+          <a:bodyPr anchorCtr="0" anchor="ctr" bIns="91425" lIns="91425" spcFirstLastPara="1" rIns="91425" wrap="square" tIns="91425">
+            <a:noAutofit/>
+          </a:bodyPr>
+          <a:lstStyle/>
+          <a:p>
+            <a:pPr indent="0" lvl="0" marL="0" rtl="0" algn="l">
+              <a:spcBef>
+                <a:spcPts val="0"/>
+              </a:spcBef>
+              <a:spcAft>
+                <a:spcPts val="0"/>
+              </a:spcAft>
+              <a:buNone/>
+            </a:pPr>
+            <a:r>
+              <a:t/>
+            </a:r>
+            <a:endParaRPr/>
+          </a:p>
+        </p:txBody>
+      </p:sp>
+      <p:sp>
+        <p:nvSpPr>
+          <p:cNvPr id="241" name="Google Shape;241;p25"/>
+          <p:cNvSpPr/>
+          <p:nvPr/>
+        </p:nvSpPr>
+        <p:spPr>
+          <a:xfrm>
+            <a:off x="457200" y="2651760"/>
+            <a:ext cx="1463040" cy="457200"/>
+          </a:xfrm>
+          <a:prstGeom prst="rect">
+            <a:avLst/>
+          </a:prstGeom>
+          <a:noFill/>
+          <a:ln>
+            <a:noFill/>
+          </a:ln>
+        </p:spPr>
+        <p:txBody>
+          <a:bodyPr anchorCtr="0" anchor="ctr" bIns="45700" lIns="91425" spcFirstLastPara="1" rIns="91425" wrap="square" tIns="45700">
+            <a:noAutofit/>
+          </a:bodyPr>
+          <a:lstStyle/>
+          <a:p>
+            <a:pPr indent="0" lvl="0" marL="0" marR="0" rtl="0" algn="ctr">
+              <a:spcBef>
+                <a:spcPts val="0"/>
+              </a:spcBef>
+              <a:spcAft>
+                <a:spcPts val="0"/>
+              </a:spcAft>
+              <a:buClr>
+                <a:srgbClr val="FFFFFF"/>
+              </a:buClr>
+              <a:buSzPts val="900"/>
+              <a:buFont typeface="Arial Black"/>
+              <a:buNone/>
+            </a:pPr>
+            <a:r>
+              <a:rPr b="0" i="0" lang="en-GB" sz="900" u="none" cap="none" strike="noStrike">
+                <a:solidFill>
+                  <a:srgbClr val="FFFFFF"/>
+                </a:solidFill>
+                <a:latin typeface="Arial Black"/>
+                <a:ea typeface="Arial Black"/>
+                <a:cs typeface="Arial Black"/>
+                <a:sym typeface="Arial Black"/>
+              </a:rPr>
+              <a:t>60 DAYS</a:t>
+            </a:r>
+            <a:endParaRPr b="0" i="0" sz="900" u="none" cap="none" strike="noStrike">
+              <a:solidFill>
+                <a:schemeClr val="dk1"/>
+              </a:solidFill>
+              <a:latin typeface="Calibri"/>
+              <a:ea typeface="Calibri"/>
+              <a:cs typeface="Calibri"/>
+              <a:sym typeface="Calibri"/>
+            </a:endParaRPr>
+          </a:p>
+        </p:txBody>
+      </p:sp>
+      <p:sp>
+        <p:nvSpPr>
+          <p:cNvPr id="242" name="Google Shape;242;p25"/>
+          <p:cNvSpPr/>
+          <p:nvPr/>
+        </p:nvSpPr>
+        <p:spPr>
+          <a:xfrm>
+            <a:off x="2103120" y="2697480"/>
+            <a:ext cx="6583680" cy="365760"/>
+          </a:xfrm>
+          <a:prstGeom prst="rect">
+            <a:avLst/>
+          </a:prstGeom>
+          <a:noFill/>
+          <a:ln>
+            <a:noFill/>
+          </a:ln>
+        </p:spPr>
+        <p:txBody>
+          <a:bodyPr anchorCtr="0" anchor="ctr" bIns="45700" lIns="91425" spcFirstLastPara="1" rIns="91425" wrap="square" tIns="45700">
+            <a:noAutofit/>
+          </a:bodyPr>
+          <a:lstStyle/>
+          <a:p>
+            <a:pPr indent="0" lvl="0" marL="0" marR="0" rtl="0" algn="l">
+              <a:spcBef>
+                <a:spcPts val="0"/>
+              </a:spcBef>
+              <a:spcAft>
+                <a:spcPts val="0"/>
+              </a:spcAft>
+              <a:buClr>
+                <a:srgbClr val="FFFFFF"/>
+              </a:buClr>
+              <a:buSzPts val="1100"/>
+              <a:buFont typeface="Arial"/>
+              <a:buNone/>
+            </a:pPr>
+            <a:r>
+              <a:rPr b="0" i="0" lang="en-GB" sz="1100" u="none" cap="none" strike="noStrike">
+                <a:solidFill>
+                  <a:srgbClr val="FFFFFF"/>
+                </a:solidFill>
+                <a:latin typeface="Arial"/>
+                <a:ea typeface="Arial"/>
+                <a:cs typeface="Arial"/>
+                <a:sym typeface="Arial"/>
+              </a:rPr>
+              <a:t>Full escalation framework + mandatory status policy live</a:t>
+            </a:r>
+            <a:endParaRPr b="0" i="0" sz="1100" u="none" cap="none" strike="noStrike">
+              <a:solidFill>
+                <a:schemeClr val="dk1"/>
+              </a:solidFill>
+              <a:latin typeface="Calibri"/>
+              <a:ea typeface="Calibri"/>
+              <a:cs typeface="Calibri"/>
+              <a:sym typeface="Calibri"/>
+            </a:endParaRPr>
+          </a:p>
+        </p:txBody>
+      </p:sp>
+      <p:sp>
+        <p:nvSpPr>
+          <p:cNvPr id="243" name="Google Shape;243;p25"/>
+          <p:cNvSpPr/>
+          <p:nvPr/>
+        </p:nvSpPr>
+        <p:spPr>
+          <a:xfrm>
+            <a:off x="457200" y="3246120"/>
+            <a:ext cx="1463040" cy="457200"/>
+          </a:xfrm>
+          <a:prstGeom prst="rect">
+            <a:avLst/>
+          </a:prstGeom>
+          <a:solidFill>
+            <a:srgbClr val="DC2626"/>
+          </a:solidFill>
+          <a:ln>
+            <a:noFill/>
+          </a:ln>
+        </p:spPr>
+        <p:txBody>
+          <a:bodyPr anchorCtr="0" anchor="ctr" bIns="91425" lIns="91425" spcFirstLastPara="1" rIns="91425" wrap="square" tIns="91425">
+            <a:noAutofit/>
+          </a:bodyPr>
+          <a:lstStyle/>
+          <a:p>
+            <a:pPr indent="0" lvl="0" marL="0" rtl="0" algn="l">
+              <a:spcBef>
+                <a:spcPts val="0"/>
+              </a:spcBef>
+              <a:spcAft>
+                <a:spcPts val="0"/>
+              </a:spcAft>
+              <a:buNone/>
+            </a:pPr>
+            <a:r>
+              <a:t/>
+            </a:r>
+            <a:endParaRPr/>
+          </a:p>
+        </p:txBody>
+      </p:sp>
+      <p:sp>
+        <p:nvSpPr>
+          <p:cNvPr id="244" name="Google Shape;244;p25"/>
+          <p:cNvSpPr/>
+          <p:nvPr/>
+        </p:nvSpPr>
+        <p:spPr>
+          <a:xfrm>
+            <a:off x="457200" y="3246120"/>
+            <a:ext cx="1463040" cy="457200"/>
+          </a:xfrm>
+          <a:prstGeom prst="rect">
+            <a:avLst/>
+          </a:prstGeom>
+          <a:noFill/>
+          <a:ln>
+            <a:noFill/>
+          </a:ln>
+        </p:spPr>
+        <p:txBody>
+          <a:bodyPr anchorCtr="0" anchor="ctr" bIns="45700" lIns="91425" spcFirstLastPara="1" rIns="91425" wrap="square" tIns="45700">
+            <a:noAutofit/>
+          </a:bodyPr>
+          <a:lstStyle/>
+          <a:p>
+            <a:pPr indent="0" lvl="0" marL="0" marR="0" rtl="0" algn="ctr">
+              <a:spcBef>
+                <a:spcPts val="0"/>
+              </a:spcBef>
+              <a:spcAft>
+                <a:spcPts val="0"/>
+              </a:spcAft>
+              <a:buClr>
+                <a:srgbClr val="FFFFFF"/>
+              </a:buClr>
+              <a:buSzPts val="900"/>
+              <a:buFont typeface="Arial Black"/>
+              <a:buNone/>
+            </a:pPr>
+            <a:r>
+              <a:rPr b="0" i="0" lang="en-GB" sz="900" u="none" cap="none" strike="noStrike">
+                <a:solidFill>
+                  <a:srgbClr val="FFFFFF"/>
+                </a:solidFill>
+                <a:latin typeface="Arial Black"/>
+                <a:ea typeface="Arial Black"/>
+                <a:cs typeface="Arial Black"/>
+                <a:sym typeface="Arial Black"/>
+              </a:rPr>
+              <a:t>90 DAYS</a:t>
+            </a:r>
+            <a:endParaRPr b="0" i="0" sz="900" u="none" cap="none" strike="noStrike">
+              <a:solidFill>
+                <a:schemeClr val="dk1"/>
+              </a:solidFill>
+              <a:latin typeface="Calibri"/>
+              <a:ea typeface="Calibri"/>
+              <a:cs typeface="Calibri"/>
+              <a:sym typeface="Calibri"/>
+            </a:endParaRPr>
+          </a:p>
+        </p:txBody>
+      </p:sp>
+      <p:sp>
+        <p:nvSpPr>
+          <p:cNvPr id="245" name="Google Shape;245;p25"/>
+          <p:cNvSpPr/>
+          <p:nvPr/>
+        </p:nvSpPr>
+        <p:spPr>
+          <a:xfrm>
+            <a:off x="2103120" y="3291840"/>
+            <a:ext cx="6583800" cy="365700"/>
+          </a:xfrm>
+          <a:prstGeom prst="rect">
+            <a:avLst/>
+          </a:prstGeom>
+          <a:noFill/>
+          <a:ln>
+            <a:noFill/>
+          </a:ln>
+        </p:spPr>
+        <p:txBody>
+          <a:bodyPr anchorCtr="0" anchor="ctr" bIns="45700" lIns="91425" spcFirstLastPara="1" rIns="91425" wrap="square" tIns="45700">
+            <a:noAutofit/>
+          </a:bodyPr>
+          <a:lstStyle/>
+          <a:p>
+            <a:pPr indent="0" lvl="0" marL="0" marR="0" rtl="0" algn="l">
+              <a:spcBef>
+                <a:spcPts val="0"/>
+              </a:spcBef>
+              <a:spcAft>
+                <a:spcPts val="0"/>
+              </a:spcAft>
+              <a:buClr>
+                <a:srgbClr val="FFFFFF"/>
+              </a:buClr>
+              <a:buSzPts val="1100"/>
+              <a:buFont typeface="Arial"/>
+              <a:buNone/>
+            </a:pPr>
+            <a:r>
+              <a:rPr b="0" i="0" lang="en-GB" sz="1100" u="none" cap="none" strike="noStrike">
+                <a:solidFill>
+                  <a:srgbClr val="FFFFFF"/>
+                </a:solidFill>
+                <a:latin typeface="Arial"/>
+                <a:ea typeface="Arial"/>
+                <a:cs typeface="Arial"/>
+                <a:sym typeface="Arial"/>
+              </a:rPr>
+              <a:t>Re-audit P&amp;L with stable unit cost baseline; measure late rate reduction</a:t>
+            </a:r>
+            <a:endParaRPr b="0" i="0" sz="1100" u="none" cap="none" strike="noStrike">
+              <a:solidFill>
+                <a:schemeClr val="dk1"/>
+              </a:solidFill>
+              <a:latin typeface="Calibri"/>
+              <a:ea typeface="Calibri"/>
+              <a:cs typeface="Calibri"/>
+              <a:sym typeface="Calibri"/>
+            </a:endParaRPr>
+          </a:p>
+        </p:txBody>
+      </p:sp>
+      <p:sp>
+        <p:nvSpPr>
+          <p:cNvPr id="246" name="Google Shape;246;p25"/>
+          <p:cNvSpPr/>
+          <p:nvPr/>
+        </p:nvSpPr>
+        <p:spPr>
+          <a:xfrm>
+            <a:off x="457200" y="3931920"/>
+            <a:ext cx="8229600" cy="365760"/>
+          </a:xfrm>
+          <a:prstGeom prst="rect">
+            <a:avLst/>
+          </a:prstGeom>
+          <a:noFill/>
+          <a:ln>
+            <a:noFill/>
+          </a:ln>
+        </p:spPr>
+        <p:txBody>
+          <a:bodyPr anchorCtr="0" anchor="ctr" bIns="45700" lIns="91425" spcFirstLastPara="1" rIns="91425" wrap="square" tIns="45700">
+            <a:noAutofit/>
+          </a:bodyPr>
+          <a:lstStyle/>
+          <a:p>
+            <a:pPr indent="0" lvl="0" marL="0" marR="0" rtl="0" algn="l">
+              <a:spcBef>
+                <a:spcPts val="0"/>
+              </a:spcBef>
+              <a:spcAft>
+                <a:spcPts val="0"/>
+              </a:spcAft>
+              <a:buClr>
+                <a:srgbClr val="DC2626"/>
+              </a:buClr>
+              <a:buSzPts val="1100"/>
+              <a:buFont typeface="Arial"/>
+              <a:buNone/>
+            </a:pPr>
+            <a:r>
+              <a:rPr b="0" i="1" lang="en-GB" sz="1100" u="none" cap="none" strike="noStrike">
+                <a:solidFill>
+                  <a:srgbClr val="DC2626"/>
+                </a:solidFill>
+                <a:latin typeface="Arial"/>
+                <a:ea typeface="Arial"/>
+                <a:cs typeface="Arial"/>
+                <a:sym typeface="Arial"/>
+              </a:rPr>
+              <a:t>Every day of delay costs real money and real trust.</a:t>
+            </a:r>
+            <a:endParaRPr b="0" i="0" sz="1100" u="none" cap="none" strike="noStrike">
+              <a:solidFill>
+                <a:schemeClr val="dk1"/>
+              </a:solidFill>
+              <a:latin typeface="Calibri"/>
+              <a:ea typeface="Calibri"/>
+              <a:cs typeface="Calibri"/>
+              <a:sym typeface="Calibri"/>
+            </a:endParaRPr>
+          </a:p>
+        </p:txBody>
+      </p:sp>
+      <p:sp>
+        <p:nvSpPr>
+          <p:cNvPr id="247" name="Google Shape;247;p25"/>
+          <p:cNvSpPr/>
+          <p:nvPr/>
+        </p:nvSpPr>
+        <p:spPr>
+          <a:xfrm>
+            <a:off x="457200" y="4389120"/>
+            <a:ext cx="8229600" cy="365760"/>
+          </a:xfrm>
+          <a:prstGeom prst="rect">
+            <a:avLst/>
+          </a:prstGeom>
+          <a:noFill/>
+          <a:ln>
+            <a:noFill/>
+          </a:ln>
+        </p:spPr>
+        <p:txBody>
+          <a:bodyPr anchorCtr="0" anchor="ctr" bIns="45700" lIns="91425" spcFirstLastPara="1" rIns="91425" wrap="square" tIns="45700">
+            <a:noAutofit/>
+          </a:bodyPr>
+          <a:lstStyle/>
+          <a:p>
+            <a:pPr indent="0" lvl="0" marL="0" marR="0" rtl="0" algn="l">
+              <a:spcBef>
+                <a:spcPts val="0"/>
+              </a:spcBef>
+              <a:spcAft>
+                <a:spcPts val="0"/>
+              </a:spcAft>
+              <a:buClr>
+                <a:srgbClr val="FFFFFF"/>
+              </a:buClr>
+              <a:buSzPts val="1400"/>
+              <a:buFont typeface="Arial Black"/>
+              <a:buNone/>
+            </a:pPr>
+            <a:r>
+              <a:rPr b="0" i="0" lang="en-GB" sz="1400" u="none" cap="none" strike="noStrike">
+                <a:solidFill>
+                  <a:srgbClr val="FFFFFF"/>
+                </a:solidFill>
+                <a:latin typeface="Arial Black"/>
+                <a:ea typeface="Arial Black"/>
+                <a:cs typeface="Arial Black"/>
+                <a:sym typeface="Arial Black"/>
+              </a:rPr>
+              <a:t>Let's schedule the kickoff.</a:t>
+            </a:r>
+            <a:endParaRPr b="0" i="0" sz="1400" u="none" cap="none" strike="noStrike">
+              <a:solidFill>
+                <a:schemeClr val="dk1"/>
+              </a:solidFill>
+              <a:latin typeface="Calibri"/>
+              <a:ea typeface="Calibri"/>
+              <a:cs typeface="Calibri"/>
+              <a:sym typeface="Calibri"/>
+            </a:endParaRPr>
+          </a:p>
+        </p:txBody>
+      </p:sp>
+    </p:spTree>
+  </p:cSld>
+  <p:clrMapOvr>
+    <a:masterClrMapping/>
+  </p:clrMapOvr>
+  <p:timing>
+    <p:tnLst>
+      <p:par>
+        <p:cTn dur="indefinite" nodeType="tmRoot" restart="never">
+          <p:childTnLst>
+            <p:seq concurrent="1" nextAc="seek">
+              <p:cTn dur="indefinite" id="2" nodeType="mainSeq">
+                <p:childTnLst>
+                  <p:par>
+                    <p:cTn fill="hold">
+                      <p:stCondLst>
+                        <p:cond delay="indefinite"/>
+                      </p:stCondLst>
+                      <p:childTnLst>
+                        <p:par>
+                          <p:cTn fill="hold">
+                            <p:stCondLst>
+                              <p:cond delay="0"/>
+                            </p:stCondLst>
+                            <p:childTnLst>
+                              <p:par>
+                                <p:cTn fill="hold" nodeType="clickEffect" presetClass="entr" presetID="10" presetSubtype="0">
+                                  <p:stCondLst>
+                                    <p:cond delay="0"/>
+                                  </p:stCondLst>
+                                  <p:childTnLst>
+                                    <p:set>
+                                      <p:cBhvr>
+                                        <p:cTn dur="1" fill="hold">
+                                          <p:stCondLst>
+                                            <p:cond delay="0"/>
+                                          </p:stCondLst>
+                                        </p:cTn>
+                                        <p:tgtEl>
+                                          <p:spTgt spid="235"/>
+                                        </p:tgtEl>
+                                        <p:attrNameLst>
+                                          <p:attrName>style.visibility</p:attrName>
+                                        </p:attrNameLst>
+                                      </p:cBhvr>
+                                      <p:to>
+                                        <p:strVal val="visible"/>
+                                      </p:to>
+                                    </p:set>
+                                    <p:animEffect filter="fade" transition="in">
+                                      <p:cBhvr>
+                                        <p:cTn dur="1000"/>
+                                        <p:tgtEl>
+                                          <p:spTgt spid="235"/>
+                                        </p:tgtEl>
+                                      </p:cBhvr>
+                                    </p:animEffect>
+                                  </p:childTnLst>
+                                </p:cTn>
+                              </p:par>
+                              <p:par>
+                                <p:cTn fill="hold" nodeType="withEffect" presetClass="entr" presetID="2" presetSubtype="2">
+                                  <p:stCondLst>
+                                    <p:cond delay="0"/>
+                                  </p:stCondLst>
+                                  <p:childTnLst>
+                                    <p:set>
+                                      <p:cBhvr>
+                                        <p:cTn dur="1" fill="hold">
+                                          <p:stCondLst>
+                                            <p:cond delay="0"/>
+                                          </p:stCondLst>
+                                        </p:cTn>
+                                        <p:tgtEl>
+                                          <p:spTgt spid="236"/>
+                                        </p:tgtEl>
+                                        <p:attrNameLst>
+                                          <p:attrName>style.visibility</p:attrName>
+                                        </p:attrNameLst>
+                                      </p:cBhvr>
+                                      <p:to>
+                                        <p:strVal val="visible"/>
+                                      </p:to>
+                                    </p:set>
+                                    <p:anim calcmode="lin" valueType="num">
+                                      <p:cBhvr additive="base">
+                                        <p:cTn dur="1000"/>
+                                        <p:tgtEl>
+                                          <p:spTgt spid="236"/>
                                         </p:tgtEl>
                                         <p:attrNameLst>
                                           <p:attrName>ppt_x</p:attrName>
@@ -9450,7 +10513,7 @@
                                           </p:stCondLst>
                                         </p:cTn>
                                         <p:tgtEl>
-                                          <p:spTgt spid="226"/>
+                                          <p:spTgt spid="238"/>
                                         </p:tgtEl>
                                         <p:attrNameLst>
                                           <p:attrName>style.visibility</p:attrName>
@@ -9464,7 +10527,7 @@
                                       <p:cBhvr>
                                         <p:cTn dur="1000"/>
                                         <p:tgtEl>
-                                          <p:spTgt spid="226"/>
+                                          <p:spTgt spid="238"/>
                                         </p:tgtEl>
                                       </p:cBhvr>
                                     </p:animEffect>
@@ -9485,7 +10548,7 @@
                                           </p:stCondLst>
                                         </p:cTn>
                                         <p:tgtEl>
-                                          <p:spTgt spid="227"/>
+                                          <p:spTgt spid="239"/>
                                         </p:tgtEl>
                                         <p:attrNameLst>
                                           <p:attrName>style.visibility</p:attrName>
@@ -9499,7 +10562,213 @@
                                       <p:cBhvr additive="base">
                                         <p:cTn dur="1000"/>
                                         <p:tgtEl>
-                                          <p:spTgt spid="227"/>
+                                          <p:spTgt spid="239"/>
+                                        </p:tgtEl>
+                                        <p:attrNameLst>
+                                          <p:attrName>ppt_x</p:attrName>
+                                        </p:attrNameLst>
+                                      </p:cBhvr>
+                                      <p:tavLst>
+                                        <p:tav fmla="" tm="0">
+                                          <p:val>
+                                            <p:strVal val="#ppt_x+1"/>
+                                          </p:val>
+                                        </p:tav>
+                                        <p:tav fmla="" tm="100000">
+                                          <p:val>
+                                            <p:strVal val="#ppt_x"/>
+                                          </p:val>
+                                        </p:tav>
+                                      </p:tavLst>
+                                    </p:anim>
+                                  </p:childTnLst>
+                                </p:cTn>
+                              </p:par>
+                            </p:childTnLst>
+                          </p:cTn>
+                        </p:par>
+                      </p:childTnLst>
+                    </p:cTn>
+                  </p:par>
+                  <p:par>
+                    <p:cTn fill="hold">
+                      <p:stCondLst>
+                        <p:cond delay="indefinite"/>
+                      </p:stCondLst>
+                      <p:childTnLst>
+                        <p:par>
+                          <p:cTn fill="hold">
+                            <p:stCondLst>
+                              <p:cond delay="0"/>
+                            </p:stCondLst>
+                            <p:childTnLst>
+                              <p:par>
+                                <p:cTn fill="hold" nodeType="clickEffect" presetClass="entr" presetID="10" presetSubtype="0">
+                                  <p:stCondLst>
+                                    <p:cond delay="0"/>
+                                  </p:stCondLst>
+                                  <p:childTnLst>
+                                    <p:set>
+                                      <p:cBhvr>
+                                        <p:cTn dur="1" fill="hold">
+                                          <p:stCondLst>
+                                            <p:cond delay="0"/>
+                                          </p:stCondLst>
+                                        </p:cTn>
+                                        <p:tgtEl>
+                                          <p:spTgt spid="241"/>
+                                        </p:tgtEl>
+                                        <p:attrNameLst>
+                                          <p:attrName>style.visibility</p:attrName>
+                                        </p:attrNameLst>
+                                      </p:cBhvr>
+                                      <p:to>
+                                        <p:strVal val="visible"/>
+                                      </p:to>
+                                    </p:set>
+                                    <p:animEffect filter="fade" transition="in">
+                                      <p:cBhvr>
+                                        <p:cTn dur="1000"/>
+                                        <p:tgtEl>
+                                          <p:spTgt spid="241"/>
+                                        </p:tgtEl>
+                                      </p:cBhvr>
+                                    </p:animEffect>
+                                  </p:childTnLst>
+                                </p:cTn>
+                              </p:par>
+                              <p:par>
+                                <p:cTn fill="hold" nodeType="withEffect" presetClass="entr" presetID="2" presetSubtype="2">
+                                  <p:stCondLst>
+                                    <p:cond delay="0"/>
+                                  </p:stCondLst>
+                                  <p:childTnLst>
+                                    <p:set>
+                                      <p:cBhvr>
+                                        <p:cTn dur="1" fill="hold">
+                                          <p:stCondLst>
+                                            <p:cond delay="0"/>
+                                          </p:stCondLst>
+                                        </p:cTn>
+                                        <p:tgtEl>
+                                          <p:spTgt spid="242"/>
+                                        </p:tgtEl>
+                                        <p:attrNameLst>
+                                          <p:attrName>style.visibility</p:attrName>
+                                        </p:attrNameLst>
+                                      </p:cBhvr>
+                                      <p:to>
+                                        <p:strVal val="visible"/>
+                                      </p:to>
+                                    </p:set>
+                                    <p:anim calcmode="lin" valueType="num">
+                                      <p:cBhvr additive="base">
+                                        <p:cTn dur="1000"/>
+                                        <p:tgtEl>
+                                          <p:spTgt spid="242"/>
+                                        </p:tgtEl>
+                                        <p:attrNameLst>
+                                          <p:attrName>ppt_x</p:attrName>
+                                        </p:attrNameLst>
+                                      </p:cBhvr>
+                                      <p:tavLst>
+                                        <p:tav fmla="" tm="0">
+                                          <p:val>
+                                            <p:strVal val="#ppt_x+1"/>
+                                          </p:val>
+                                        </p:tav>
+                                        <p:tav fmla="" tm="100000">
+                                          <p:val>
+                                            <p:strVal val="#ppt_x"/>
+                                          </p:val>
+                                        </p:tav>
+                                      </p:tavLst>
+                                    </p:anim>
+                                  </p:childTnLst>
+                                </p:cTn>
+                              </p:par>
+                            </p:childTnLst>
+                          </p:cTn>
+                        </p:par>
+                      </p:childTnLst>
+                    </p:cTn>
+                  </p:par>
+                  <p:par>
+                    <p:cTn fill="hold">
+                      <p:stCondLst>
+                        <p:cond delay="indefinite"/>
+                      </p:stCondLst>
+                      <p:childTnLst>
+                        <p:par>
+                          <p:cTn fill="hold">
+                            <p:stCondLst>
+                              <p:cond delay="0"/>
+                            </p:stCondLst>
+                            <p:childTnLst>
+                              <p:par>
+                                <p:cTn fill="hold" nodeType="clickEffect" presetClass="entr" presetID="10" presetSubtype="0">
+                                  <p:stCondLst>
+                                    <p:cond delay="0"/>
+                                  </p:stCondLst>
+                                  <p:childTnLst>
+                                    <p:set>
+                                      <p:cBhvr>
+                                        <p:cTn dur="1" fill="hold">
+                                          <p:stCondLst>
+                                            <p:cond delay="0"/>
+                                          </p:stCondLst>
+                                        </p:cTn>
+                                        <p:tgtEl>
+                                          <p:spTgt spid="244"/>
+                                        </p:tgtEl>
+                                        <p:attrNameLst>
+                                          <p:attrName>style.visibility</p:attrName>
+                                        </p:attrNameLst>
+                                      </p:cBhvr>
+                                      <p:to>
+                                        <p:strVal val="visible"/>
+                                      </p:to>
+                                    </p:set>
+                                    <p:animEffect filter="fade" transition="in">
+                                      <p:cBhvr>
+                                        <p:cTn dur="1000"/>
+                                        <p:tgtEl>
+                                          <p:spTgt spid="244"/>
+                                        </p:tgtEl>
+                                      </p:cBhvr>
+                                    </p:animEffect>
+                                  </p:childTnLst>
+                                </p:cTn>
+                              </p:par>
+                              <p:par>
+                                <p:cTn fill="hold" nodeType="withEffect" presetClass="entr" presetID="2" presetSubtype="2">
+                                  <p:stCondLst>
+                                    <p:cond delay="0"/>
+                                  </p:stCondLst>
+                                  <p:childTnLst>
+                                    <p:set>
+                                      <p:cBhvr>
+                                        <p:cTn dur="1" fill="hold">
+                                          <p:stCondLst>
+                                            <p:cond delay="0"/>
+                                          </p:stCondLst>
+                                        </p:cTn>
+                                        <p:tgtEl>
+                                          <p:spTgt spid="245"/>
+                                        </p:tgtEl>
+                                        <p:attrNameLst>
+                                          <p:attrName>style.visibility</p:attrName>
+                                        </p:attrNameLst>
+                                      </p:cBhvr>
+                                      <p:to>
+                                        <p:strVal val="visible"/>
+                                      </p:to>
+                                    </p:set>
+                                    <p:anim calcmode="lin" valueType="num">
+                                      <p:cBhvr additive="base">
+                                        <p:cTn dur="1000"/>
+                                        <p:tgtEl>
+                                          <p:spTgt spid="245"/>
                                         </p:tgtEl>
                                         <p:attrNameLst>
                                           <p:attrName>ppt_x</p:attrName>
@@ -9553,7 +10822,7 @@
                                           </p:stCondLst>
                                         </p:cTn>
                                         <p:tgtEl>
-                                          <p:spTgt spid="228"/>
+                                          <p:spTgt spid="246"/>
                                         </p:tgtEl>
                                         <p:attrNameLst>
                                           <p:attrName>style.visibility</p:attrName>
@@ -9567,7 +10836,7 @@
                                       <p:cBhvr additive="base">
                                         <p:cTn dur="1000"/>
                                         <p:tgtEl>
-                                          <p:spTgt spid="228"/>
+                                          <p:spTgt spid="246"/>
                                         </p:tgtEl>
                                         <p:attrNameLst>
                                           <p:attrName>ppt_y</p:attrName>
@@ -9621,7 +10890,7 @@
                                           </p:stCondLst>
                                         </p:cTn>
                                         <p:tgtEl>
-                                          <p:spTgt spid="229"/>
+                                          <p:spTgt spid="247"/>
                                         </p:tgtEl>
                                         <p:attrNameLst>
                                           <p:attrName>style.visibility</p:attrName>
@@ -9635,7 +10904,7 @@
                                       <p:cBhvr additive="base">
                                         <p:cTn dur="1000"/>
                                         <p:tgtEl>
-                                          <p:spTgt spid="229"/>
+                                          <p:spTgt spid="247"/>
                                         </p:tgtEl>
                                         <p:attrNameLst>
                                           <p:attrName>ppt_y</p:attrName>
@@ -14956,7 +16225,7 @@
         <p:spPr>
           <a:xfrm>
             <a:off x="457200" y="274320"/>
-            <a:ext cx="8229600" cy="320040"/>
+            <a:ext cx="8229600" cy="320100"/>
           </a:xfrm>
           <a:prstGeom prst="rect">
             <a:avLst/>
@@ -14996,7 +16265,7 @@
                 <a:cs typeface="Arial"/>
                 <a:sym typeface="Arial"/>
               </a:rPr>
-              <a:t>METHOD</a:t>
+              <a:t>THE PROFIT ILLUSION</a:t>
             </a:r>
             <a:endParaRPr b="0" i="0" sz="1100" u="none" cap="none" strike="noStrike">
               <a:solidFill>
@@ -15059,6 +16328,1651 @@
                 <a:cs typeface="Arial Black"/>
                 <a:sym typeface="Arial Black"/>
               </a:rPr>
+              <a:t>What We Thought vs What Actually Is</a:t>
+            </a:r>
+            <a:endParaRPr b="0" i="0" sz="2200" u="none" cap="none" strike="noStrike">
+              <a:solidFill>
+                <a:schemeClr val="dk1"/>
+              </a:solidFill>
+              <a:latin typeface="Calibri"/>
+              <a:ea typeface="Calibri"/>
+              <a:cs typeface="Calibri"/>
+              <a:sym typeface="Calibri"/>
+            </a:endParaRPr>
+          </a:p>
+        </p:txBody>
+      </p:sp>
+      <p:sp>
+        <p:nvSpPr>
+          <p:cNvPr id="138" name="Google Shape;138;p19"/>
+          <p:cNvSpPr/>
+          <p:nvPr/>
+        </p:nvSpPr>
+        <p:spPr>
+          <a:xfrm>
+            <a:off x="457200" y="1188720"/>
+            <a:ext cx="3931800" cy="2011800"/>
+          </a:xfrm>
+          <a:prstGeom prst="rect">
+            <a:avLst/>
+          </a:prstGeom>
+          <a:solidFill>
+            <a:srgbClr val="FEF2F2"/>
+          </a:solidFill>
+          <a:ln cap="flat" cmpd="sng" w="19050">
+            <a:solidFill>
+              <a:srgbClr val="DC2626"/>
+            </a:solidFill>
+            <a:prstDash val="solid"/>
+            <a:round/>
+            <a:headEnd len="sm" w="sm" type="none"/>
+            <a:tailEnd len="sm" w="sm" type="none"/>
+          </a:ln>
+        </p:spPr>
+        <p:txBody>
+          <a:bodyPr anchorCtr="0" anchor="ctr" bIns="91425" lIns="91425" spcFirstLastPara="1" rIns="91425" wrap="square" tIns="91425">
+            <a:noAutofit/>
+          </a:bodyPr>
+          <a:lstStyle/>
+          <a:p>
+            <a:pPr indent="0" lvl="0" marL="0" rtl="0" algn="l">
+              <a:spcBef>
+                <a:spcPts val="0"/>
+              </a:spcBef>
+              <a:spcAft>
+                <a:spcPts val="0"/>
+              </a:spcAft>
+              <a:buNone/>
+            </a:pPr>
+            <a:r>
+              <a:t/>
+            </a:r>
+            <a:endParaRPr/>
+          </a:p>
+        </p:txBody>
+      </p:sp>
+      <p:sp>
+        <p:nvSpPr>
+          <p:cNvPr id="139" name="Google Shape;139;p19"/>
+          <p:cNvSpPr/>
+          <p:nvPr/>
+        </p:nvSpPr>
+        <p:spPr>
+          <a:xfrm>
+            <a:off x="640080" y="1280160"/>
+            <a:ext cx="3566100" cy="274200"/>
+          </a:xfrm>
+          <a:prstGeom prst="rect">
+            <a:avLst/>
+          </a:prstGeom>
+          <a:noFill/>
+          <a:ln>
+            <a:noFill/>
+          </a:ln>
+        </p:spPr>
+        <p:txBody>
+          <a:bodyPr anchorCtr="0" anchor="ctr" bIns="45700" lIns="91425" spcFirstLastPara="1" rIns="91425" wrap="square" tIns="45700">
+            <a:noAutofit/>
+          </a:bodyPr>
+          <a:lstStyle/>
+          <a:p>
+            <a:pPr indent="0" lvl="0" marL="0" marR="0" rtl="0" algn="l">
+              <a:spcBef>
+                <a:spcPts val="0"/>
+              </a:spcBef>
+              <a:spcAft>
+                <a:spcPts val="0"/>
+              </a:spcAft>
+              <a:buClr>
+                <a:srgbClr val="DC2626"/>
+              </a:buClr>
+              <a:buSzPts val="900"/>
+              <a:buFont typeface="Arial"/>
+              <a:buNone/>
+            </a:pPr>
+            <a:r>
+              <a:rPr b="1" i="0" lang="en-GB" sz="900" u="none" cap="none" strike="noStrike">
+                <a:solidFill>
+                  <a:srgbClr val="DC2626"/>
+                </a:solidFill>
+                <a:latin typeface="Arial"/>
+                <a:ea typeface="Arial"/>
+                <a:cs typeface="Arial"/>
+                <a:sym typeface="Arial"/>
+              </a:rPr>
+              <a:t>ORIGINAL SIGNAL</a:t>
+            </a:r>
+            <a:endParaRPr b="0" i="0" sz="900" u="none" cap="none" strike="noStrike">
+              <a:solidFill>
+                <a:schemeClr val="dk1"/>
+              </a:solidFill>
+              <a:latin typeface="Calibri"/>
+              <a:ea typeface="Calibri"/>
+              <a:cs typeface="Calibri"/>
+              <a:sym typeface="Calibri"/>
+            </a:endParaRPr>
+          </a:p>
+        </p:txBody>
+      </p:sp>
+      <p:sp>
+        <p:nvSpPr>
+          <p:cNvPr id="140" name="Google Shape;140;p19"/>
+          <p:cNvSpPr/>
+          <p:nvPr/>
+        </p:nvSpPr>
+        <p:spPr>
+          <a:xfrm>
+            <a:off x="640080" y="1600200"/>
+            <a:ext cx="3566100" cy="640200"/>
+          </a:xfrm>
+          <a:prstGeom prst="rect">
+            <a:avLst/>
+          </a:prstGeom>
+          <a:noFill/>
+          <a:ln>
+            <a:noFill/>
+          </a:ln>
+        </p:spPr>
+        <p:txBody>
+          <a:bodyPr anchorCtr="0" anchor="ctr" bIns="45700" lIns="91425" spcFirstLastPara="1" rIns="91425" wrap="square" tIns="45700">
+            <a:noAutofit/>
+          </a:bodyPr>
+          <a:lstStyle/>
+          <a:p>
+            <a:pPr indent="0" lvl="0" marL="0" marR="0" rtl="0" algn="l">
+              <a:spcBef>
+                <a:spcPts val="0"/>
+              </a:spcBef>
+              <a:spcAft>
+                <a:spcPts val="0"/>
+              </a:spcAft>
+              <a:buClr>
+                <a:srgbClr val="DC2626"/>
+              </a:buClr>
+              <a:buSzPts val="3600"/>
+              <a:buFont typeface="Arial Black"/>
+              <a:buNone/>
+            </a:pPr>
+            <a:r>
+              <a:rPr b="0" i="0" lang="en-GB" sz="3600" u="none" cap="none" strike="noStrike">
+                <a:solidFill>
+                  <a:srgbClr val="DC2626"/>
+                </a:solidFill>
+                <a:latin typeface="Arial Black"/>
+                <a:ea typeface="Arial Black"/>
+                <a:cs typeface="Arial Black"/>
+                <a:sym typeface="Arial Black"/>
+              </a:rPr>
+              <a:t>$3.88M</a:t>
+            </a:r>
+            <a:endParaRPr b="0" i="0" sz="3600" u="none" cap="none" strike="noStrike">
+              <a:solidFill>
+                <a:schemeClr val="dk1"/>
+              </a:solidFill>
+              <a:latin typeface="Calibri"/>
+              <a:ea typeface="Calibri"/>
+              <a:cs typeface="Calibri"/>
+              <a:sym typeface="Calibri"/>
+            </a:endParaRPr>
+          </a:p>
+        </p:txBody>
+      </p:sp>
+      <p:sp>
+        <p:nvSpPr>
+          <p:cNvPr id="141" name="Google Shape;141;p19"/>
+          <p:cNvSpPr/>
+          <p:nvPr/>
+        </p:nvSpPr>
+        <p:spPr>
+          <a:xfrm>
+            <a:off x="640080" y="2286000"/>
+            <a:ext cx="3566100" cy="640200"/>
+          </a:xfrm>
+          <a:prstGeom prst="rect">
+            <a:avLst/>
+          </a:prstGeom>
+          <a:noFill/>
+          <a:ln>
+            <a:noFill/>
+          </a:ln>
+        </p:spPr>
+        <p:txBody>
+          <a:bodyPr anchorCtr="0" anchor="ctr" bIns="45700" lIns="91425" spcFirstLastPara="1" rIns="91425" wrap="square" tIns="45700">
+            <a:noAutofit/>
+          </a:bodyPr>
+          <a:lstStyle/>
+          <a:p>
+            <a:pPr indent="0" lvl="0" marL="0" marR="0" rtl="0" algn="l">
+              <a:spcBef>
+                <a:spcPts val="0"/>
+              </a:spcBef>
+              <a:spcAft>
+                <a:spcPts val="0"/>
+              </a:spcAft>
+              <a:buClr>
+                <a:srgbClr val="1E293B"/>
+              </a:buClr>
+              <a:buSzPts val="1100"/>
+              <a:buFont typeface="Arial"/>
+              <a:buNone/>
+            </a:pPr>
+            <a:r>
+              <a:rPr b="0" i="0" lang="en-GB" sz="1100" u="none" cap="none" strike="noStrike">
+                <a:solidFill>
+                  <a:srgbClr val="1E293B"/>
+                </a:solidFill>
+                <a:latin typeface="Arial"/>
+                <a:ea typeface="Arial"/>
+                <a:cs typeface="Arial"/>
+                <a:sym typeface="Arial"/>
+              </a:rPr>
+              <a:t>Implied loss across 33,784 orders</a:t>
+            </a:r>
+            <a:endParaRPr b="0" i="0" sz="1100" u="none" cap="none" strike="noStrike">
+              <a:solidFill>
+                <a:schemeClr val="dk1"/>
+              </a:solidFill>
+              <a:latin typeface="Calibri"/>
+              <a:ea typeface="Calibri"/>
+              <a:cs typeface="Calibri"/>
+              <a:sym typeface="Calibri"/>
+            </a:endParaRPr>
+          </a:p>
+          <a:p>
+            <a:pPr indent="0" lvl="0" marL="0" marR="0" rtl="0" algn="l">
+              <a:spcBef>
+                <a:spcPts val="0"/>
+              </a:spcBef>
+              <a:spcAft>
+                <a:spcPts val="0"/>
+              </a:spcAft>
+              <a:buClr>
+                <a:srgbClr val="1E293B"/>
+              </a:buClr>
+              <a:buSzPts val="1100"/>
+              <a:buFont typeface="Arial"/>
+              <a:buNone/>
+            </a:pPr>
+            <a:r>
+              <a:rPr b="0" i="0" lang="en-GB" sz="1100" u="none" cap="none" strike="noStrike">
+                <a:solidFill>
+                  <a:srgbClr val="1E293B"/>
+                </a:solidFill>
+                <a:latin typeface="Arial"/>
+                <a:ea typeface="Arial"/>
+                <a:cs typeface="Arial"/>
+                <a:sym typeface="Arial"/>
+              </a:rPr>
+              <a:t>(18.7% of total volume)</a:t>
+            </a:r>
+            <a:endParaRPr b="0" i="0" sz="1100" u="none" cap="none" strike="noStrike">
+              <a:solidFill>
+                <a:schemeClr val="dk1"/>
+              </a:solidFill>
+              <a:latin typeface="Calibri"/>
+              <a:ea typeface="Calibri"/>
+              <a:cs typeface="Calibri"/>
+              <a:sym typeface="Calibri"/>
+            </a:endParaRPr>
+          </a:p>
+        </p:txBody>
+      </p:sp>
+      <p:sp>
+        <p:nvSpPr>
+          <p:cNvPr id="142" name="Google Shape;142;p19"/>
+          <p:cNvSpPr/>
+          <p:nvPr/>
+        </p:nvSpPr>
+        <p:spPr>
+          <a:xfrm>
+            <a:off x="4754880" y="1188720"/>
+            <a:ext cx="3931800" cy="2011800"/>
+          </a:xfrm>
+          <a:prstGeom prst="rect">
+            <a:avLst/>
+          </a:prstGeom>
+          <a:solidFill>
+            <a:srgbClr val="ECFDF5"/>
+          </a:solidFill>
+          <a:ln cap="flat" cmpd="sng" w="19050">
+            <a:solidFill>
+              <a:srgbClr val="059669"/>
+            </a:solidFill>
+            <a:prstDash val="solid"/>
+            <a:round/>
+            <a:headEnd len="sm" w="sm" type="none"/>
+            <a:tailEnd len="sm" w="sm" type="none"/>
+          </a:ln>
+        </p:spPr>
+        <p:txBody>
+          <a:bodyPr anchorCtr="0" anchor="ctr" bIns="91425" lIns="91425" spcFirstLastPara="1" rIns="91425" wrap="square" tIns="91425">
+            <a:noAutofit/>
+          </a:bodyPr>
+          <a:lstStyle/>
+          <a:p>
+            <a:pPr indent="0" lvl="0" marL="0" rtl="0" algn="l">
+              <a:spcBef>
+                <a:spcPts val="0"/>
+              </a:spcBef>
+              <a:spcAft>
+                <a:spcPts val="0"/>
+              </a:spcAft>
+              <a:buNone/>
+            </a:pPr>
+            <a:r>
+              <a:t/>
+            </a:r>
+            <a:endParaRPr/>
+          </a:p>
+        </p:txBody>
+      </p:sp>
+      <p:sp>
+        <p:nvSpPr>
+          <p:cNvPr id="143" name="Google Shape;143;p19"/>
+          <p:cNvSpPr/>
+          <p:nvPr/>
+        </p:nvSpPr>
+        <p:spPr>
+          <a:xfrm>
+            <a:off x="4937760" y="1280160"/>
+            <a:ext cx="3566100" cy="274200"/>
+          </a:xfrm>
+          <a:prstGeom prst="rect">
+            <a:avLst/>
+          </a:prstGeom>
+          <a:noFill/>
+          <a:ln>
+            <a:noFill/>
+          </a:ln>
+        </p:spPr>
+        <p:txBody>
+          <a:bodyPr anchorCtr="0" anchor="ctr" bIns="45700" lIns="91425" spcFirstLastPara="1" rIns="91425" wrap="square" tIns="45700">
+            <a:noAutofit/>
+          </a:bodyPr>
+          <a:lstStyle/>
+          <a:p>
+            <a:pPr indent="0" lvl="0" marL="0" marR="0" rtl="0" algn="l">
+              <a:spcBef>
+                <a:spcPts val="0"/>
+              </a:spcBef>
+              <a:spcAft>
+                <a:spcPts val="0"/>
+              </a:spcAft>
+              <a:buClr>
+                <a:srgbClr val="059669"/>
+              </a:buClr>
+              <a:buSzPts val="900"/>
+              <a:buFont typeface="Arial"/>
+              <a:buNone/>
+            </a:pPr>
+            <a:r>
+              <a:rPr b="1" i="0" lang="en-GB" sz="900" u="none" cap="none" strike="noStrike">
+                <a:solidFill>
+                  <a:srgbClr val="059669"/>
+                </a:solidFill>
+                <a:latin typeface="Arial"/>
+                <a:ea typeface="Arial"/>
+                <a:cs typeface="Arial"/>
+                <a:sym typeface="Arial"/>
+              </a:rPr>
+              <a:t>RECONSTRUCTED REALITY</a:t>
+            </a:r>
+            <a:endParaRPr b="0" i="0" sz="900" u="none" cap="none" strike="noStrike">
+              <a:solidFill>
+                <a:schemeClr val="dk1"/>
+              </a:solidFill>
+              <a:latin typeface="Calibri"/>
+              <a:ea typeface="Calibri"/>
+              <a:cs typeface="Calibri"/>
+              <a:sym typeface="Calibri"/>
+            </a:endParaRPr>
+          </a:p>
+        </p:txBody>
+      </p:sp>
+      <p:sp>
+        <p:nvSpPr>
+          <p:cNvPr id="144" name="Google Shape;144;p19"/>
+          <p:cNvSpPr/>
+          <p:nvPr/>
+        </p:nvSpPr>
+        <p:spPr>
+          <a:xfrm>
+            <a:off x="4937760" y="1600200"/>
+            <a:ext cx="3566100" cy="640200"/>
+          </a:xfrm>
+          <a:prstGeom prst="rect">
+            <a:avLst/>
+          </a:prstGeom>
+          <a:noFill/>
+          <a:ln>
+            <a:noFill/>
+          </a:ln>
+        </p:spPr>
+        <p:txBody>
+          <a:bodyPr anchorCtr="0" anchor="ctr" bIns="45700" lIns="91425" spcFirstLastPara="1" rIns="91425" wrap="square" tIns="45700">
+            <a:noAutofit/>
+          </a:bodyPr>
+          <a:lstStyle/>
+          <a:p>
+            <a:pPr indent="0" lvl="0" marL="0" marR="0" rtl="0" algn="l">
+              <a:spcBef>
+                <a:spcPts val="0"/>
+              </a:spcBef>
+              <a:spcAft>
+                <a:spcPts val="0"/>
+              </a:spcAft>
+              <a:buClr>
+                <a:srgbClr val="059669"/>
+              </a:buClr>
+              <a:buSzPts val="3600"/>
+              <a:buFont typeface="Arial Black"/>
+              <a:buNone/>
+            </a:pPr>
+            <a:r>
+              <a:rPr b="0" i="0" lang="en-GB" sz="3600" u="none" cap="none" strike="noStrike">
+                <a:solidFill>
+                  <a:srgbClr val="059669"/>
+                </a:solidFill>
+                <a:latin typeface="Arial Black"/>
+                <a:ea typeface="Arial Black"/>
+                <a:cs typeface="Arial Black"/>
+                <a:sym typeface="Arial Black"/>
+              </a:rPr>
+              <a:t>$905</a:t>
+            </a:r>
+            <a:endParaRPr b="0" i="0" sz="3600" u="none" cap="none" strike="noStrike">
+              <a:solidFill>
+                <a:schemeClr val="dk1"/>
+              </a:solidFill>
+              <a:latin typeface="Calibri"/>
+              <a:ea typeface="Calibri"/>
+              <a:cs typeface="Calibri"/>
+              <a:sym typeface="Calibri"/>
+            </a:endParaRPr>
+          </a:p>
+        </p:txBody>
+      </p:sp>
+      <p:sp>
+        <p:nvSpPr>
+          <p:cNvPr id="145" name="Google Shape;145;p19"/>
+          <p:cNvSpPr/>
+          <p:nvPr/>
+        </p:nvSpPr>
+        <p:spPr>
+          <a:xfrm>
+            <a:off x="4937760" y="2286000"/>
+            <a:ext cx="3566100" cy="640200"/>
+          </a:xfrm>
+          <a:prstGeom prst="rect">
+            <a:avLst/>
+          </a:prstGeom>
+          <a:noFill/>
+          <a:ln>
+            <a:noFill/>
+          </a:ln>
+        </p:spPr>
+        <p:txBody>
+          <a:bodyPr anchorCtr="0" anchor="ctr" bIns="45700" lIns="91425" spcFirstLastPara="1" rIns="91425" wrap="square" tIns="45700">
+            <a:noAutofit/>
+          </a:bodyPr>
+          <a:lstStyle/>
+          <a:p>
+            <a:pPr indent="0" lvl="0" marL="0" marR="0" rtl="0" algn="l">
+              <a:spcBef>
+                <a:spcPts val="0"/>
+              </a:spcBef>
+              <a:spcAft>
+                <a:spcPts val="0"/>
+              </a:spcAft>
+              <a:buClr>
+                <a:srgbClr val="1E293B"/>
+              </a:buClr>
+              <a:buSzPts val="1100"/>
+              <a:buFont typeface="Arial"/>
+              <a:buNone/>
+            </a:pPr>
+            <a:r>
+              <a:rPr b="0" i="0" lang="en-GB" sz="1100" u="none" cap="none" strike="noStrike">
+                <a:solidFill>
+                  <a:srgbClr val="1E293B"/>
+                </a:solidFill>
+                <a:latin typeface="Arial"/>
+                <a:ea typeface="Arial"/>
+                <a:cs typeface="Arial"/>
+                <a:sym typeface="Arial"/>
+              </a:rPr>
+              <a:t>True loss across only 79 orders</a:t>
+            </a:r>
+            <a:endParaRPr b="0" i="0" sz="1100" u="none" cap="none" strike="noStrike">
+              <a:solidFill>
+                <a:schemeClr val="dk1"/>
+              </a:solidFill>
+              <a:latin typeface="Calibri"/>
+              <a:ea typeface="Calibri"/>
+              <a:cs typeface="Calibri"/>
+              <a:sym typeface="Calibri"/>
+            </a:endParaRPr>
+          </a:p>
+          <a:p>
+            <a:pPr indent="0" lvl="0" marL="0" marR="0" rtl="0" algn="l">
+              <a:spcBef>
+                <a:spcPts val="0"/>
+              </a:spcBef>
+              <a:spcAft>
+                <a:spcPts val="0"/>
+              </a:spcAft>
+              <a:buClr>
+                <a:srgbClr val="1E293B"/>
+              </a:buClr>
+              <a:buSzPts val="1100"/>
+              <a:buFont typeface="Arial"/>
+              <a:buNone/>
+            </a:pPr>
+            <a:r>
+              <a:rPr b="0" i="0" lang="en-GB" sz="1100" u="none" cap="none" strike="noStrike">
+                <a:solidFill>
+                  <a:srgbClr val="1E293B"/>
+                </a:solidFill>
+                <a:latin typeface="Arial"/>
+                <a:ea typeface="Arial"/>
+                <a:cs typeface="Arial"/>
+                <a:sym typeface="Arial"/>
+              </a:rPr>
+              <a:t>(0.04% of total volume)</a:t>
+            </a:r>
+            <a:endParaRPr b="0" i="0" sz="1100" u="none" cap="none" strike="noStrike">
+              <a:solidFill>
+                <a:schemeClr val="dk1"/>
+              </a:solidFill>
+              <a:latin typeface="Calibri"/>
+              <a:ea typeface="Calibri"/>
+              <a:cs typeface="Calibri"/>
+              <a:sym typeface="Calibri"/>
+            </a:endParaRPr>
+          </a:p>
+        </p:txBody>
+      </p:sp>
+      <p:sp>
+        <p:nvSpPr>
+          <p:cNvPr id="146" name="Google Shape;146;p19"/>
+          <p:cNvSpPr/>
+          <p:nvPr/>
+        </p:nvSpPr>
+        <p:spPr>
+          <a:xfrm>
+            <a:off x="457200" y="3383280"/>
+            <a:ext cx="8229600" cy="1371600"/>
+          </a:xfrm>
+          <a:prstGeom prst="rect">
+            <a:avLst/>
+          </a:prstGeom>
+          <a:solidFill>
+            <a:srgbClr val="0F172A"/>
+          </a:solidFill>
+          <a:ln>
+            <a:noFill/>
+          </a:ln>
+        </p:spPr>
+        <p:txBody>
+          <a:bodyPr anchorCtr="0" anchor="ctr" bIns="91425" lIns="91425" spcFirstLastPara="1" rIns="91425" wrap="square" tIns="91425">
+            <a:noAutofit/>
+          </a:bodyPr>
+          <a:lstStyle/>
+          <a:p>
+            <a:pPr indent="0" lvl="0" marL="0" rtl="0" algn="l">
+              <a:spcBef>
+                <a:spcPts val="0"/>
+              </a:spcBef>
+              <a:spcAft>
+                <a:spcPts val="0"/>
+              </a:spcAft>
+              <a:buNone/>
+            </a:pPr>
+            <a:r>
+              <a:t/>
+            </a:r>
+            <a:endParaRPr/>
+          </a:p>
+        </p:txBody>
+      </p:sp>
+      <p:sp>
+        <p:nvSpPr>
+          <p:cNvPr id="147" name="Google Shape;147;p19"/>
+          <p:cNvSpPr/>
+          <p:nvPr/>
+        </p:nvSpPr>
+        <p:spPr>
+          <a:xfrm>
+            <a:off x="640080" y="3520440"/>
+            <a:ext cx="7863900" cy="320100"/>
+          </a:xfrm>
+          <a:prstGeom prst="rect">
+            <a:avLst/>
+          </a:prstGeom>
+          <a:noFill/>
+          <a:ln>
+            <a:noFill/>
+          </a:ln>
+        </p:spPr>
+        <p:txBody>
+          <a:bodyPr anchorCtr="0" anchor="ctr" bIns="45700" lIns="91425" spcFirstLastPara="1" rIns="91425" wrap="square" tIns="45700">
+            <a:noAutofit/>
+          </a:bodyPr>
+          <a:lstStyle/>
+          <a:p>
+            <a:pPr indent="0" lvl="0" marL="0" marR="0" rtl="0" algn="l">
+              <a:spcBef>
+                <a:spcPts val="0"/>
+              </a:spcBef>
+              <a:spcAft>
+                <a:spcPts val="0"/>
+              </a:spcAft>
+              <a:buClr>
+                <a:srgbClr val="DC2626"/>
+              </a:buClr>
+              <a:buSzPts val="1000"/>
+              <a:buFont typeface="Arial"/>
+              <a:buNone/>
+            </a:pPr>
+            <a:r>
+              <a:rPr b="1" i="0" lang="en-GB" sz="1000" u="none" cap="none" strike="noStrike">
+                <a:solidFill>
+                  <a:srgbClr val="DC2626"/>
+                </a:solidFill>
+                <a:latin typeface="Arial"/>
+                <a:ea typeface="Arial"/>
+                <a:cs typeface="Arial"/>
+                <a:sym typeface="Arial"/>
+              </a:rPr>
+              <a:t>KEY DISCOVERY: PROFIT SIGNAL WAS CONTAMINATED</a:t>
+            </a:r>
+            <a:endParaRPr b="0" i="0" sz="1000" u="none" cap="none" strike="noStrike">
+              <a:solidFill>
+                <a:schemeClr val="dk1"/>
+              </a:solidFill>
+              <a:latin typeface="Calibri"/>
+              <a:ea typeface="Calibri"/>
+              <a:cs typeface="Calibri"/>
+              <a:sym typeface="Calibri"/>
+            </a:endParaRPr>
+          </a:p>
+        </p:txBody>
+      </p:sp>
+      <p:sp>
+        <p:nvSpPr>
+          <p:cNvPr id="148" name="Google Shape;148;p19"/>
+          <p:cNvSpPr/>
+          <p:nvPr/>
+        </p:nvSpPr>
+        <p:spPr>
+          <a:xfrm>
+            <a:off x="640080" y="3840480"/>
+            <a:ext cx="7863900" cy="777300"/>
+          </a:xfrm>
+          <a:prstGeom prst="rect">
+            <a:avLst/>
+          </a:prstGeom>
+          <a:noFill/>
+          <a:ln>
+            <a:noFill/>
+          </a:ln>
+        </p:spPr>
+        <p:txBody>
+          <a:bodyPr anchorCtr="0" anchor="ctr" bIns="45700" lIns="91425" spcFirstLastPara="1" rIns="91425" wrap="square" tIns="45700">
+            <a:noAutofit/>
+          </a:bodyPr>
+          <a:lstStyle/>
+          <a:p>
+            <a:pPr indent="0" lvl="0" marL="0" marR="0" rtl="0" algn="l">
+              <a:lnSpc>
+                <a:spcPct val="145454"/>
+              </a:lnSpc>
+              <a:spcBef>
+                <a:spcPts val="0"/>
+              </a:spcBef>
+              <a:spcAft>
+                <a:spcPts val="0"/>
+              </a:spcAft>
+              <a:buClr>
+                <a:srgbClr val="FFFFFF"/>
+              </a:buClr>
+              <a:buSzPts val="1100"/>
+              <a:buFont typeface="Arial"/>
+              <a:buNone/>
+            </a:pPr>
+            <a:r>
+              <a:rPr b="0" i="0" lang="en-GB" sz="1100" u="none" cap="none" strike="noStrike">
+                <a:solidFill>
+                  <a:srgbClr val="FFFFFF"/>
+                </a:solidFill>
+                <a:latin typeface="Arial"/>
+                <a:ea typeface="Arial"/>
+                <a:cs typeface="Arial"/>
+                <a:sym typeface="Arial"/>
+              </a:rPr>
+              <a:t>Same product (Field &amp; Stream Sportsman 16 Gun Fire Safe) showed $150 – $1,485 implied unit cost swing driven solely by discount bucket — on identical physical items. The original 'Benefit per order' field was noise, not signal. Discounts created 10× unit cost volatility.</a:t>
+            </a:r>
+            <a:endParaRPr b="0" i="0" sz="1100" u="none" cap="none" strike="noStrike">
+              <a:solidFill>
+                <a:schemeClr val="dk1"/>
+              </a:solidFill>
+              <a:latin typeface="Calibri"/>
+              <a:ea typeface="Calibri"/>
+              <a:cs typeface="Calibri"/>
+              <a:sym typeface="Calibri"/>
+            </a:endParaRPr>
+          </a:p>
+        </p:txBody>
+      </p:sp>
+    </p:spTree>
+  </p:cSld>
+  <p:clrMapOvr>
+    <a:masterClrMapping/>
+  </p:clrMapOvr>
+  <p:transition spd="med">
+    <p:push/>
+  </p:transition>
+  <p:timing>
+    <p:tnLst>
+      <p:par>
+        <p:cTn dur="indefinite" nodeType="tmRoot" restart="never">
+          <p:childTnLst>
+            <p:seq concurrent="1" nextAc="seek">
+              <p:cTn dur="indefinite" id="2" nodeType="mainSeq">
+                <p:childTnLst>
+                  <p:par>
+                    <p:cTn fill="hold">
+                      <p:stCondLst>
+                        <p:cond delay="indefinite"/>
+                      </p:stCondLst>
+                      <p:childTnLst>
+                        <p:par>
+                          <p:cTn fill="hold">
+                            <p:stCondLst>
+                              <p:cond delay="0"/>
+                            </p:stCondLst>
+                            <p:childTnLst>
+                              <p:par>
+                                <p:cTn fill="hold" nodeType="clickEffect" presetClass="entr" presetID="10" presetSubtype="0">
+                                  <p:stCondLst>
+                                    <p:cond delay="0"/>
+                                  </p:stCondLst>
+                                  <p:childTnLst>
+                                    <p:set>
+                                      <p:cBhvr>
+                                        <p:cTn dur="1" fill="hold">
+                                          <p:stCondLst>
+                                            <p:cond delay="0"/>
+                                          </p:stCondLst>
+                                        </p:cTn>
+                                        <p:tgtEl>
+                                          <p:spTgt spid="138"/>
+                                        </p:tgtEl>
+                                        <p:attrNameLst>
+                                          <p:attrName>style.visibility</p:attrName>
+                                        </p:attrNameLst>
+                                      </p:cBhvr>
+                                      <p:to>
+                                        <p:strVal val="visible"/>
+                                      </p:to>
+                                    </p:set>
+                                    <p:animEffect filter="fade" transition="in">
+                                      <p:cBhvr>
+                                        <p:cTn dur="1000"/>
+                                        <p:tgtEl>
+                                          <p:spTgt spid="138"/>
+                                        </p:tgtEl>
+                                      </p:cBhvr>
+                                    </p:animEffect>
+                                  </p:childTnLst>
+                                </p:cTn>
+                              </p:par>
+                            </p:childTnLst>
+                          </p:cTn>
+                        </p:par>
+                        <p:par>
+                          <p:cTn fill="hold">
+                            <p:stCondLst>
+                              <p:cond delay="1000"/>
+                            </p:stCondLst>
+                            <p:childTnLst>
+                              <p:par>
+                                <p:cTn fill="hold" nodeType="afterEffect" presetClass="entr" presetID="10" presetSubtype="0">
+                                  <p:stCondLst>
+                                    <p:cond delay="0"/>
+                                  </p:stCondLst>
+                                  <p:childTnLst>
+                                    <p:set>
+                                      <p:cBhvr>
+                                        <p:cTn dur="1" fill="hold">
+                                          <p:stCondLst>
+                                            <p:cond delay="0"/>
+                                          </p:stCondLst>
+                                        </p:cTn>
+                                        <p:tgtEl>
+                                          <p:spTgt spid="139"/>
+                                        </p:tgtEl>
+                                        <p:attrNameLst>
+                                          <p:attrName>style.visibility</p:attrName>
+                                        </p:attrNameLst>
+                                      </p:cBhvr>
+                                      <p:to>
+                                        <p:strVal val="visible"/>
+                                      </p:to>
+                                    </p:set>
+                                    <p:animEffect filter="fade" transition="in">
+                                      <p:cBhvr>
+                                        <p:cTn dur="1000"/>
+                                        <p:tgtEl>
+                                          <p:spTgt spid="139"/>
+                                        </p:tgtEl>
+                                      </p:cBhvr>
+                                    </p:animEffect>
+                                  </p:childTnLst>
+                                </p:cTn>
+                              </p:par>
+                              <p:par>
+                                <p:cTn fill="hold" nodeType="withEffect" presetClass="entr" presetID="23" presetSubtype="16">
+                                  <p:stCondLst>
+                                    <p:cond delay="0"/>
+                                  </p:stCondLst>
+                                  <p:childTnLst>
+                                    <p:set>
+                                      <p:cBhvr>
+                                        <p:cTn dur="1" fill="hold">
+                                          <p:stCondLst>
+                                            <p:cond delay="0"/>
+                                          </p:stCondLst>
+                                        </p:cTn>
+                                        <p:tgtEl>
+                                          <p:spTgt spid="140"/>
+                                        </p:tgtEl>
+                                        <p:attrNameLst>
+                                          <p:attrName>style.visibility</p:attrName>
+                                        </p:attrNameLst>
+                                      </p:cBhvr>
+                                      <p:to>
+                                        <p:strVal val="visible"/>
+                                      </p:to>
+                                    </p:set>
+                                    <p:anim calcmode="lin" valueType="num">
+                                      <p:cBhvr additive="base">
+                                        <p:cTn dur="1000"/>
+                                        <p:tgtEl>
+                                          <p:spTgt spid="140"/>
+                                        </p:tgtEl>
+                                        <p:attrNameLst>
+                                          <p:attrName>ppt_w</p:attrName>
+                                        </p:attrNameLst>
+                                      </p:cBhvr>
+                                      <p:tavLst>
+                                        <p:tav fmla="" tm="0">
+                                          <p:val>
+                                            <p:strVal val="0"/>
+                                          </p:val>
+                                        </p:tav>
+                                        <p:tav fmla="" tm="100000">
+                                          <p:val>
+                                            <p:strVal val="#ppt_w"/>
+                                          </p:val>
+                                        </p:tav>
+                                      </p:tavLst>
+                                    </p:anim>
+                                    <p:anim calcmode="lin" valueType="num">
+                                      <p:cBhvr additive="base">
+                                        <p:cTn dur="1000"/>
+                                        <p:tgtEl>
+                                          <p:spTgt spid="140"/>
+                                        </p:tgtEl>
+                                        <p:attrNameLst>
+                                          <p:attrName>ppt_h</p:attrName>
+                                        </p:attrNameLst>
+                                      </p:cBhvr>
+                                      <p:tavLst>
+                                        <p:tav fmla="" tm="0">
+                                          <p:val>
+                                            <p:strVal val="0"/>
+                                          </p:val>
+                                        </p:tav>
+                                        <p:tav fmla="" tm="100000">
+                                          <p:val>
+                                            <p:strVal val="#ppt_h"/>
+                                          </p:val>
+                                        </p:tav>
+                                      </p:tavLst>
+                                    </p:anim>
+                                  </p:childTnLst>
+                                </p:cTn>
+                              </p:par>
+                              <p:par>
+                                <p:cTn fill="hold" nodeType="withEffect" presetClass="entr" presetID="23" presetSubtype="16">
+                                  <p:stCondLst>
+                                    <p:cond delay="0"/>
+                                  </p:stCondLst>
+                                  <p:childTnLst>
+                                    <p:set>
+                                      <p:cBhvr>
+                                        <p:cTn dur="1" fill="hold">
+                                          <p:stCondLst>
+                                            <p:cond delay="0"/>
+                                          </p:stCondLst>
+                                        </p:cTn>
+                                        <p:tgtEl>
+                                          <p:spTgt spid="141"/>
+                                        </p:tgtEl>
+                                        <p:attrNameLst>
+                                          <p:attrName>style.visibility</p:attrName>
+                                        </p:attrNameLst>
+                                      </p:cBhvr>
+                                      <p:to>
+                                        <p:strVal val="visible"/>
+                                      </p:to>
+                                    </p:set>
+                                    <p:anim calcmode="lin" valueType="num">
+                                      <p:cBhvr additive="base">
+                                        <p:cTn dur="1000"/>
+                                        <p:tgtEl>
+                                          <p:spTgt spid="141"/>
+                                        </p:tgtEl>
+                                        <p:attrNameLst>
+                                          <p:attrName>ppt_w</p:attrName>
+                                        </p:attrNameLst>
+                                      </p:cBhvr>
+                                      <p:tavLst>
+                                        <p:tav fmla="" tm="0">
+                                          <p:val>
+                                            <p:strVal val="0"/>
+                                          </p:val>
+                                        </p:tav>
+                                        <p:tav fmla="" tm="100000">
+                                          <p:val>
+                                            <p:strVal val="#ppt_w"/>
+                                          </p:val>
+                                        </p:tav>
+                                      </p:tavLst>
+                                    </p:anim>
+                                    <p:anim calcmode="lin" valueType="num">
+                                      <p:cBhvr additive="base">
+                                        <p:cTn dur="1000"/>
+                                        <p:tgtEl>
+                                          <p:spTgt spid="141"/>
+                                        </p:tgtEl>
+                                        <p:attrNameLst>
+                                          <p:attrName>ppt_h</p:attrName>
+                                        </p:attrNameLst>
+                                      </p:cBhvr>
+                                      <p:tavLst>
+                                        <p:tav fmla="" tm="0">
+                                          <p:val>
+                                            <p:strVal val="0"/>
+                                          </p:val>
+                                        </p:tav>
+                                        <p:tav fmla="" tm="100000">
+                                          <p:val>
+                                            <p:strVal val="#ppt_h"/>
+                                          </p:val>
+                                        </p:tav>
+                                      </p:tavLst>
+                                    </p:anim>
+                                  </p:childTnLst>
+                                </p:cTn>
+                              </p:par>
+                            </p:childTnLst>
+                          </p:cTn>
+                        </p:par>
+                      </p:childTnLst>
+                    </p:cTn>
+                  </p:par>
+                  <p:par>
+                    <p:cTn fill="hold">
+                      <p:stCondLst>
+                        <p:cond delay="indefinite"/>
+                      </p:stCondLst>
+                      <p:childTnLst>
+                        <p:par>
+                          <p:cTn fill="hold">
+                            <p:stCondLst>
+                              <p:cond delay="0"/>
+                            </p:stCondLst>
+                            <p:childTnLst>
+                              <p:par>
+                                <p:cTn fill="hold" nodeType="clickEffect" presetClass="entr" presetID="10" presetSubtype="0">
+                                  <p:stCondLst>
+                                    <p:cond delay="0"/>
+                                  </p:stCondLst>
+                                  <p:childTnLst>
+                                    <p:set>
+                                      <p:cBhvr>
+                                        <p:cTn dur="1" fill="hold">
+                                          <p:stCondLst>
+                                            <p:cond delay="0"/>
+                                          </p:stCondLst>
+                                        </p:cTn>
+                                        <p:tgtEl>
+                                          <p:spTgt spid="146"/>
+                                        </p:tgtEl>
+                                        <p:attrNameLst>
+                                          <p:attrName>style.visibility</p:attrName>
+                                        </p:attrNameLst>
+                                      </p:cBhvr>
+                                      <p:to>
+                                        <p:strVal val="visible"/>
+                                      </p:to>
+                                    </p:set>
+                                    <p:animEffect filter="fade" transition="in">
+                                      <p:cBhvr>
+                                        <p:cTn dur="1000"/>
+                                        <p:tgtEl>
+                                          <p:spTgt spid="146"/>
+                                        </p:tgtEl>
+                                      </p:cBhvr>
+                                    </p:animEffect>
+                                  </p:childTnLst>
+                                </p:cTn>
+                              </p:par>
+                            </p:childTnLst>
+                          </p:cTn>
+                        </p:par>
+                        <p:par>
+                          <p:cTn fill="hold">
+                            <p:stCondLst>
+                              <p:cond delay="1000"/>
+                            </p:stCondLst>
+                            <p:childTnLst>
+                              <p:par>
+                                <p:cTn fill="hold" nodeType="afterEffect" presetClass="entr" presetID="23" presetSubtype="16">
+                                  <p:stCondLst>
+                                    <p:cond delay="0"/>
+                                  </p:stCondLst>
+                                  <p:childTnLst>
+                                    <p:set>
+                                      <p:cBhvr>
+                                        <p:cTn dur="1" fill="hold">
+                                          <p:stCondLst>
+                                            <p:cond delay="0"/>
+                                          </p:stCondLst>
+                                        </p:cTn>
+                                        <p:tgtEl>
+                                          <p:spTgt spid="147"/>
+                                        </p:tgtEl>
+                                        <p:attrNameLst>
+                                          <p:attrName>style.visibility</p:attrName>
+                                        </p:attrNameLst>
+                                      </p:cBhvr>
+                                      <p:to>
+                                        <p:strVal val="visible"/>
+                                      </p:to>
+                                    </p:set>
+                                    <p:anim calcmode="lin" valueType="num">
+                                      <p:cBhvr additive="base">
+                                        <p:cTn dur="1000"/>
+                                        <p:tgtEl>
+                                          <p:spTgt spid="147"/>
+                                        </p:tgtEl>
+                                        <p:attrNameLst>
+                                          <p:attrName>ppt_w</p:attrName>
+                                        </p:attrNameLst>
+                                      </p:cBhvr>
+                                      <p:tavLst>
+                                        <p:tav fmla="" tm="0">
+                                          <p:val>
+                                            <p:strVal val="0"/>
+                                          </p:val>
+                                        </p:tav>
+                                        <p:tav fmla="" tm="100000">
+                                          <p:val>
+                                            <p:strVal val="#ppt_w"/>
+                                          </p:val>
+                                        </p:tav>
+                                      </p:tavLst>
+                                    </p:anim>
+                                    <p:anim calcmode="lin" valueType="num">
+                                      <p:cBhvr additive="base">
+                                        <p:cTn dur="1000"/>
+                                        <p:tgtEl>
+                                          <p:spTgt spid="147"/>
+                                        </p:tgtEl>
+                                        <p:attrNameLst>
+                                          <p:attrName>ppt_h</p:attrName>
+                                        </p:attrNameLst>
+                                      </p:cBhvr>
+                                      <p:tavLst>
+                                        <p:tav fmla="" tm="0">
+                                          <p:val>
+                                            <p:strVal val="0"/>
+                                          </p:val>
+                                        </p:tav>
+                                        <p:tav fmla="" tm="100000">
+                                          <p:val>
+                                            <p:strVal val="#ppt_h"/>
+                                          </p:val>
+                                        </p:tav>
+                                      </p:tavLst>
+                                    </p:anim>
+                                  </p:childTnLst>
+                                </p:cTn>
+                              </p:par>
+                              <p:par>
+                                <p:cTn fill="hold" nodeType="withEffect" presetClass="entr" presetID="23" presetSubtype="16">
+                                  <p:stCondLst>
+                                    <p:cond delay="0"/>
+                                  </p:stCondLst>
+                                  <p:childTnLst>
+                                    <p:set>
+                                      <p:cBhvr>
+                                        <p:cTn dur="1" fill="hold">
+                                          <p:stCondLst>
+                                            <p:cond delay="0"/>
+                                          </p:stCondLst>
+                                        </p:cTn>
+                                        <p:tgtEl>
+                                          <p:spTgt spid="148"/>
+                                        </p:tgtEl>
+                                        <p:attrNameLst>
+                                          <p:attrName>style.visibility</p:attrName>
+                                        </p:attrNameLst>
+                                      </p:cBhvr>
+                                      <p:to>
+                                        <p:strVal val="visible"/>
+                                      </p:to>
+                                    </p:set>
+                                    <p:anim calcmode="lin" valueType="num">
+                                      <p:cBhvr additive="base">
+                                        <p:cTn dur="1000"/>
+                                        <p:tgtEl>
+                                          <p:spTgt spid="148"/>
+                                        </p:tgtEl>
+                                        <p:attrNameLst>
+                                          <p:attrName>ppt_w</p:attrName>
+                                        </p:attrNameLst>
+                                      </p:cBhvr>
+                                      <p:tavLst>
+                                        <p:tav fmla="" tm="0">
+                                          <p:val>
+                                            <p:strVal val="0"/>
+                                          </p:val>
+                                        </p:tav>
+                                        <p:tav fmla="" tm="100000">
+                                          <p:val>
+                                            <p:strVal val="#ppt_w"/>
+                                          </p:val>
+                                        </p:tav>
+                                      </p:tavLst>
+                                    </p:anim>
+                                    <p:anim calcmode="lin" valueType="num">
+                                      <p:cBhvr additive="base">
+                                        <p:cTn dur="1000"/>
+                                        <p:tgtEl>
+                                          <p:spTgt spid="148"/>
+                                        </p:tgtEl>
+                                        <p:attrNameLst>
+                                          <p:attrName>ppt_h</p:attrName>
+                                        </p:attrNameLst>
+                                      </p:cBhvr>
+                                      <p:tavLst>
+                                        <p:tav fmla="" tm="0">
+                                          <p:val>
+                                            <p:strVal val="0"/>
+                                          </p:val>
+                                        </p:tav>
+                                        <p:tav fmla="" tm="100000">
+                                          <p:val>
+                                            <p:strVal val="#ppt_h"/>
+                                          </p:val>
+                                        </p:tav>
+                                      </p:tavLst>
+                                    </p:anim>
+                                  </p:childTnLst>
+                                </p:cTn>
+                              </p:par>
+                            </p:childTnLst>
+                          </p:cTn>
+                        </p:par>
+                      </p:childTnLst>
+                    </p:cTn>
+                  </p:par>
+                  <p:par>
+                    <p:cTn fill="hold">
+                      <p:stCondLst>
+                        <p:cond delay="indefinite"/>
+                      </p:stCondLst>
+                      <p:childTnLst>
+                        <p:par>
+                          <p:cTn fill="hold">
+                            <p:stCondLst>
+                              <p:cond delay="0"/>
+                            </p:stCondLst>
+                            <p:childTnLst>
+                              <p:par>
+                                <p:cTn fill="hold" nodeType="clickEffect" presetClass="entr" presetID="10" presetSubtype="0">
+                                  <p:stCondLst>
+                                    <p:cond delay="0"/>
+                                  </p:stCondLst>
+                                  <p:childTnLst>
+                                    <p:set>
+                                      <p:cBhvr>
+                                        <p:cTn dur="1" fill="hold">
+                                          <p:stCondLst>
+                                            <p:cond delay="0"/>
+                                          </p:stCondLst>
+                                        </p:cTn>
+                                        <p:tgtEl>
+                                          <p:spTgt spid="142"/>
+                                        </p:tgtEl>
+                                        <p:attrNameLst>
+                                          <p:attrName>style.visibility</p:attrName>
+                                        </p:attrNameLst>
+                                      </p:cBhvr>
+                                      <p:to>
+                                        <p:strVal val="visible"/>
+                                      </p:to>
+                                    </p:set>
+                                    <p:animEffect filter="fade" transition="in">
+                                      <p:cBhvr>
+                                        <p:cTn dur="1000"/>
+                                        <p:tgtEl>
+                                          <p:spTgt spid="142"/>
+                                        </p:tgtEl>
+                                      </p:cBhvr>
+                                    </p:animEffect>
+                                  </p:childTnLst>
+                                </p:cTn>
+                              </p:par>
+                            </p:childTnLst>
+                          </p:cTn>
+                        </p:par>
+                        <p:par>
+                          <p:cTn fill="hold">
+                            <p:stCondLst>
+                              <p:cond delay="1000"/>
+                            </p:stCondLst>
+                            <p:childTnLst>
+                              <p:par>
+                                <p:cTn fill="hold" nodeType="afterEffect" presetClass="entr" presetID="23" presetSubtype="16">
+                                  <p:stCondLst>
+                                    <p:cond delay="0"/>
+                                  </p:stCondLst>
+                                  <p:childTnLst>
+                                    <p:set>
+                                      <p:cBhvr>
+                                        <p:cTn dur="1" fill="hold">
+                                          <p:stCondLst>
+                                            <p:cond delay="0"/>
+                                          </p:stCondLst>
+                                        </p:cTn>
+                                        <p:tgtEl>
+                                          <p:spTgt spid="143"/>
+                                        </p:tgtEl>
+                                        <p:attrNameLst>
+                                          <p:attrName>style.visibility</p:attrName>
+                                        </p:attrNameLst>
+                                      </p:cBhvr>
+                                      <p:to>
+                                        <p:strVal val="visible"/>
+                                      </p:to>
+                                    </p:set>
+                                    <p:anim calcmode="lin" valueType="num">
+                                      <p:cBhvr additive="base">
+                                        <p:cTn dur="1000"/>
+                                        <p:tgtEl>
+                                          <p:spTgt spid="143"/>
+                                        </p:tgtEl>
+                                        <p:attrNameLst>
+                                          <p:attrName>ppt_w</p:attrName>
+                                        </p:attrNameLst>
+                                      </p:cBhvr>
+                                      <p:tavLst>
+                                        <p:tav fmla="" tm="0">
+                                          <p:val>
+                                            <p:strVal val="0"/>
+                                          </p:val>
+                                        </p:tav>
+                                        <p:tav fmla="" tm="100000">
+                                          <p:val>
+                                            <p:strVal val="#ppt_w"/>
+                                          </p:val>
+                                        </p:tav>
+                                      </p:tavLst>
+                                    </p:anim>
+                                    <p:anim calcmode="lin" valueType="num">
+                                      <p:cBhvr additive="base">
+                                        <p:cTn dur="1000"/>
+                                        <p:tgtEl>
+                                          <p:spTgt spid="143"/>
+                                        </p:tgtEl>
+                                        <p:attrNameLst>
+                                          <p:attrName>ppt_h</p:attrName>
+                                        </p:attrNameLst>
+                                      </p:cBhvr>
+                                      <p:tavLst>
+                                        <p:tav fmla="" tm="0">
+                                          <p:val>
+                                            <p:strVal val="0"/>
+                                          </p:val>
+                                        </p:tav>
+                                        <p:tav fmla="" tm="100000">
+                                          <p:val>
+                                            <p:strVal val="#ppt_h"/>
+                                          </p:val>
+                                        </p:tav>
+                                      </p:tavLst>
+                                    </p:anim>
+                                  </p:childTnLst>
+                                </p:cTn>
+                              </p:par>
+                              <p:par>
+                                <p:cTn fill="hold" nodeType="withEffect" presetClass="entr" presetID="23" presetSubtype="16">
+                                  <p:stCondLst>
+                                    <p:cond delay="0"/>
+                                  </p:stCondLst>
+                                  <p:childTnLst>
+                                    <p:set>
+                                      <p:cBhvr>
+                                        <p:cTn dur="1" fill="hold">
+                                          <p:stCondLst>
+                                            <p:cond delay="0"/>
+                                          </p:stCondLst>
+                                        </p:cTn>
+                                        <p:tgtEl>
+                                          <p:spTgt spid="144"/>
+                                        </p:tgtEl>
+                                        <p:attrNameLst>
+                                          <p:attrName>style.visibility</p:attrName>
+                                        </p:attrNameLst>
+                                      </p:cBhvr>
+                                      <p:to>
+                                        <p:strVal val="visible"/>
+                                      </p:to>
+                                    </p:set>
+                                    <p:anim calcmode="lin" valueType="num">
+                                      <p:cBhvr additive="base">
+                                        <p:cTn dur="1000"/>
+                                        <p:tgtEl>
+                                          <p:spTgt spid="144"/>
+                                        </p:tgtEl>
+                                        <p:attrNameLst>
+                                          <p:attrName>ppt_w</p:attrName>
+                                        </p:attrNameLst>
+                                      </p:cBhvr>
+                                      <p:tavLst>
+                                        <p:tav fmla="" tm="0">
+                                          <p:val>
+                                            <p:strVal val="0"/>
+                                          </p:val>
+                                        </p:tav>
+                                        <p:tav fmla="" tm="100000">
+                                          <p:val>
+                                            <p:strVal val="#ppt_w"/>
+                                          </p:val>
+                                        </p:tav>
+                                      </p:tavLst>
+                                    </p:anim>
+                                    <p:anim calcmode="lin" valueType="num">
+                                      <p:cBhvr additive="base">
+                                        <p:cTn dur="1000"/>
+                                        <p:tgtEl>
+                                          <p:spTgt spid="144"/>
+                                        </p:tgtEl>
+                                        <p:attrNameLst>
+                                          <p:attrName>ppt_h</p:attrName>
+                                        </p:attrNameLst>
+                                      </p:cBhvr>
+                                      <p:tavLst>
+                                        <p:tav fmla="" tm="0">
+                                          <p:val>
+                                            <p:strVal val="0"/>
+                                          </p:val>
+                                        </p:tav>
+                                        <p:tav fmla="" tm="100000">
+                                          <p:val>
+                                            <p:strVal val="#ppt_h"/>
+                                          </p:val>
+                                        </p:tav>
+                                      </p:tavLst>
+                                    </p:anim>
+                                  </p:childTnLst>
+                                </p:cTn>
+                              </p:par>
+                              <p:par>
+                                <p:cTn fill="hold" nodeType="withEffect" presetClass="entr" presetID="23" presetSubtype="16">
+                                  <p:stCondLst>
+                                    <p:cond delay="0"/>
+                                  </p:stCondLst>
+                                  <p:childTnLst>
+                                    <p:set>
+                                      <p:cBhvr>
+                                        <p:cTn dur="1" fill="hold">
+                                          <p:stCondLst>
+                                            <p:cond delay="0"/>
+                                          </p:stCondLst>
+                                        </p:cTn>
+                                        <p:tgtEl>
+                                          <p:spTgt spid="145"/>
+                                        </p:tgtEl>
+                                        <p:attrNameLst>
+                                          <p:attrName>style.visibility</p:attrName>
+                                        </p:attrNameLst>
+                                      </p:cBhvr>
+                                      <p:to>
+                                        <p:strVal val="visible"/>
+                                      </p:to>
+                                    </p:set>
+                                    <p:anim calcmode="lin" valueType="num">
+                                      <p:cBhvr additive="base">
+                                        <p:cTn dur="1000"/>
+                                        <p:tgtEl>
+                                          <p:spTgt spid="145"/>
+                                        </p:tgtEl>
+                                        <p:attrNameLst>
+                                          <p:attrName>ppt_w</p:attrName>
+                                        </p:attrNameLst>
+                                      </p:cBhvr>
+                                      <p:tavLst>
+                                        <p:tav fmla="" tm="0">
+                                          <p:val>
+                                            <p:strVal val="0"/>
+                                          </p:val>
+                                        </p:tav>
+                                        <p:tav fmla="" tm="100000">
+                                          <p:val>
+                                            <p:strVal val="#ppt_w"/>
+                                          </p:val>
+                                        </p:tav>
+                                      </p:tavLst>
+                                    </p:anim>
+                                    <p:anim calcmode="lin" valueType="num">
+                                      <p:cBhvr additive="base">
+                                        <p:cTn dur="1000"/>
+                                        <p:tgtEl>
+                                          <p:spTgt spid="145"/>
+                                        </p:tgtEl>
+                                        <p:attrNameLst>
+                                          <p:attrName>ppt_h</p:attrName>
+                                        </p:attrNameLst>
+                                      </p:cBhvr>
+                                      <p:tavLst>
+                                        <p:tav fmla="" tm="0">
+                                          <p:val>
+                                            <p:strVal val="0"/>
+                                          </p:val>
+                                        </p:tav>
+                                        <p:tav fmla="" tm="100000">
+                                          <p:val>
+                                            <p:strVal val="#ppt_h"/>
+                                          </p:val>
+                                        </p:tav>
+                                      </p:tavLst>
+                                    </p:anim>
+                                  </p:childTnLst>
+                                </p:cTn>
+                              </p:par>
+                            </p:childTnLst>
+                          </p:cTn>
+                        </p:par>
+                      </p:childTnLst>
+                    </p:cTn>
+                  </p:par>
+                </p:childTnLst>
+              </p:cTn>
+              <p:prevCondLst>
+                <p:cond evt="onPrev">
+                  <p:tgtEl>
+                    <p:sldTgt/>
+                  </p:tgtEl>
+                </p:cond>
+              </p:prevCondLst>
+              <p:nextCondLst>
+                <p:cond evt="onNext">
+                  <p:tgtEl>
+                    <p:sldTgt/>
+                  </p:tgtEl>
+                </p:cond>
+              </p:nextCondLst>
+            </p:seq>
+          </p:childTnLst>
+        </p:cTn>
+      </p:par>
+    </p:tnLst>
+  </p:timing>
+</p:sld>
+</file>
+
+<file path=ppt/slides/slide6.xml><?xml version="1.0" encoding="utf-8"?>
+<p:sld xmlns:a="http://schemas.openxmlformats.org/drawingml/2006/main" xmlns:r="http://schemas.openxmlformats.org/officeDocument/2006/relationships" xmlns:mc="http://schemas.openxmlformats.org/markup-compatibility/2006" xmlns:mv="urn:schemas-microsoft-com:mac:vml" xmlns:p="http://schemas.openxmlformats.org/presentationml/2006/main" xmlns:c="http://schemas.openxmlformats.org/drawingml/2006/chart" xmlns:dgm="http://schemas.openxmlformats.org/drawingml/2006/diagram" xmlns:o="urn:schemas-microsoft-com:office:office" xmlns:v="urn:schemas-microsoft-com:vml" xmlns:pvml="urn:schemas-microsoft-com:office:powerpoint" xmlns:com="http://schemas.openxmlformats.org/drawingml/2006/compatibility" xmlns:p14="http://schemas.microsoft.com/office/powerpoint/2010/main" xmlns:p15="http://schemas.microsoft.com/office/powerpoint/2012/main" xmlns:ahyp="http://schemas.microsoft.com/office/drawing/2018/hyperlinkcolor">
+  <p:cSld>
+    <p:bg>
+      <p:bgPr>
+        <a:solidFill>
+          <a:srgbClr val="F8FAFC"/>
+        </a:solidFill>
+      </p:bgPr>
+    </p:bg>
+    <p:spTree>
+      <p:nvGrpSpPr>
+        <p:cNvPr id="153" name="Shape 153"/>
+        <p:cNvGrpSpPr/>
+        <p:nvPr/>
+      </p:nvGrpSpPr>
+      <p:grpSpPr>
+        <a:xfrm>
+          <a:off x="0" y="0"/>
+          <a:ext cx="0" cy="0"/>
+          <a:chOff x="0" y="0"/>
+          <a:chExt cx="0" cy="0"/>
+        </a:xfrm>
+      </p:grpSpPr>
+      <p:sp>
+        <p:nvSpPr>
+          <p:cNvPr id="154" name="Google Shape;154;p20"/>
+          <p:cNvSpPr/>
+          <p:nvPr/>
+        </p:nvSpPr>
+        <p:spPr>
+          <a:xfrm>
+            <a:off x="457200" y="274320"/>
+            <a:ext cx="8229600" cy="320040"/>
+          </a:xfrm>
+          <a:prstGeom prst="rect">
+            <a:avLst/>
+          </a:prstGeom>
+          <a:noFill/>
+          <a:ln>
+            <a:noFill/>
+          </a:ln>
+        </p:spPr>
+        <p:txBody>
+          <a:bodyPr anchorCtr="0" anchor="ctr" bIns="45700" lIns="91425" spcFirstLastPara="1" rIns="91425" wrap="square" tIns="45700">
+            <a:noAutofit/>
+          </a:bodyPr>
+          <a:lstStyle/>
+          <a:p>
+            <a:pPr indent="0" lvl="0" marL="0" marR="0" rtl="0" algn="l">
+              <a:spcBef>
+                <a:spcPts val="0"/>
+              </a:spcBef>
+              <a:spcAft>
+                <a:spcPts val="0"/>
+              </a:spcAft>
+              <a:buClr>
+                <a:srgbClr val="DC2626"/>
+              </a:buClr>
+              <a:buSzPts val="1100"/>
+              <a:buFont typeface="Arial"/>
+              <a:buNone/>
+            </a:pPr>
+            <a:r>
+              <a:rPr b="1" i="0" lang="en-GB" sz="1100" u="none" cap="none" strike="noStrike">
+                <a:solidFill>
+                  <a:srgbClr val="DC2626"/>
+                </a:solidFill>
+                <a:latin typeface="Arial"/>
+                <a:ea typeface="Arial"/>
+                <a:cs typeface="Arial"/>
+                <a:sym typeface="Arial"/>
+              </a:rPr>
+              <a:t>METHOD</a:t>
+            </a:r>
+            <a:endParaRPr b="0" i="0" sz="1100" u="none" cap="none" strike="noStrike">
+              <a:solidFill>
+                <a:schemeClr val="dk1"/>
+              </a:solidFill>
+              <a:latin typeface="Calibri"/>
+              <a:ea typeface="Calibri"/>
+              <a:cs typeface="Calibri"/>
+              <a:sym typeface="Calibri"/>
+            </a:endParaRPr>
+          </a:p>
+        </p:txBody>
+      </p:sp>
+      <p:sp>
+        <p:nvSpPr>
+          <p:cNvPr id="155" name="Google Shape;155;p20"/>
+          <p:cNvSpPr/>
+          <p:nvPr/>
+        </p:nvSpPr>
+        <p:spPr>
+          <a:xfrm>
+            <a:off x="457200" y="548640"/>
+            <a:ext cx="8229600" cy="457200"/>
+          </a:xfrm>
+          <a:prstGeom prst="rect">
+            <a:avLst/>
+          </a:prstGeom>
+          <a:noFill/>
+          <a:ln>
+            <a:noFill/>
+          </a:ln>
+        </p:spPr>
+        <p:txBody>
+          <a:bodyPr anchorCtr="0" anchor="ctr" bIns="45700" lIns="91425" spcFirstLastPara="1" rIns="91425" wrap="square" tIns="45700">
+            <a:noAutofit/>
+          </a:bodyPr>
+          <a:lstStyle/>
+          <a:p>
+            <a:pPr indent="0" lvl="0" marL="0" marR="0" rtl="0" algn="l">
+              <a:spcBef>
+                <a:spcPts val="0"/>
+              </a:spcBef>
+              <a:spcAft>
+                <a:spcPts val="0"/>
+              </a:spcAft>
+              <a:buClr>
+                <a:srgbClr val="1E293B"/>
+              </a:buClr>
+              <a:buSzPts val="2200"/>
+              <a:buFont typeface="Arial Black"/>
+              <a:buNone/>
+            </a:pPr>
+            <a:r>
+              <a:rPr b="0" i="0" lang="en-GB" sz="2200" u="none" cap="none" strike="noStrike">
+                <a:solidFill>
+                  <a:srgbClr val="1E293B"/>
+                </a:solidFill>
+                <a:latin typeface="Arial Black"/>
+                <a:ea typeface="Arial Black"/>
+                <a:cs typeface="Arial Black"/>
+                <a:sym typeface="Arial Black"/>
+              </a:rPr>
               <a:t>Reconstructing the True Profit Signal</a:t>
             </a:r>
             <a:endParaRPr b="0" i="0" sz="2200" u="none" cap="none" strike="noStrike">
@@ -15075,7 +17989,7 @@
       </p:sp>
       <p:sp>
         <p:nvSpPr>
-          <p:cNvPr id="138" name="Google Shape;138;p19"/>
+          <p:cNvPr id="156" name="Google Shape;156;p20"/>
           <p:cNvSpPr/>
           <p:nvPr/>
         </p:nvSpPr>
@@ -15283,7 +18197,7 @@
       </p:sp>
       <p:sp>
         <p:nvSpPr>
-          <p:cNvPr id="139" name="Google Shape;139;p19"/>
+          <p:cNvPr id="157" name="Google Shape;157;p20"/>
           <p:cNvSpPr/>
           <p:nvPr/>
         </p:nvSpPr>
@@ -15346,7 +18260,7 @@
       </p:sp>
       <p:graphicFrame>
         <p:nvGraphicFramePr>
-          <p:cNvPr id="140" name="Google Shape;140;p19"/>
+          <p:cNvPr id="158" name="Google Shape;158;p20"/>
           <p:cNvGraphicFramePr/>
           <p:nvPr/>
         </p:nvGraphicFramePr>
@@ -15359,7 +18273,7 @@
             <a:tbl>
               <a:tblPr>
                 <a:noFill/>
-                <a:tableStyleId>{1A49ABA9-2B03-4E98-B262-1CF8D204D39A}</a:tableStyleId>
+                <a:tableStyleId>{EE38E29A-7394-4ABC-B9FA-59CEFF82216F}</a:tableStyleId>
               </a:tblPr>
               <a:tblGrid>
                 <a:gridCol w="2286000"/>
@@ -16438,6 +19352,9 @@
                     <p:cTn fill="hold">
                       <p:stCondLst>
                         <p:cond delay="indefinite"/>
+                        <p:cond evt="onBegin" delay="0">
+                          <p:tn val="2"/>
+                        </p:cond>
                       </p:stCondLst>
                       <p:childTnLst>
                         <p:par>
@@ -16447,7 +19364,7 @@
                             </p:stCondLst>
                             <p:childTnLst>
                               <p:par>
-                                <p:cTn fill="hold" nodeType="clickEffect" presetClass="entr" presetID="10" presetSubtype="0">
+                                <p:cTn fill="hold" nodeType="withEffect" presetClass="entr" presetID="10" presetSubtype="0">
                                   <p:stCondLst>
                                     <p:cond delay="0"/>
                                   </p:stCondLst>
@@ -16460,7 +19377,7 @@
                                           </p:stCondLst>
                                         </p:cTn>
                                         <p:tgtEl>
-                                          <p:spTgt spid="138"/>
+                                          <p:spTgt spid="158"/>
                                         </p:tgtEl>
                                         <p:attrNameLst>
                                           <p:attrName>style.visibility</p:attrName>
@@ -16474,7 +19391,7 @@
                                       <p:cBhvr>
                                         <p:cTn dur="1000"/>
                                         <p:tgtEl>
-                                          <p:spTgt spid="138"/>
+                                          <p:spTgt spid="158"/>
                                         </p:tgtEl>
                                       </p:cBhvr>
                                     </p:animEffect>
@@ -16513,7 +19430,11 @@
                                           </p:stCondLst>
                                         </p:cTn>
                                         <p:tgtEl>
-                                          <p:spTgt spid="139"/>
+                                          <p:spTgt spid="156">
+                                            <p:txEl>
+                                              <p:pRg end="0" st="0"/>
+                                            </p:txEl>
+                                          </p:spTgt>
                                         </p:tgtEl>
                                         <p:attrNameLst>
                                           <p:attrName>style.visibility</p:attrName>
@@ -16527,15 +19448,37 @@
                                       <p:cBhvr>
                                         <p:cTn dur="1000"/>
                                         <p:tgtEl>
-                                          <p:spTgt spid="139"/>
+                                          <p:spTgt spid="156">
+                                            <p:txEl>
+                                              <p:pRg end="0" st="0"/>
+                                            </p:txEl>
+                                          </p:spTgt>
                                         </p:tgtEl>
                                       </p:cBhvr>
                                     </p:animEffect>
                                   </p:childTnLst>
                                 </p:cTn>
                               </p:par>
+                            </p:childTnLst>
+                          </p:cTn>
+                        </p:par>
+                      </p:childTnLst>
+                    </p:cTn>
+                  </p:par>
+                  <p:par>
+                    <p:cTn fill="hold">
+                      <p:stCondLst>
+                        <p:cond delay="indefinite"/>
+                      </p:stCondLst>
+                      <p:childTnLst>
+                        <p:par>
+                          <p:cTn fill="hold">
+                            <p:stCondLst>
+                              <p:cond delay="0"/>
+                            </p:stCondLst>
+                            <p:childTnLst>
                               <p:par>
-                                <p:cTn fill="hold" nodeType="withEffect" presetClass="entr" presetID="10" presetSubtype="0">
+                                <p:cTn fill="hold" nodeType="clickEffect" presetClass="entr" presetID="10" presetSubtype="0">
                                   <p:stCondLst>
                                     <p:cond delay="0"/>
                                   </p:stCondLst>
@@ -16548,7 +19491,11 @@
                                           </p:stCondLst>
                                         </p:cTn>
                                         <p:tgtEl>
-                                          <p:spTgt spid="140"/>
+                                          <p:spTgt spid="156">
+                                            <p:txEl>
+                                              <p:pRg end="1" st="1"/>
+                                            </p:txEl>
+                                          </p:spTgt>
                                         </p:tgtEl>
                                         <p:attrNameLst>
                                           <p:attrName>style.visibility</p:attrName>
@@ -16562,7 +19509,247 @@
                                       <p:cBhvr>
                                         <p:cTn dur="1000"/>
                                         <p:tgtEl>
-                                          <p:spTgt spid="140"/>
+                                          <p:spTgt spid="156">
+                                            <p:txEl>
+                                              <p:pRg end="1" st="1"/>
+                                            </p:txEl>
+                                          </p:spTgt>
+                                        </p:tgtEl>
+                                      </p:cBhvr>
+                                    </p:animEffect>
+                                  </p:childTnLst>
+                                </p:cTn>
+                              </p:par>
+                            </p:childTnLst>
+                          </p:cTn>
+                        </p:par>
+                      </p:childTnLst>
+                    </p:cTn>
+                  </p:par>
+                  <p:par>
+                    <p:cTn fill="hold">
+                      <p:stCondLst>
+                        <p:cond delay="indefinite"/>
+                      </p:stCondLst>
+                      <p:childTnLst>
+                        <p:par>
+                          <p:cTn fill="hold">
+                            <p:stCondLst>
+                              <p:cond delay="0"/>
+                            </p:stCondLst>
+                            <p:childTnLst>
+                              <p:par>
+                                <p:cTn fill="hold" nodeType="clickEffect" presetClass="entr" presetID="10" presetSubtype="0">
+                                  <p:stCondLst>
+                                    <p:cond delay="0"/>
+                                  </p:stCondLst>
+                                  <p:childTnLst>
+                                    <p:set>
+                                      <p:cBhvr>
+                                        <p:cTn dur="1" fill="hold">
+                                          <p:stCondLst>
+                                            <p:cond delay="0"/>
+                                          </p:stCondLst>
+                                        </p:cTn>
+                                        <p:tgtEl>
+                                          <p:spTgt spid="156">
+                                            <p:txEl>
+                                              <p:pRg end="2" st="2"/>
+                                            </p:txEl>
+                                          </p:spTgt>
+                                        </p:tgtEl>
+                                        <p:attrNameLst>
+                                          <p:attrName>style.visibility</p:attrName>
+                                        </p:attrNameLst>
+                                      </p:cBhvr>
+                                      <p:to>
+                                        <p:strVal val="visible"/>
+                                      </p:to>
+                                    </p:set>
+                                    <p:animEffect filter="fade" transition="in">
+                                      <p:cBhvr>
+                                        <p:cTn dur="1000"/>
+                                        <p:tgtEl>
+                                          <p:spTgt spid="156">
+                                            <p:txEl>
+                                              <p:pRg end="2" st="2"/>
+                                            </p:txEl>
+                                          </p:spTgt>
+                                        </p:tgtEl>
+                                      </p:cBhvr>
+                                    </p:animEffect>
+                                  </p:childTnLst>
+                                </p:cTn>
+                              </p:par>
+                            </p:childTnLst>
+                          </p:cTn>
+                        </p:par>
+                      </p:childTnLst>
+                    </p:cTn>
+                  </p:par>
+                  <p:par>
+                    <p:cTn fill="hold">
+                      <p:stCondLst>
+                        <p:cond delay="indefinite"/>
+                      </p:stCondLst>
+                      <p:childTnLst>
+                        <p:par>
+                          <p:cTn fill="hold">
+                            <p:stCondLst>
+                              <p:cond delay="0"/>
+                            </p:stCondLst>
+                            <p:childTnLst>
+                              <p:par>
+                                <p:cTn fill="hold" nodeType="clickEffect" presetClass="entr" presetID="10" presetSubtype="0">
+                                  <p:stCondLst>
+                                    <p:cond delay="0"/>
+                                  </p:stCondLst>
+                                  <p:childTnLst>
+                                    <p:set>
+                                      <p:cBhvr>
+                                        <p:cTn dur="1" fill="hold">
+                                          <p:stCondLst>
+                                            <p:cond delay="0"/>
+                                          </p:stCondLst>
+                                        </p:cTn>
+                                        <p:tgtEl>
+                                          <p:spTgt spid="156">
+                                            <p:txEl>
+                                              <p:pRg end="3" st="3"/>
+                                            </p:txEl>
+                                          </p:spTgt>
+                                        </p:tgtEl>
+                                        <p:attrNameLst>
+                                          <p:attrName>style.visibility</p:attrName>
+                                        </p:attrNameLst>
+                                      </p:cBhvr>
+                                      <p:to>
+                                        <p:strVal val="visible"/>
+                                      </p:to>
+                                    </p:set>
+                                    <p:animEffect filter="fade" transition="in">
+                                      <p:cBhvr>
+                                        <p:cTn dur="1000"/>
+                                        <p:tgtEl>
+                                          <p:spTgt spid="156">
+                                            <p:txEl>
+                                              <p:pRg end="3" st="3"/>
+                                            </p:txEl>
+                                          </p:spTgt>
+                                        </p:tgtEl>
+                                      </p:cBhvr>
+                                    </p:animEffect>
+                                  </p:childTnLst>
+                                </p:cTn>
+                              </p:par>
+                            </p:childTnLst>
+                          </p:cTn>
+                        </p:par>
+                      </p:childTnLst>
+                    </p:cTn>
+                  </p:par>
+                  <p:par>
+                    <p:cTn fill="hold">
+                      <p:stCondLst>
+                        <p:cond delay="indefinite"/>
+                      </p:stCondLst>
+                      <p:childTnLst>
+                        <p:par>
+                          <p:cTn fill="hold">
+                            <p:stCondLst>
+                              <p:cond delay="0"/>
+                            </p:stCondLst>
+                            <p:childTnLst>
+                              <p:par>
+                                <p:cTn fill="hold" nodeType="clickEffect" presetClass="entr" presetID="10" presetSubtype="0">
+                                  <p:stCondLst>
+                                    <p:cond delay="0"/>
+                                  </p:stCondLst>
+                                  <p:childTnLst>
+                                    <p:set>
+                                      <p:cBhvr>
+                                        <p:cTn dur="1" fill="hold">
+                                          <p:stCondLst>
+                                            <p:cond delay="0"/>
+                                          </p:stCondLst>
+                                        </p:cTn>
+                                        <p:tgtEl>
+                                          <p:spTgt spid="156">
+                                            <p:txEl>
+                                              <p:pRg end="4" st="4"/>
+                                            </p:txEl>
+                                          </p:spTgt>
+                                        </p:tgtEl>
+                                        <p:attrNameLst>
+                                          <p:attrName>style.visibility</p:attrName>
+                                        </p:attrNameLst>
+                                      </p:cBhvr>
+                                      <p:to>
+                                        <p:strVal val="visible"/>
+                                      </p:to>
+                                    </p:set>
+                                    <p:animEffect filter="fade" transition="in">
+                                      <p:cBhvr>
+                                        <p:cTn dur="1000"/>
+                                        <p:tgtEl>
+                                          <p:spTgt spid="156">
+                                            <p:txEl>
+                                              <p:pRg end="4" st="4"/>
+                                            </p:txEl>
+                                          </p:spTgt>
+                                        </p:tgtEl>
+                                      </p:cBhvr>
+                                    </p:animEffect>
+                                  </p:childTnLst>
+                                </p:cTn>
+                              </p:par>
+                            </p:childTnLst>
+                          </p:cTn>
+                        </p:par>
+                      </p:childTnLst>
+                    </p:cTn>
+                  </p:par>
+                  <p:par>
+                    <p:cTn fill="hold">
+                      <p:stCondLst>
+                        <p:cond delay="indefinite"/>
+                      </p:stCondLst>
+                      <p:childTnLst>
+                        <p:par>
+                          <p:cTn fill="hold">
+                            <p:stCondLst>
+                              <p:cond delay="0"/>
+                            </p:stCondLst>
+                            <p:childTnLst>
+                              <p:par>
+                                <p:cTn fill="hold" nodeType="clickEffect" presetClass="entr" presetID="10" presetSubtype="0">
+                                  <p:stCondLst>
+                                    <p:cond delay="0"/>
+                                  </p:stCondLst>
+                                  <p:childTnLst>
+                                    <p:set>
+                                      <p:cBhvr>
+                                        <p:cTn dur="1" fill="hold">
+                                          <p:stCondLst>
+                                            <p:cond delay="0"/>
+                                          </p:stCondLst>
+                                        </p:cTn>
+                                        <p:tgtEl>
+                                          <p:spTgt spid="157"/>
+                                        </p:tgtEl>
+                                        <p:attrNameLst>
+                                          <p:attrName>style.visibility</p:attrName>
+                                        </p:attrNameLst>
+                                      </p:cBhvr>
+                                      <p:to>
+                                        <p:strVal val="visible"/>
+                                      </p:to>
+                                    </p:set>
+                                    <p:animEffect filter="fade" transition="in">
+                                      <p:cBhvr>
+                                        <p:cTn dur="1000"/>
+                                        <p:tgtEl>
+                                          <p:spTgt spid="157"/>
                                         </p:tgtEl>
                                       </p:cBhvr>
                                     </p:animEffect>
@@ -16600,7 +19787,7 @@
 </p:sld>
 </file>
 
-<file path=ppt/slides/slide6.xml><?xml version="1.0" encoding="utf-8"?>
+<file path=ppt/slides/slide7.xml><?xml version="1.0" encoding="utf-8"?>
 <p:sld xmlns:a="http://schemas.openxmlformats.org/drawingml/2006/main" xmlns:r="http://schemas.openxmlformats.org/officeDocument/2006/relationships" xmlns:mc="http://schemas.openxmlformats.org/markup-compatibility/2006" xmlns:mv="urn:schemas-microsoft-com:mac:vml" xmlns:p="http://schemas.openxmlformats.org/presentationml/2006/main" xmlns:c="http://schemas.openxmlformats.org/drawingml/2006/chart" xmlns:dgm="http://schemas.openxmlformats.org/drawingml/2006/diagram" xmlns:o="urn:schemas-microsoft-com:office:office" xmlns:v="urn:schemas-microsoft-com:vml" xmlns:pvml="urn:schemas-microsoft-com:office:powerpoint" xmlns:com="http://schemas.openxmlformats.org/drawingml/2006/compatibility" xmlns:p14="http://schemas.microsoft.com/office/powerpoint/2010/main" xmlns:p15="http://schemas.microsoft.com/office/powerpoint/2012/main" xmlns:ahyp="http://schemas.microsoft.com/office/drawing/2018/hyperlinkcolor">
   <p:cSld>
     <p:bg>
@@ -16612,7 +19799,7 @@
     </p:bg>
     <p:spTree>
       <p:nvGrpSpPr>
-        <p:cNvPr id="145" name="Shape 145"/>
+        <p:cNvPr id="163" name="Shape 163"/>
         <p:cNvGrpSpPr/>
         <p:nvPr/>
       </p:nvGrpSpPr>
@@ -16626,7 +19813,7 @@
       </p:grpSpPr>
       <p:sp>
         <p:nvSpPr>
-          <p:cNvPr id="146" name="Google Shape;146;p20"/>
+          <p:cNvPr id="164" name="Google Shape;164;p21"/>
           <p:cNvSpPr/>
           <p:nvPr/>
         </p:nvSpPr>
@@ -16689,7 +19876,7 @@
       </p:sp>
       <p:sp>
         <p:nvSpPr>
-          <p:cNvPr id="147" name="Google Shape;147;p20"/>
+          <p:cNvPr id="165" name="Google Shape;165;p21"/>
           <p:cNvSpPr/>
           <p:nvPr/>
         </p:nvSpPr>
@@ -16776,7 +19963,7 @@
       </p:sp>
       <p:sp>
         <p:nvSpPr>
-          <p:cNvPr id="148" name="Google Shape;148;p20"/>
+          <p:cNvPr id="166" name="Google Shape;166;p21"/>
           <p:cNvSpPr/>
           <p:nvPr/>
         </p:nvSpPr>
@@ -16826,7 +20013,7 @@
       </p:sp>
       <p:sp>
         <p:nvSpPr>
-          <p:cNvPr id="149" name="Google Shape;149;p20"/>
+          <p:cNvPr id="167" name="Google Shape;167;p21"/>
           <p:cNvSpPr/>
           <p:nvPr/>
         </p:nvSpPr>
@@ -16889,7 +20076,7 @@
       </p:sp>
       <p:sp>
         <p:nvSpPr>
-          <p:cNvPr id="150" name="Google Shape;150;p20"/>
+          <p:cNvPr id="168" name="Google Shape;168;p21"/>
           <p:cNvSpPr/>
           <p:nvPr/>
         </p:nvSpPr>
@@ -16952,7 +20139,7 @@
       </p:sp>
       <p:sp>
         <p:nvSpPr>
-          <p:cNvPr id="151" name="Google Shape;151;p20"/>
+          <p:cNvPr id="169" name="Google Shape;169;p21"/>
           <p:cNvSpPr/>
           <p:nvPr/>
         </p:nvSpPr>
@@ -17002,7 +20189,7 @@
       </p:sp>
       <p:sp>
         <p:nvSpPr>
-          <p:cNvPr id="152" name="Google Shape;152;p20"/>
+          <p:cNvPr id="170" name="Google Shape;170;p21"/>
           <p:cNvSpPr/>
           <p:nvPr/>
         </p:nvSpPr>
@@ -17065,7 +20252,7 @@
       </p:sp>
       <p:sp>
         <p:nvSpPr>
-          <p:cNvPr id="153" name="Google Shape;153;p20"/>
+          <p:cNvPr id="171" name="Google Shape;171;p21"/>
           <p:cNvSpPr/>
           <p:nvPr/>
         </p:nvSpPr>
@@ -17128,7 +20315,7 @@
       </p:sp>
       <p:sp>
         <p:nvSpPr>
-          <p:cNvPr id="154" name="Google Shape;154;p20"/>
+          <p:cNvPr id="172" name="Google Shape;172;p21"/>
           <p:cNvSpPr/>
           <p:nvPr/>
         </p:nvSpPr>
@@ -17178,7 +20365,7 @@
       </p:sp>
       <p:sp>
         <p:nvSpPr>
-          <p:cNvPr id="155" name="Google Shape;155;p20"/>
+          <p:cNvPr id="173" name="Google Shape;173;p21"/>
           <p:cNvSpPr/>
           <p:nvPr/>
         </p:nvSpPr>
@@ -17241,7 +20428,7 @@
       </p:sp>
       <p:sp>
         <p:nvSpPr>
-          <p:cNvPr id="156" name="Google Shape;156;p20"/>
+          <p:cNvPr id="174" name="Google Shape;174;p21"/>
           <p:cNvSpPr/>
           <p:nvPr/>
         </p:nvSpPr>
@@ -17304,7 +20491,7 @@
       </p:sp>
       <p:sp>
         <p:nvSpPr>
-          <p:cNvPr id="157" name="Google Shape;157;p20"/>
+          <p:cNvPr id="175" name="Google Shape;175;p21"/>
           <p:cNvSpPr/>
           <p:nvPr/>
         </p:nvSpPr>
@@ -17354,7 +20541,7 @@
       </p:sp>
       <p:sp>
         <p:nvSpPr>
-          <p:cNvPr id="158" name="Google Shape;158;p20"/>
+          <p:cNvPr id="176" name="Google Shape;176;p21"/>
           <p:cNvSpPr/>
           <p:nvPr/>
         </p:nvSpPr>
@@ -17417,7 +20604,7 @@
       </p:sp>
       <p:sp>
         <p:nvSpPr>
-          <p:cNvPr id="159" name="Google Shape;159;p20"/>
+          <p:cNvPr id="177" name="Google Shape;177;p21"/>
           <p:cNvSpPr/>
           <p:nvPr/>
         </p:nvSpPr>
@@ -17478,36 +20665,9 @@
           </a:p>
         </p:txBody>
       </p:sp>
-      <p:pic>
-        <p:nvPicPr>
-          <p:cNvPr id="160" name="Google Shape;160;p20"/>
-          <p:cNvPicPr preferRelativeResize="0"/>
-          <p:nvPr/>
-        </p:nvPicPr>
-        <p:blipFill rotWithShape="1">
-          <a:blip r:embed="rId3">
-            <a:alphaModFix/>
-          </a:blip>
-          <a:srcRect b="0" l="0" r="0" t="0"/>
-          <a:stretch/>
-        </p:blipFill>
-        <p:spPr>
-          <a:xfrm>
-            <a:off x="457200" y="2011680"/>
-            <a:ext cx="5029200" cy="2560320"/>
-          </a:xfrm>
-          <a:prstGeom prst="rect">
-            <a:avLst/>
-          </a:prstGeom>
-          <a:noFill/>
-          <a:ln>
-            <a:noFill/>
-          </a:ln>
-        </p:spPr>
-      </p:pic>
       <p:sp>
         <p:nvSpPr>
-          <p:cNvPr id="161" name="Google Shape;161;p20"/>
+          <p:cNvPr id="178" name="Google Shape;178;p21"/>
           <p:cNvSpPr/>
           <p:nvPr/>
         </p:nvSpPr>
@@ -17550,7 +20710,7 @@
       </p:sp>
       <p:sp>
         <p:nvSpPr>
-          <p:cNvPr id="162" name="Google Shape;162;p20"/>
+          <p:cNvPr id="179" name="Google Shape;179;p21"/>
           <p:cNvSpPr/>
           <p:nvPr/>
         </p:nvSpPr>
@@ -17650,7 +20810,7 @@
       </p:sp>
       <p:sp>
         <p:nvSpPr>
-          <p:cNvPr id="163" name="Google Shape;163;p20"/>
+          <p:cNvPr id="180" name="Google Shape;180;p21"/>
           <p:cNvSpPr/>
           <p:nvPr/>
         </p:nvSpPr>
@@ -17716,7 +20876,7 @@
       </p:sp>
       <p:sp>
         <p:nvSpPr>
-          <p:cNvPr id="164" name="Google Shape;164;p20"/>
+          <p:cNvPr id="181" name="Google Shape;181;p21"/>
           <p:cNvSpPr/>
           <p:nvPr/>
         </p:nvSpPr>
@@ -17780,6 +20940,34 @@
           </a:p>
         </p:txBody>
       </p:sp>
+      <p:pic>
+        <p:nvPicPr>
+          <p:cNvPr id="182" name="Google Shape;182;p21"/>
+          <p:cNvPicPr preferRelativeResize="0"/>
+          <p:nvPr/>
+        </p:nvPicPr>
+        <p:blipFill>
+          <a:blip r:embed="rId3">
+            <a:alphaModFix/>
+          </a:blip>
+          <a:stretch>
+            <a:fillRect/>
+          </a:stretch>
+        </p:blipFill>
+        <p:spPr>
+          <a:xfrm>
+            <a:off x="367200" y="2011662"/>
+            <a:ext cx="5228799" cy="2852075"/>
+          </a:xfrm>
+          <a:prstGeom prst="rect">
+            <a:avLst/>
+          </a:prstGeom>
+          <a:noFill/>
+          <a:ln>
+            <a:noFill/>
+          </a:ln>
+        </p:spPr>
+      </p:pic>
     </p:spTree>
   </p:cSld>
   <p:clrMapOvr>
@@ -17822,7 +21010,7 @@
                                           </p:stCondLst>
                                         </p:cTn>
                                         <p:tgtEl>
-                                          <p:spTgt spid="149"/>
+                                          <p:spTgt spid="167"/>
                                         </p:tgtEl>
                                         <p:attrNameLst>
                                           <p:attrName>style.visibility</p:attrName>
@@ -17836,7 +21024,7 @@
                                       <p:cBhvr>
                                         <p:cTn dur="1000"/>
                                         <p:tgtEl>
-                                          <p:spTgt spid="149"/>
+                                          <p:spTgt spid="167"/>
                                         </p:tgtEl>
                                       </p:cBhvr>
                                     </p:animEffect>
@@ -17857,7 +21045,7 @@
                                           </p:stCondLst>
                                         </p:cTn>
                                         <p:tgtEl>
-                                          <p:spTgt spid="150"/>
+                                          <p:spTgt spid="168"/>
                                         </p:tgtEl>
                                         <p:attrNameLst>
                                           <p:attrName>style.visibility</p:attrName>
@@ -17871,7 +21059,7 @@
                                       <p:cBhvr>
                                         <p:cTn dur="1000"/>
                                         <p:tgtEl>
-                                          <p:spTgt spid="150"/>
+                                          <p:spTgt spid="168"/>
                                         </p:tgtEl>
                                       </p:cBhvr>
                                     </p:animEffect>
@@ -17910,7 +21098,7 @@
                                           </p:stCondLst>
                                         </p:cTn>
                                         <p:tgtEl>
-                                          <p:spTgt spid="152"/>
+                                          <p:spTgt spid="170"/>
                                         </p:tgtEl>
                                         <p:attrNameLst>
                                           <p:attrName>style.visibility</p:attrName>
@@ -17924,7 +21112,7 @@
                                       <p:cBhvr>
                                         <p:cTn dur="1000"/>
                                         <p:tgtEl>
-                                          <p:spTgt spid="152"/>
+                                          <p:spTgt spid="170"/>
                                         </p:tgtEl>
                                       </p:cBhvr>
                                     </p:animEffect>
@@ -17945,7 +21133,7 @@
                                           </p:stCondLst>
                                         </p:cTn>
                                         <p:tgtEl>
-                                          <p:spTgt spid="153"/>
+                                          <p:spTgt spid="171"/>
                                         </p:tgtEl>
                                         <p:attrNameLst>
                                           <p:attrName>style.visibility</p:attrName>
@@ -17959,7 +21147,7 @@
                                       <p:cBhvr>
                                         <p:cTn dur="1000"/>
                                         <p:tgtEl>
-                                          <p:spTgt spid="153"/>
+                                          <p:spTgt spid="171"/>
                                         </p:tgtEl>
                                       </p:cBhvr>
                                     </p:animEffect>
@@ -17998,7 +21186,7 @@
                                           </p:stCondLst>
                                         </p:cTn>
                                         <p:tgtEl>
-                                          <p:spTgt spid="155"/>
+                                          <p:spTgt spid="173"/>
                                         </p:tgtEl>
                                         <p:attrNameLst>
                                           <p:attrName>style.visibility</p:attrName>
@@ -18012,7 +21200,7 @@
                                       <p:cBhvr>
                                         <p:cTn dur="1000"/>
                                         <p:tgtEl>
-                                          <p:spTgt spid="155"/>
+                                          <p:spTgt spid="173"/>
                                         </p:tgtEl>
                                       </p:cBhvr>
                                     </p:animEffect>
@@ -18033,7 +21221,7 @@
                                           </p:stCondLst>
                                         </p:cTn>
                                         <p:tgtEl>
-                                          <p:spTgt spid="156"/>
+                                          <p:spTgt spid="174"/>
                                         </p:tgtEl>
                                         <p:attrNameLst>
                                           <p:attrName>style.visibility</p:attrName>
@@ -18047,7 +21235,7 @@
                                       <p:cBhvr>
                                         <p:cTn dur="1000"/>
                                         <p:tgtEl>
-                                          <p:spTgt spid="156"/>
+                                          <p:spTgt spid="174"/>
                                         </p:tgtEl>
                                       </p:cBhvr>
                                     </p:animEffect>
@@ -18086,7 +21274,7 @@
                                           </p:stCondLst>
                                         </p:cTn>
                                         <p:tgtEl>
-                                          <p:spTgt spid="158"/>
+                                          <p:spTgt spid="176"/>
                                         </p:tgtEl>
                                         <p:attrNameLst>
                                           <p:attrName>style.visibility</p:attrName>
@@ -18100,7 +21288,7 @@
                                       <p:cBhvr>
                                         <p:cTn dur="1000"/>
                                         <p:tgtEl>
-                                          <p:spTgt spid="158"/>
+                                          <p:spTgt spid="176"/>
                                         </p:tgtEl>
                                       </p:cBhvr>
                                     </p:animEffect>
@@ -18121,7 +21309,7 @@
                                           </p:stCondLst>
                                         </p:cTn>
                                         <p:tgtEl>
-                                          <p:spTgt spid="159"/>
+                                          <p:spTgt spid="177"/>
                                         </p:tgtEl>
                                         <p:attrNameLst>
                                           <p:attrName>style.visibility</p:attrName>
@@ -18135,7 +21323,7 @@
                                       <p:cBhvr>
                                         <p:cTn dur="1000"/>
                                         <p:tgtEl>
-                                          <p:spTgt spid="159"/>
+                                          <p:spTgt spid="177"/>
                                         </p:tgtEl>
                                       </p:cBhvr>
                                     </p:animEffect>
@@ -18174,7 +21362,7 @@
                                           </p:stCondLst>
                                         </p:cTn>
                                         <p:tgtEl>
-                                          <p:spTgt spid="160"/>
+                                          <p:spTgt spid="182"/>
                                         </p:tgtEl>
                                         <p:attrNameLst>
                                           <p:attrName>style.visibility</p:attrName>
@@ -18188,7 +21376,7 @@
                                       <p:cBhvr>
                                         <p:cTn dur="1000"/>
                                         <p:tgtEl>
-                                          <p:spTgt spid="160"/>
+                                          <p:spTgt spid="182"/>
                                         </p:tgtEl>
                                       </p:cBhvr>
                                     </p:animEffect>
@@ -18227,7 +21415,7 @@
                                           </p:stCondLst>
                                         </p:cTn>
                                         <p:tgtEl>
-                                          <p:spTgt spid="162"/>
+                                          <p:spTgt spid="179"/>
                                         </p:tgtEl>
                                         <p:attrNameLst>
                                           <p:attrName>style.visibility</p:attrName>
@@ -18254,7 +21442,7 @@
                                           </p:stCondLst>
                                         </p:cTn>
                                         <p:tgtEl>
-                                          <p:spTgt spid="163"/>
+                                          <p:spTgt spid="180"/>
                                         </p:tgtEl>
                                         <p:attrNameLst>
                                           <p:attrName>style.visibility</p:attrName>
@@ -18281,7 +21469,7 @@
                                           </p:stCondLst>
                                         </p:cTn>
                                         <p:tgtEl>
-                                          <p:spTgt spid="164"/>
+                                          <p:spTgt spid="181"/>
                                         </p:tgtEl>
                                         <p:attrNameLst>
                                           <p:attrName>style.visibility</p:attrName>
@@ -18308,7 +21496,7 @@
                                           </p:stCondLst>
                                         </p:cTn>
                                         <p:tgtEl>
-                                          <p:spTgt spid="161"/>
+                                          <p:spTgt spid="178"/>
                                         </p:tgtEl>
                                         <p:attrNameLst>
                                           <p:attrName>style.visibility</p:attrName>
@@ -18322,7 +21510,7 @@
                                       <p:cBhvr>
                                         <p:cTn dur="1000"/>
                                         <p:tgtEl>
-                                          <p:spTgt spid="161"/>
+                                          <p:spTgt spid="178"/>
                                         </p:tgtEl>
                                       </p:cBhvr>
                                     </p:animEffect>
@@ -18360,7 +21548,7 @@
 </p:sld>
 </file>
 
-<file path=ppt/slides/slide7.xml><?xml version="1.0" encoding="utf-8"?>
+<file path=ppt/slides/slide8.xml><?xml version="1.0" encoding="utf-8"?>
 <p:sld xmlns:a="http://schemas.openxmlformats.org/drawingml/2006/main" xmlns:r="http://schemas.openxmlformats.org/officeDocument/2006/relationships" xmlns:mc="http://schemas.openxmlformats.org/markup-compatibility/2006" xmlns:mv="urn:schemas-microsoft-com:mac:vml" xmlns:p="http://schemas.openxmlformats.org/presentationml/2006/main" xmlns:c="http://schemas.openxmlformats.org/drawingml/2006/chart" xmlns:dgm="http://schemas.openxmlformats.org/drawingml/2006/diagram" xmlns:o="urn:schemas-microsoft-com:office:office" xmlns:v="urn:schemas-microsoft-com:vml" xmlns:pvml="urn:schemas-microsoft-com:office:powerpoint" xmlns:com="http://schemas.openxmlformats.org/drawingml/2006/compatibility" xmlns:p14="http://schemas.microsoft.com/office/powerpoint/2010/main" xmlns:p15="http://schemas.microsoft.com/office/powerpoint/2012/main" xmlns:ahyp="http://schemas.microsoft.com/office/drawing/2018/hyperlinkcolor">
   <p:cSld>
     <p:bg>
@@ -18372,7 +21560,7 @@
     </p:bg>
     <p:spTree>
       <p:nvGrpSpPr>
-        <p:cNvPr id="169" name="Shape 169"/>
+        <p:cNvPr id="187" name="Shape 187"/>
         <p:cNvGrpSpPr/>
         <p:nvPr/>
       </p:nvGrpSpPr>
@@ -18386,7 +21574,7 @@
       </p:grpSpPr>
       <p:sp>
         <p:nvSpPr>
-          <p:cNvPr id="170" name="Google Shape;170;p21"/>
+          <p:cNvPr id="188" name="Google Shape;188;p22"/>
           <p:cNvSpPr/>
           <p:nvPr/>
         </p:nvSpPr>
@@ -18449,7 +21637,7 @@
       </p:sp>
       <p:sp>
         <p:nvSpPr>
-          <p:cNvPr id="171" name="Google Shape;171;p21"/>
+          <p:cNvPr id="189" name="Google Shape;189;p22"/>
           <p:cNvSpPr/>
           <p:nvPr/>
         </p:nvSpPr>
@@ -18512,7 +21700,7 @@
       </p:sp>
       <p:sp>
         <p:nvSpPr>
-          <p:cNvPr id="172" name="Google Shape;172;p21"/>
+          <p:cNvPr id="190" name="Google Shape;190;p22"/>
           <p:cNvSpPr/>
           <p:nvPr/>
         </p:nvSpPr>
@@ -18575,7 +21763,7 @@
       </p:sp>
       <p:graphicFrame>
         <p:nvGraphicFramePr>
-          <p:cNvPr id="173" name="Google Shape;173;p21"/>
+          <p:cNvPr id="191" name="Google Shape;191;p22"/>
           <p:cNvGraphicFramePr/>
           <p:nvPr/>
         </p:nvGraphicFramePr>
@@ -18588,7 +21776,7 @@
             <a:tbl>
               <a:tblPr>
                 <a:noFill/>
-                <a:tableStyleId>{1A49ABA9-2B03-4E98-B262-1CF8D204D39A}</a:tableStyleId>
+                <a:tableStyleId>{EE38E29A-7394-4ABC-B9FA-59CEFF82216F}</a:tableStyleId>
               </a:tblPr>
               <a:tblGrid>
                 <a:gridCol w="3200400"/>
@@ -20316,7 +23504,7 @@
       </p:graphicFrame>
       <p:sp>
         <p:nvSpPr>
-          <p:cNvPr id="174" name="Google Shape;174;p21"/>
+          <p:cNvPr id="192" name="Google Shape;192;p22"/>
           <p:cNvSpPr/>
           <p:nvPr/>
         </p:nvSpPr>
@@ -20379,7 +23567,7 @@
       </p:sp>
       <p:sp>
         <p:nvSpPr>
-          <p:cNvPr id="175" name="Google Shape;175;p21"/>
+          <p:cNvPr id="193" name="Google Shape;193;p22"/>
           <p:cNvSpPr/>
           <p:nvPr/>
         </p:nvSpPr>
@@ -20482,7 +23670,7 @@
                                           </p:stCondLst>
                                         </p:cTn>
                                         <p:tgtEl>
-                                          <p:spTgt spid="172"/>
+                                          <p:spTgt spid="190"/>
                                         </p:tgtEl>
                                         <p:attrNameLst>
                                           <p:attrName>style.visibility</p:attrName>
@@ -20496,7 +23684,7 @@
                                       <p:cBhvr>
                                         <p:cTn dur="1000"/>
                                         <p:tgtEl>
-                                          <p:spTgt spid="172"/>
+                                          <p:spTgt spid="190"/>
                                         </p:tgtEl>
                                       </p:cBhvr>
                                     </p:animEffect>
@@ -20517,7 +23705,7 @@
                                           </p:stCondLst>
                                         </p:cTn>
                                         <p:tgtEl>
-                                          <p:spTgt spid="173"/>
+                                          <p:spTgt spid="191"/>
                                         </p:tgtEl>
                                         <p:attrNameLst>
                                           <p:attrName>style.visibility</p:attrName>
@@ -20531,7 +23719,7 @@
                                       <p:cBhvr>
                                         <p:cTn dur="1000"/>
                                         <p:tgtEl>
-                                          <p:spTgt spid="173"/>
+                                          <p:spTgt spid="191"/>
                                         </p:tgtEl>
                                       </p:cBhvr>
                                     </p:animEffect>
@@ -20570,7 +23758,7 @@
                                           </p:stCondLst>
                                         </p:cTn>
                                         <p:tgtEl>
-                                          <p:spTgt spid="174"/>
+                                          <p:spTgt spid="192"/>
                                         </p:tgtEl>
                                         <p:attrNameLst>
                                           <p:attrName>style.visibility</p:attrName>
@@ -20584,7 +23772,7 @@
                                       <p:cBhvr additive="base">
                                         <p:cTn dur="1000"/>
                                         <p:tgtEl>
-                                          <p:spTgt spid="174"/>
+                                          <p:spTgt spid="192"/>
                                         </p:tgtEl>
                                         <p:attrNameLst>
                                           <p:attrName>ppt_y</p:attrName>
@@ -20638,7 +23826,7 @@
                                           </p:stCondLst>
                                         </p:cTn>
                                         <p:tgtEl>
-                                          <p:spTgt spid="175"/>
+                                          <p:spTgt spid="193"/>
                                         </p:tgtEl>
                                         <p:attrNameLst>
                                           <p:attrName>style.visibility</p:attrName>
@@ -20652,7 +23840,7 @@
                                       <p:cBhvr additive="base">
                                         <p:cTn dur="1000"/>
                                         <p:tgtEl>
-                                          <p:spTgt spid="175"/>
+                                          <p:spTgt spid="193"/>
                                         </p:tgtEl>
                                         <p:attrNameLst>
                                           <p:attrName>ppt_y</p:attrName>
@@ -20705,7 +23893,7 @@
 </p:sld>
 </file>
 
-<file path=ppt/slides/slide8.xml><?xml version="1.0" encoding="utf-8"?>
+<file path=ppt/slides/slide9.xml><?xml version="1.0" encoding="utf-8"?>
 <p:sld xmlns:a="http://schemas.openxmlformats.org/drawingml/2006/main" xmlns:r="http://schemas.openxmlformats.org/officeDocument/2006/relationships" xmlns:mc="http://schemas.openxmlformats.org/markup-compatibility/2006" xmlns:mv="urn:schemas-microsoft-com:mac:vml" xmlns:p="http://schemas.openxmlformats.org/presentationml/2006/main" xmlns:c="http://schemas.openxmlformats.org/drawingml/2006/chart" xmlns:dgm="http://schemas.openxmlformats.org/drawingml/2006/diagram" xmlns:o="urn:schemas-microsoft-com:office:office" xmlns:v="urn:schemas-microsoft-com:vml" xmlns:pvml="urn:schemas-microsoft-com:office:powerpoint" xmlns:com="http://schemas.openxmlformats.org/drawingml/2006/compatibility" xmlns:p14="http://schemas.microsoft.com/office/powerpoint/2010/main" xmlns:p15="http://schemas.microsoft.com/office/powerpoint/2012/main" xmlns:ahyp="http://schemas.microsoft.com/office/drawing/2018/hyperlinkcolor">
   <p:cSld>
     <p:bg>
@@ -20717,7 +23905,7 @@
     </p:bg>
     <p:spTree>
       <p:nvGrpSpPr>
-        <p:cNvPr id="180" name="Shape 180"/>
+        <p:cNvPr id="198" name="Shape 198"/>
         <p:cNvGrpSpPr/>
         <p:nvPr/>
       </p:nvGrpSpPr>
@@ -20731,7 +23919,7 @@
       </p:grpSpPr>
       <p:sp>
         <p:nvSpPr>
-          <p:cNvPr id="181" name="Google Shape;181;p22"/>
+          <p:cNvPr id="199" name="Google Shape;199;p23"/>
           <p:cNvSpPr/>
           <p:nvPr/>
         </p:nvSpPr>
@@ -20794,7 +23982,7 @@
       </p:sp>
       <p:sp>
         <p:nvSpPr>
-          <p:cNvPr id="182" name="Google Shape;182;p22"/>
+          <p:cNvPr id="200" name="Google Shape;200;p23"/>
           <p:cNvSpPr/>
           <p:nvPr/>
         </p:nvSpPr>
@@ -20857,7 +24045,7 @@
       </p:sp>
       <p:sp>
         <p:nvSpPr>
-          <p:cNvPr id="183" name="Google Shape;183;p22"/>
+          <p:cNvPr id="201" name="Google Shape;201;p23"/>
           <p:cNvSpPr/>
           <p:nvPr/>
         </p:nvSpPr>
@@ -20900,7 +24088,7 @@
       </p:sp>
       <p:sp>
         <p:nvSpPr>
-          <p:cNvPr id="184" name="Google Shape;184;p22"/>
+          <p:cNvPr id="202" name="Google Shape;202;p23"/>
           <p:cNvSpPr/>
           <p:nvPr/>
         </p:nvSpPr>
@@ -20963,7 +24151,7 @@
       </p:sp>
       <p:sp>
         <p:nvSpPr>
-          <p:cNvPr id="185" name="Google Shape;185;p22"/>
+          <p:cNvPr id="203" name="Google Shape;203;p23"/>
           <p:cNvSpPr/>
           <p:nvPr/>
         </p:nvSpPr>
@@ -21026,7 +24214,7 @@
       </p:sp>
       <p:sp>
         <p:nvSpPr>
-          <p:cNvPr id="186" name="Google Shape;186;p22"/>
+          <p:cNvPr id="204" name="Google Shape;204;p23"/>
           <p:cNvSpPr/>
           <p:nvPr/>
         </p:nvSpPr>
@@ -21092,7 +24280,7 @@
       </p:sp>
       <p:sp>
         <p:nvSpPr>
-          <p:cNvPr id="187" name="Google Shape;187;p22"/>
+          <p:cNvPr id="205" name="Google Shape;205;p23"/>
           <p:cNvSpPr/>
           <p:nvPr/>
         </p:nvSpPr>
@@ -21135,7 +24323,7 @@
       </p:sp>
       <p:sp>
         <p:nvSpPr>
-          <p:cNvPr id="188" name="Google Shape;188;p22"/>
+          <p:cNvPr id="206" name="Google Shape;206;p23"/>
           <p:cNvSpPr/>
           <p:nvPr/>
         </p:nvSpPr>
@@ -21198,7 +24386,7 @@
       </p:sp>
       <p:sp>
         <p:nvSpPr>
-          <p:cNvPr id="189" name="Google Shape;189;p22"/>
+          <p:cNvPr id="207" name="Google Shape;207;p23"/>
           <p:cNvSpPr/>
           <p:nvPr/>
         </p:nvSpPr>
@@ -21261,7 +24449,7 @@
       </p:sp>
       <p:sp>
         <p:nvSpPr>
-          <p:cNvPr id="190" name="Google Shape;190;p22"/>
+          <p:cNvPr id="208" name="Google Shape;208;p23"/>
           <p:cNvSpPr/>
           <p:nvPr/>
         </p:nvSpPr>
@@ -21327,7 +24515,7 @@
       </p:sp>
       <p:sp>
         <p:nvSpPr>
-          <p:cNvPr id="191" name="Google Shape;191;p22"/>
+          <p:cNvPr id="209" name="Google Shape;209;p23"/>
           <p:cNvSpPr/>
           <p:nvPr/>
         </p:nvSpPr>
@@ -21370,7 +24558,7 @@
       </p:sp>
       <p:sp>
         <p:nvSpPr>
-          <p:cNvPr id="192" name="Google Shape;192;p22"/>
+          <p:cNvPr id="210" name="Google Shape;210;p23"/>
           <p:cNvSpPr/>
           <p:nvPr/>
         </p:nvSpPr>
@@ -21433,7 +24621,7 @@
       </p:sp>
       <p:sp>
         <p:nvSpPr>
-          <p:cNvPr id="193" name="Google Shape;193;p22"/>
+          <p:cNvPr id="211" name="Google Shape;211;p23"/>
           <p:cNvSpPr/>
           <p:nvPr/>
         </p:nvSpPr>
@@ -21496,7 +24684,7 @@
       </p:sp>
       <p:sp>
         <p:nvSpPr>
-          <p:cNvPr id="194" name="Google Shape;194;p22"/>
+          <p:cNvPr id="212" name="Google Shape;212;p23"/>
           <p:cNvSpPr/>
           <p:nvPr/>
         </p:nvSpPr>
@@ -21602,7 +24790,7 @@
                                           </p:stCondLst>
                                         </p:cTn>
                                         <p:tgtEl>
-                                          <p:spTgt spid="184"/>
+                                          <p:spTgt spid="202"/>
                                         </p:tgtEl>
                                         <p:attrNameLst>
                                           <p:attrName>style.visibility</p:attrName>
@@ -21616,7 +24804,7 @@
                                       <p:cBhvr>
                                         <p:cTn dur="1000"/>
                                         <p:tgtEl>
-                                          <p:spTgt spid="184"/>
+                                          <p:spTgt spid="202"/>
                                         </p:tgtEl>
                                       </p:cBhvr>
                                     </p:animEffect>
@@ -21637,7 +24825,7 @@
                                           </p:stCondLst>
                                         </p:cTn>
                                         <p:tgtEl>
-                                          <p:spTgt spid="185"/>
+                                          <p:spTgt spid="203"/>
                                         </p:tgtEl>
                                         <p:attrNameLst>
                                           <p:attrName>style.visibility</p:attrName>
@@ -21651,7 +24839,7 @@
                                       <p:cBhvr additive="base">
                                         <p:cTn dur="1000"/>
                                         <p:tgtEl>
-                                          <p:spTgt spid="185"/>
+                                          <p:spTgt spid="203"/>
                                         </p:tgtEl>
                                         <p:attrNameLst>
                                           <p:attrName>ppt_x</p:attrName>
@@ -21687,7 +24875,7 @@
                                           </p:stCondLst>
                                         </p:cTn>
                                         <p:tgtEl>
-                                          <p:spTgt spid="186"/>
+                                          <p:spTgt spid="204"/>
                                         </p:tgtEl>
                                         <p:attrNameLst>
                                           <p:attrName>style.visibility</p:attrName>
@@ -21701,7 +24889,7 @@
                                       <p:cBhvr additive="base">
                                         <p:cTn dur="1000"/>
                                         <p:tgtEl>
-                                          <p:spTgt spid="186"/>
+                                          <p:spTgt spid="204"/>
                                         </p:tgtEl>
                                         <p:attrNameLst>
                                           <p:attrName>ppt_w</p:attrName>
@@ -21724,7 +24912,7 @@
                                       <p:cBhvr additive="base">
                                         <p:cTn dur="1000"/>
                                         <p:tgtEl>
-                                          <p:spTgt spid="186"/>
+                                          <p:spTgt spid="204"/>
                                         </p:tgtEl>
                                         <p:attrNameLst>
                                           <p:attrName>ppt_h</p:attrName>
@@ -21739,1295 +24927,6 @@
                                         <p:tav fmla="" tm="100000">
                                           <p:val>
                                             <p:strVal val="#ppt_h"/>
-                                          </p:val>
-                                        </p:tav>
-                                      </p:tavLst>
-                                    </p:anim>
-                                  </p:childTnLst>
-                                </p:cTn>
-                              </p:par>
-                            </p:childTnLst>
-                          </p:cTn>
-                        </p:par>
-                      </p:childTnLst>
-                    </p:cTn>
-                  </p:par>
-                  <p:par>
-                    <p:cTn fill="hold">
-                      <p:stCondLst>
-                        <p:cond delay="indefinite"/>
-                      </p:stCondLst>
-                      <p:childTnLst>
-                        <p:par>
-                          <p:cTn fill="hold">
-                            <p:stCondLst>
-                              <p:cond delay="0"/>
-                            </p:stCondLst>
-                            <p:childTnLst>
-                              <p:par>
-                                <p:cTn fill="hold" nodeType="clickEffect" presetClass="entr" presetID="10" presetSubtype="0">
-                                  <p:stCondLst>
-                                    <p:cond delay="0"/>
-                                  </p:stCondLst>
-                                  <p:childTnLst>
-                                    <p:set>
-                                      <p:cBhvr>
-                                        <p:cTn dur="1" fill="hold">
-                                          <p:stCondLst>
-                                            <p:cond delay="0"/>
-                                          </p:stCondLst>
-                                        </p:cTn>
-                                        <p:tgtEl>
-                                          <p:spTgt spid="188"/>
-                                        </p:tgtEl>
-                                        <p:attrNameLst>
-                                          <p:attrName>style.visibility</p:attrName>
-                                        </p:attrNameLst>
-                                      </p:cBhvr>
-                                      <p:to>
-                                        <p:strVal val="visible"/>
-                                      </p:to>
-                                    </p:set>
-                                    <p:animEffect filter="fade" transition="in">
-                                      <p:cBhvr>
-                                        <p:cTn dur="1000"/>
-                                        <p:tgtEl>
-                                          <p:spTgt spid="188"/>
-                                        </p:tgtEl>
-                                      </p:cBhvr>
-                                    </p:animEffect>
-                                  </p:childTnLst>
-                                </p:cTn>
-                              </p:par>
-                              <p:par>
-                                <p:cTn fill="hold" nodeType="withEffect" presetClass="entr" presetID="2" presetSubtype="2">
-                                  <p:stCondLst>
-                                    <p:cond delay="0"/>
-                                  </p:stCondLst>
-                                  <p:childTnLst>
-                                    <p:set>
-                                      <p:cBhvr>
-                                        <p:cTn dur="1" fill="hold">
-                                          <p:stCondLst>
-                                            <p:cond delay="0"/>
-                                          </p:stCondLst>
-                                        </p:cTn>
-                                        <p:tgtEl>
-                                          <p:spTgt spid="189"/>
-                                        </p:tgtEl>
-                                        <p:attrNameLst>
-                                          <p:attrName>style.visibility</p:attrName>
-                                        </p:attrNameLst>
-                                      </p:cBhvr>
-                                      <p:to>
-                                        <p:strVal val="visible"/>
-                                      </p:to>
-                                    </p:set>
-                                    <p:anim calcmode="lin" valueType="num">
-                                      <p:cBhvr additive="base">
-                                        <p:cTn dur="1000"/>
-                                        <p:tgtEl>
-                                          <p:spTgt spid="189"/>
-                                        </p:tgtEl>
-                                        <p:attrNameLst>
-                                          <p:attrName>ppt_x</p:attrName>
-                                        </p:attrNameLst>
-                                      </p:cBhvr>
-                                      <p:tavLst>
-                                        <p:tav fmla="" tm="0">
-                                          <p:val>
-                                            <p:strVal val="#ppt_x+1"/>
-                                          </p:val>
-                                        </p:tav>
-                                        <p:tav fmla="" tm="100000">
-                                          <p:val>
-                                            <p:strVal val="#ppt_x"/>
-                                          </p:val>
-                                        </p:tav>
-                                      </p:tavLst>
-                                    </p:anim>
-                                  </p:childTnLst>
-                                </p:cTn>
-                              </p:par>
-                              <p:par>
-                                <p:cTn fill="hold" nodeType="withEffect" presetClass="entr" presetID="23" presetSubtype="16">
-                                  <p:stCondLst>
-                                    <p:cond delay="0"/>
-                                  </p:stCondLst>
-                                  <p:childTnLst>
-                                    <p:set>
-                                      <p:cBhvr>
-                                        <p:cTn dur="1" fill="hold">
-                                          <p:stCondLst>
-                                            <p:cond delay="0"/>
-                                          </p:stCondLst>
-                                        </p:cTn>
-                                        <p:tgtEl>
-                                          <p:spTgt spid="190"/>
-                                        </p:tgtEl>
-                                        <p:attrNameLst>
-                                          <p:attrName>style.visibility</p:attrName>
-                                        </p:attrNameLst>
-                                      </p:cBhvr>
-                                      <p:to>
-                                        <p:strVal val="visible"/>
-                                      </p:to>
-                                    </p:set>
-                                    <p:anim calcmode="lin" valueType="num">
-                                      <p:cBhvr additive="base">
-                                        <p:cTn dur="1000"/>
-                                        <p:tgtEl>
-                                          <p:spTgt spid="190"/>
-                                        </p:tgtEl>
-                                        <p:attrNameLst>
-                                          <p:attrName>ppt_w</p:attrName>
-                                        </p:attrNameLst>
-                                      </p:cBhvr>
-                                      <p:tavLst>
-                                        <p:tav fmla="" tm="0">
-                                          <p:val>
-                                            <p:strVal val="0"/>
-                                          </p:val>
-                                        </p:tav>
-                                        <p:tav fmla="" tm="100000">
-                                          <p:val>
-                                            <p:strVal val="#ppt_w"/>
-                                          </p:val>
-                                        </p:tav>
-                                      </p:tavLst>
-                                    </p:anim>
-                                    <p:anim calcmode="lin" valueType="num">
-                                      <p:cBhvr additive="base">
-                                        <p:cTn dur="1000"/>
-                                        <p:tgtEl>
-                                          <p:spTgt spid="190"/>
-                                        </p:tgtEl>
-                                        <p:attrNameLst>
-                                          <p:attrName>ppt_h</p:attrName>
-                                        </p:attrNameLst>
-                                      </p:cBhvr>
-                                      <p:tavLst>
-                                        <p:tav fmla="" tm="0">
-                                          <p:val>
-                                            <p:strVal val="0"/>
-                                          </p:val>
-                                        </p:tav>
-                                        <p:tav fmla="" tm="100000">
-                                          <p:val>
-                                            <p:strVal val="#ppt_h"/>
-                                          </p:val>
-                                        </p:tav>
-                                      </p:tavLst>
-                                    </p:anim>
-                                  </p:childTnLst>
-                                </p:cTn>
-                              </p:par>
-                            </p:childTnLst>
-                          </p:cTn>
-                        </p:par>
-                      </p:childTnLst>
-                    </p:cTn>
-                  </p:par>
-                  <p:par>
-                    <p:cTn fill="hold">
-                      <p:stCondLst>
-                        <p:cond delay="indefinite"/>
-                      </p:stCondLst>
-                      <p:childTnLst>
-                        <p:par>
-                          <p:cTn fill="hold">
-                            <p:stCondLst>
-                              <p:cond delay="0"/>
-                            </p:stCondLst>
-                            <p:childTnLst>
-                              <p:par>
-                                <p:cTn fill="hold" nodeType="clickEffect" presetClass="entr" presetID="10" presetSubtype="0">
-                                  <p:stCondLst>
-                                    <p:cond delay="0"/>
-                                  </p:stCondLst>
-                                  <p:childTnLst>
-                                    <p:set>
-                                      <p:cBhvr>
-                                        <p:cTn dur="1" fill="hold">
-                                          <p:stCondLst>
-                                            <p:cond delay="0"/>
-                                          </p:stCondLst>
-                                        </p:cTn>
-                                        <p:tgtEl>
-                                          <p:spTgt spid="192"/>
-                                        </p:tgtEl>
-                                        <p:attrNameLst>
-                                          <p:attrName>style.visibility</p:attrName>
-                                        </p:attrNameLst>
-                                      </p:cBhvr>
-                                      <p:to>
-                                        <p:strVal val="visible"/>
-                                      </p:to>
-                                    </p:set>
-                                    <p:animEffect filter="fade" transition="in">
-                                      <p:cBhvr>
-                                        <p:cTn dur="1000"/>
-                                        <p:tgtEl>
-                                          <p:spTgt spid="192"/>
-                                        </p:tgtEl>
-                                      </p:cBhvr>
-                                    </p:animEffect>
-                                  </p:childTnLst>
-                                </p:cTn>
-                              </p:par>
-                              <p:par>
-                                <p:cTn fill="hold" nodeType="withEffect" presetClass="entr" presetID="2" presetSubtype="2">
-                                  <p:stCondLst>
-                                    <p:cond delay="0"/>
-                                  </p:stCondLst>
-                                  <p:childTnLst>
-                                    <p:set>
-                                      <p:cBhvr>
-                                        <p:cTn dur="1" fill="hold">
-                                          <p:stCondLst>
-                                            <p:cond delay="0"/>
-                                          </p:stCondLst>
-                                        </p:cTn>
-                                        <p:tgtEl>
-                                          <p:spTgt spid="193"/>
-                                        </p:tgtEl>
-                                        <p:attrNameLst>
-                                          <p:attrName>style.visibility</p:attrName>
-                                        </p:attrNameLst>
-                                      </p:cBhvr>
-                                      <p:to>
-                                        <p:strVal val="visible"/>
-                                      </p:to>
-                                    </p:set>
-                                    <p:anim calcmode="lin" valueType="num">
-                                      <p:cBhvr additive="base">
-                                        <p:cTn dur="1000"/>
-                                        <p:tgtEl>
-                                          <p:spTgt spid="193"/>
-                                        </p:tgtEl>
-                                        <p:attrNameLst>
-                                          <p:attrName>ppt_x</p:attrName>
-                                        </p:attrNameLst>
-                                      </p:cBhvr>
-                                      <p:tavLst>
-                                        <p:tav fmla="" tm="0">
-                                          <p:val>
-                                            <p:strVal val="#ppt_x+1"/>
-                                          </p:val>
-                                        </p:tav>
-                                        <p:tav fmla="" tm="100000">
-                                          <p:val>
-                                            <p:strVal val="#ppt_x"/>
-                                          </p:val>
-                                        </p:tav>
-                                      </p:tavLst>
-                                    </p:anim>
-                                  </p:childTnLst>
-                                </p:cTn>
-                              </p:par>
-                              <p:par>
-                                <p:cTn fill="hold" nodeType="withEffect" presetClass="entr" presetID="23" presetSubtype="16">
-                                  <p:stCondLst>
-                                    <p:cond delay="0"/>
-                                  </p:stCondLst>
-                                  <p:childTnLst>
-                                    <p:set>
-                                      <p:cBhvr>
-                                        <p:cTn dur="1" fill="hold">
-                                          <p:stCondLst>
-                                            <p:cond delay="0"/>
-                                          </p:stCondLst>
-                                        </p:cTn>
-                                        <p:tgtEl>
-                                          <p:spTgt spid="194"/>
-                                        </p:tgtEl>
-                                        <p:attrNameLst>
-                                          <p:attrName>style.visibility</p:attrName>
-                                        </p:attrNameLst>
-                                      </p:cBhvr>
-                                      <p:to>
-                                        <p:strVal val="visible"/>
-                                      </p:to>
-                                    </p:set>
-                                    <p:anim calcmode="lin" valueType="num">
-                                      <p:cBhvr additive="base">
-                                        <p:cTn dur="1000"/>
-                                        <p:tgtEl>
-                                          <p:spTgt spid="194"/>
-                                        </p:tgtEl>
-                                        <p:attrNameLst>
-                                          <p:attrName>ppt_w</p:attrName>
-                                        </p:attrNameLst>
-                                      </p:cBhvr>
-                                      <p:tavLst>
-                                        <p:tav fmla="" tm="0">
-                                          <p:val>
-                                            <p:strVal val="0"/>
-                                          </p:val>
-                                        </p:tav>
-                                        <p:tav fmla="" tm="100000">
-                                          <p:val>
-                                            <p:strVal val="#ppt_w"/>
-                                          </p:val>
-                                        </p:tav>
-                                      </p:tavLst>
-                                    </p:anim>
-                                    <p:anim calcmode="lin" valueType="num">
-                                      <p:cBhvr additive="base">
-                                        <p:cTn dur="1000"/>
-                                        <p:tgtEl>
-                                          <p:spTgt spid="194"/>
-                                        </p:tgtEl>
-                                        <p:attrNameLst>
-                                          <p:attrName>ppt_h</p:attrName>
-                                        </p:attrNameLst>
-                                      </p:cBhvr>
-                                      <p:tavLst>
-                                        <p:tav fmla="" tm="0">
-                                          <p:val>
-                                            <p:strVal val="0"/>
-                                          </p:val>
-                                        </p:tav>
-                                        <p:tav fmla="" tm="100000">
-                                          <p:val>
-                                            <p:strVal val="#ppt_h"/>
-                                          </p:val>
-                                        </p:tav>
-                                      </p:tavLst>
-                                    </p:anim>
-                                  </p:childTnLst>
-                                </p:cTn>
-                              </p:par>
-                            </p:childTnLst>
-                          </p:cTn>
-                        </p:par>
-                      </p:childTnLst>
-                    </p:cTn>
-                  </p:par>
-                </p:childTnLst>
-              </p:cTn>
-              <p:prevCondLst>
-                <p:cond evt="onPrev">
-                  <p:tgtEl>
-                    <p:sldTgt/>
-                  </p:tgtEl>
-                </p:cond>
-              </p:prevCondLst>
-              <p:nextCondLst>
-                <p:cond evt="onNext">
-                  <p:tgtEl>
-                    <p:sldTgt/>
-                  </p:tgtEl>
-                </p:cond>
-              </p:nextCondLst>
-            </p:seq>
-          </p:childTnLst>
-        </p:cTn>
-      </p:par>
-    </p:tnLst>
-  </p:timing>
-</p:sld>
-</file>
-
-<file path=ppt/slides/slide9.xml><?xml version="1.0" encoding="utf-8"?>
-<p:sld xmlns:a="http://schemas.openxmlformats.org/drawingml/2006/main" xmlns:r="http://schemas.openxmlformats.org/officeDocument/2006/relationships" xmlns:mc="http://schemas.openxmlformats.org/markup-compatibility/2006" xmlns:mv="urn:schemas-microsoft-com:mac:vml" xmlns:p="http://schemas.openxmlformats.org/presentationml/2006/main" xmlns:c="http://schemas.openxmlformats.org/drawingml/2006/chart" xmlns:dgm="http://schemas.openxmlformats.org/drawingml/2006/diagram" xmlns:o="urn:schemas-microsoft-com:office:office" xmlns:v="urn:schemas-microsoft-com:vml" xmlns:pvml="urn:schemas-microsoft-com:office:powerpoint" xmlns:com="http://schemas.openxmlformats.org/drawingml/2006/compatibility" xmlns:p14="http://schemas.microsoft.com/office/powerpoint/2010/main" xmlns:p15="http://schemas.microsoft.com/office/powerpoint/2012/main" xmlns:ahyp="http://schemas.microsoft.com/office/drawing/2018/hyperlinkcolor">
-  <p:cSld>
-    <p:bg>
-      <p:bgPr>
-        <a:solidFill>
-          <a:srgbClr val="F8FAFC"/>
-        </a:solidFill>
-      </p:bgPr>
-    </p:bg>
-    <p:spTree>
-      <p:nvGrpSpPr>
-        <p:cNvPr id="199" name="Shape 199"/>
-        <p:cNvGrpSpPr/>
-        <p:nvPr/>
-      </p:nvGrpSpPr>
-      <p:grpSpPr>
-        <a:xfrm>
-          <a:off x="0" y="0"/>
-          <a:ext cx="0" cy="0"/>
-          <a:chOff x="0" y="0"/>
-          <a:chExt cx="0" cy="0"/>
-        </a:xfrm>
-      </p:grpSpPr>
-      <p:sp>
-        <p:nvSpPr>
-          <p:cNvPr id="200" name="Google Shape;200;p23"/>
-          <p:cNvSpPr/>
-          <p:nvPr/>
-        </p:nvSpPr>
-        <p:spPr>
-          <a:xfrm>
-            <a:off x="457200" y="228600"/>
-            <a:ext cx="8229600" cy="274320"/>
-          </a:xfrm>
-          <a:prstGeom prst="rect">
-            <a:avLst/>
-          </a:prstGeom>
-          <a:noFill/>
-          <a:ln>
-            <a:noFill/>
-          </a:ln>
-        </p:spPr>
-        <p:txBody>
-          <a:bodyPr anchorCtr="0" anchor="ctr" bIns="45700" lIns="91425" spcFirstLastPara="1" rIns="91425" wrap="square" tIns="45700">
-            <a:noAutofit/>
-          </a:bodyPr>
-          <a:lstStyle/>
-          <a:p>
-            <a:pPr indent="0" lvl="0" marL="0" marR="0" rtl="0" algn="l">
-              <a:spcBef>
-                <a:spcPts val="0"/>
-              </a:spcBef>
-              <a:spcAft>
-                <a:spcPts val="0"/>
-              </a:spcAft>
-              <a:buClr>
-                <a:srgbClr val="DC2626"/>
-              </a:buClr>
-              <a:buSzPts val="1100"/>
-              <a:buFont typeface="Arial"/>
-              <a:buNone/>
-            </a:pPr>
-            <a:r>
-              <a:rPr b="1" i="0" lang="en-GB" sz="1100" u="none" cap="none" strike="noStrike">
-                <a:solidFill>
-                  <a:srgbClr val="DC2626"/>
-                </a:solidFill>
-                <a:latin typeface="Arial"/>
-                <a:ea typeface="Arial"/>
-                <a:cs typeface="Arial"/>
-                <a:sym typeface="Arial"/>
-              </a:rPr>
-              <a:t>RECOMMENDATIONS</a:t>
-            </a:r>
-            <a:endParaRPr b="0" i="0" sz="1100" u="none" cap="none" strike="noStrike">
-              <a:solidFill>
-                <a:schemeClr val="dk1"/>
-              </a:solidFill>
-              <a:latin typeface="Calibri"/>
-              <a:ea typeface="Calibri"/>
-              <a:cs typeface="Calibri"/>
-              <a:sym typeface="Calibri"/>
-            </a:endParaRPr>
-          </a:p>
-        </p:txBody>
-      </p:sp>
-      <p:sp>
-        <p:nvSpPr>
-          <p:cNvPr id="201" name="Google Shape;201;p23"/>
-          <p:cNvSpPr/>
-          <p:nvPr/>
-        </p:nvSpPr>
-        <p:spPr>
-          <a:xfrm>
-            <a:off x="457200" y="457200"/>
-            <a:ext cx="8229600" cy="411480"/>
-          </a:xfrm>
-          <a:prstGeom prst="rect">
-            <a:avLst/>
-          </a:prstGeom>
-          <a:noFill/>
-          <a:ln>
-            <a:noFill/>
-          </a:ln>
-        </p:spPr>
-        <p:txBody>
-          <a:bodyPr anchorCtr="0" anchor="ctr" bIns="45700" lIns="91425" spcFirstLastPara="1" rIns="91425" wrap="square" tIns="45700">
-            <a:noAutofit/>
-          </a:bodyPr>
-          <a:lstStyle/>
-          <a:p>
-            <a:pPr indent="0" lvl="0" marL="0" marR="0" rtl="0" algn="l">
-              <a:spcBef>
-                <a:spcPts val="0"/>
-              </a:spcBef>
-              <a:spcAft>
-                <a:spcPts val="0"/>
-              </a:spcAft>
-              <a:buClr>
-                <a:srgbClr val="1E293B"/>
-              </a:buClr>
-              <a:buSzPts val="1800"/>
-              <a:buFont typeface="Arial Black"/>
-              <a:buNone/>
-            </a:pPr>
-            <a:r>
-              <a:rPr b="0" i="0" lang="en-GB" sz="1800" u="none" cap="none" strike="noStrike">
-                <a:solidFill>
-                  <a:srgbClr val="1E293B"/>
-                </a:solidFill>
-                <a:latin typeface="Arial Black"/>
-                <a:ea typeface="Arial Black"/>
-                <a:cs typeface="Arial Black"/>
-                <a:sym typeface="Arial Black"/>
-              </a:rPr>
-              <a:t>Ranked Action Plan with Owners &amp; Timelines</a:t>
-            </a:r>
-            <a:endParaRPr b="0" i="0" sz="1800" u="none" cap="none" strike="noStrike">
-              <a:solidFill>
-                <a:schemeClr val="dk1"/>
-              </a:solidFill>
-              <a:latin typeface="Calibri"/>
-              <a:ea typeface="Calibri"/>
-              <a:cs typeface="Calibri"/>
-              <a:sym typeface="Calibri"/>
-            </a:endParaRPr>
-          </a:p>
-        </p:txBody>
-      </p:sp>
-      <p:sp>
-        <p:nvSpPr>
-          <p:cNvPr id="202" name="Google Shape;202;p23"/>
-          <p:cNvSpPr/>
-          <p:nvPr/>
-        </p:nvSpPr>
-        <p:spPr>
-          <a:xfrm>
-            <a:off x="457200" y="914400"/>
-            <a:ext cx="8229600" cy="320040"/>
-          </a:xfrm>
-          <a:prstGeom prst="rect">
-            <a:avLst/>
-          </a:prstGeom>
-          <a:solidFill>
-            <a:srgbClr val="DC2626"/>
-          </a:solidFill>
-          <a:ln>
-            <a:noFill/>
-          </a:ln>
-        </p:spPr>
-        <p:txBody>
-          <a:bodyPr anchorCtr="0" anchor="ctr" bIns="91425" lIns="91425" spcFirstLastPara="1" rIns="91425" wrap="square" tIns="91425">
-            <a:noAutofit/>
-          </a:bodyPr>
-          <a:lstStyle/>
-          <a:p>
-            <a:pPr indent="0" lvl="0" marL="0" rtl="0" algn="l">
-              <a:spcBef>
-                <a:spcPts val="0"/>
-              </a:spcBef>
-              <a:spcAft>
-                <a:spcPts val="0"/>
-              </a:spcAft>
-              <a:buNone/>
-            </a:pPr>
-            <a:r>
-              <a:t/>
-            </a:r>
-            <a:endParaRPr/>
-          </a:p>
-        </p:txBody>
-      </p:sp>
-      <p:sp>
-        <p:nvSpPr>
-          <p:cNvPr id="203" name="Google Shape;203;p23"/>
-          <p:cNvSpPr/>
-          <p:nvPr/>
-        </p:nvSpPr>
-        <p:spPr>
-          <a:xfrm>
-            <a:off x="548640" y="932688"/>
-            <a:ext cx="8046720" cy="274320"/>
-          </a:xfrm>
-          <a:prstGeom prst="rect">
-            <a:avLst/>
-          </a:prstGeom>
-          <a:noFill/>
-          <a:ln>
-            <a:noFill/>
-          </a:ln>
-        </p:spPr>
-        <p:txBody>
-          <a:bodyPr anchorCtr="0" anchor="ctr" bIns="45700" lIns="91425" spcFirstLastPara="1" rIns="91425" wrap="square" tIns="45700">
-            <a:noAutofit/>
-          </a:bodyPr>
-          <a:lstStyle/>
-          <a:p>
-            <a:pPr indent="0" lvl="0" marL="0" marR="0" rtl="0" algn="l">
-              <a:spcBef>
-                <a:spcPts val="0"/>
-              </a:spcBef>
-              <a:spcAft>
-                <a:spcPts val="0"/>
-              </a:spcAft>
-              <a:buClr>
-                <a:srgbClr val="FFFFFF"/>
-              </a:buClr>
-              <a:buSzPts val="900"/>
-              <a:buFont typeface="Arial"/>
-              <a:buNone/>
-            </a:pPr>
-            <a:r>
-              <a:rPr b="1" i="0" lang="en-GB" sz="900" u="none" cap="none" strike="noStrike">
-                <a:solidFill>
-                  <a:srgbClr val="FFFFFF"/>
-                </a:solidFill>
-                <a:latin typeface="Arial"/>
-                <a:ea typeface="Arial"/>
-                <a:cs typeface="Arial"/>
-                <a:sym typeface="Arial"/>
-              </a:rPr>
-              <a:t>PRIORITY 1 — IMMEDIATE (30 DAYS)</a:t>
-            </a:r>
-            <a:endParaRPr b="0" i="0" sz="900" u="none" cap="none" strike="noStrike">
-              <a:solidFill>
-                <a:schemeClr val="dk1"/>
-              </a:solidFill>
-              <a:latin typeface="Calibri"/>
-              <a:ea typeface="Calibri"/>
-              <a:cs typeface="Calibri"/>
-              <a:sym typeface="Calibri"/>
-            </a:endParaRPr>
-          </a:p>
-        </p:txBody>
-      </p:sp>
-      <p:sp>
-        <p:nvSpPr>
-          <p:cNvPr id="204" name="Google Shape;204;p23"/>
-          <p:cNvSpPr/>
-          <p:nvPr/>
-        </p:nvSpPr>
-        <p:spPr>
-          <a:xfrm>
-            <a:off x="457200" y="1280160"/>
-            <a:ext cx="8229600" cy="1463040"/>
-          </a:xfrm>
-          <a:prstGeom prst="rect">
-            <a:avLst/>
-          </a:prstGeom>
-          <a:noFill/>
-          <a:ln>
-            <a:noFill/>
-          </a:ln>
-        </p:spPr>
-        <p:txBody>
-          <a:bodyPr anchorCtr="0" anchor="ctr" bIns="45700" lIns="91425" spcFirstLastPara="1" rIns="91425" wrap="square" tIns="45700">
-            <a:noAutofit/>
-          </a:bodyPr>
-          <a:lstStyle/>
-          <a:p>
-            <a:pPr indent="0" lvl="0" marL="0" marR="0" rtl="0" algn="l">
-              <a:lnSpc>
-                <a:spcPct val="133333"/>
-              </a:lnSpc>
-              <a:spcBef>
-                <a:spcPts val="0"/>
-              </a:spcBef>
-              <a:spcAft>
-                <a:spcPts val="0"/>
-              </a:spcAft>
-              <a:buClr>
-                <a:srgbClr val="1E293B"/>
-              </a:buClr>
-              <a:buSzPts val="900"/>
-              <a:buFont typeface="Arial"/>
-              <a:buNone/>
-            </a:pPr>
-            <a:r>
-              <a:rPr b="1" i="0" lang="en-GB" sz="900" u="none" cap="none" strike="noStrike">
-                <a:solidFill>
-                  <a:srgbClr val="1E293B"/>
-                </a:solidFill>
-                <a:latin typeface="Arial"/>
-                <a:ea typeface="Arial"/>
-                <a:cs typeface="Arial"/>
-                <a:sym typeface="Arial"/>
-              </a:rPr>
-              <a:t>Mandatory real-time status updates</a:t>
-            </a:r>
-            <a:endParaRPr b="0" i="0" sz="900" u="none" cap="none" strike="noStrike">
-              <a:solidFill>
-                <a:schemeClr val="dk1"/>
-              </a:solidFill>
-              <a:latin typeface="Calibri"/>
-              <a:ea typeface="Calibri"/>
-              <a:cs typeface="Calibri"/>
-              <a:sym typeface="Calibri"/>
-            </a:endParaRPr>
-          </a:p>
-          <a:p>
-            <a:pPr indent="0" lvl="0" marL="0" marR="0" rtl="0" algn="l">
-              <a:lnSpc>
-                <a:spcPct val="133333"/>
-              </a:lnSpc>
-              <a:spcBef>
-                <a:spcPts val="0"/>
-              </a:spcBef>
-              <a:spcAft>
-                <a:spcPts val="0"/>
-              </a:spcAft>
-              <a:buClr>
-                <a:srgbClr val="1E293B"/>
-              </a:buClr>
-              <a:buSzPts val="900"/>
-              <a:buFont typeface="Arial"/>
-              <a:buNone/>
-            </a:pPr>
-            <a:r>
-              <a:rPr b="0" i="0" lang="en-GB" sz="900" u="none" cap="none" strike="noStrike">
-                <a:solidFill>
-                  <a:srgbClr val="1E293B"/>
-                </a:solidFill>
-                <a:latin typeface="Arial"/>
-                <a:ea typeface="Arial"/>
-                <a:cs typeface="Arial"/>
-                <a:sym typeface="Arial"/>
-              </a:rPr>
-              <a:t>Require fulfillment teams to update every order to 'payment received/cleared' before any shipment leaves the warehouse. No exceptions. Owner: Ops + Finance. Impact: Stops the blind spot at source.</a:t>
-            </a:r>
-            <a:endParaRPr b="0" i="0" sz="900" u="none" cap="none" strike="noStrike">
-              <a:solidFill>
-                <a:schemeClr val="dk1"/>
-              </a:solidFill>
-              <a:latin typeface="Calibri"/>
-              <a:ea typeface="Calibri"/>
-              <a:cs typeface="Calibri"/>
-              <a:sym typeface="Calibri"/>
-            </a:endParaRPr>
-          </a:p>
-          <a:p>
-            <a:pPr indent="0" lvl="0" marL="0" marR="0" rtl="0" algn="l">
-              <a:lnSpc>
-                <a:spcPct val="133333"/>
-              </a:lnSpc>
-              <a:spcBef>
-                <a:spcPts val="0"/>
-              </a:spcBef>
-              <a:spcAft>
-                <a:spcPts val="0"/>
-              </a:spcAft>
-              <a:buClr>
-                <a:schemeClr val="dk1"/>
-              </a:buClr>
-              <a:buSzPts val="900"/>
-              <a:buFont typeface="Calibri"/>
-              <a:buNone/>
-            </a:pPr>
-            <a:r>
-              <a:t/>
-            </a:r>
-            <a:endParaRPr b="0" i="0" sz="900" u="none" cap="none" strike="noStrike">
-              <a:solidFill>
-                <a:schemeClr val="dk1"/>
-              </a:solidFill>
-              <a:latin typeface="Calibri"/>
-              <a:ea typeface="Calibri"/>
-              <a:cs typeface="Calibri"/>
-              <a:sym typeface="Calibri"/>
-            </a:endParaRPr>
-          </a:p>
-          <a:p>
-            <a:pPr indent="0" lvl="0" marL="0" marR="0" rtl="0" algn="l">
-              <a:lnSpc>
-                <a:spcPct val="133333"/>
-              </a:lnSpc>
-              <a:spcBef>
-                <a:spcPts val="0"/>
-              </a:spcBef>
-              <a:spcAft>
-                <a:spcPts val="0"/>
-              </a:spcAft>
-              <a:buClr>
-                <a:srgbClr val="1E293B"/>
-              </a:buClr>
-              <a:buSzPts val="900"/>
-              <a:buFont typeface="Arial"/>
-              <a:buNone/>
-            </a:pPr>
-            <a:r>
-              <a:rPr b="1" i="0" lang="en-GB" sz="900" u="none" cap="none" strike="noStrike">
-                <a:solidFill>
-                  <a:srgbClr val="1E293B"/>
-                </a:solidFill>
-                <a:latin typeface="Arial"/>
-                <a:ea typeface="Arial"/>
-                <a:cs typeface="Arial"/>
-                <a:sym typeface="Arial"/>
-              </a:rPr>
-              <a:t>Auto-cancellation triggers for aged orders</a:t>
-            </a:r>
-            <a:endParaRPr b="0" i="0" sz="900" u="none" cap="none" strike="noStrike">
-              <a:solidFill>
-                <a:schemeClr val="dk1"/>
-              </a:solidFill>
-              <a:latin typeface="Calibri"/>
-              <a:ea typeface="Calibri"/>
-              <a:cs typeface="Calibri"/>
-              <a:sym typeface="Calibri"/>
-            </a:endParaRPr>
-          </a:p>
-          <a:p>
-            <a:pPr indent="0" lvl="0" marL="0" marR="0" rtl="0" algn="l">
-              <a:lnSpc>
-                <a:spcPct val="133333"/>
-              </a:lnSpc>
-              <a:spcBef>
-                <a:spcPts val="0"/>
-              </a:spcBef>
-              <a:spcAft>
-                <a:spcPts val="0"/>
-              </a:spcAft>
-              <a:buClr>
-                <a:srgbClr val="1E293B"/>
-              </a:buClr>
-              <a:buSzPts val="900"/>
-              <a:buFont typeface="Arial"/>
-              <a:buNone/>
-            </a:pPr>
-            <a:r>
-              <a:rPr b="0" i="0" lang="en-GB" sz="900" u="none" cap="none" strike="noStrike">
-                <a:solidFill>
-                  <a:srgbClr val="1E293B"/>
-                </a:solidFill>
-                <a:latin typeface="Arial"/>
-                <a:ea typeface="Arial"/>
-                <a:cs typeface="Arial"/>
-                <a:sym typeface="Arial"/>
-              </a:rPr>
-              <a:t>Auto-flag or cancel orders stuck &gt;30/60/90 days in pending/on-hold/suspected fraud. Frees $2M+ working capital. Owner: IT + Finance. Impact: Cleans data model, reduces fraud exposure.</a:t>
-            </a:r>
-            <a:endParaRPr b="0" i="0" sz="900" u="none" cap="none" strike="noStrike">
-              <a:solidFill>
-                <a:schemeClr val="dk1"/>
-              </a:solidFill>
-              <a:latin typeface="Calibri"/>
-              <a:ea typeface="Calibri"/>
-              <a:cs typeface="Calibri"/>
-              <a:sym typeface="Calibri"/>
-            </a:endParaRPr>
-          </a:p>
-        </p:txBody>
-      </p:sp>
-      <p:sp>
-        <p:nvSpPr>
-          <p:cNvPr id="205" name="Google Shape;205;p23"/>
-          <p:cNvSpPr/>
-          <p:nvPr/>
-        </p:nvSpPr>
-        <p:spPr>
-          <a:xfrm>
-            <a:off x="457200" y="2834640"/>
-            <a:ext cx="8229600" cy="320040"/>
-          </a:xfrm>
-          <a:prstGeom prst="rect">
-            <a:avLst/>
-          </a:prstGeom>
-          <a:solidFill>
-            <a:srgbClr val="F59E0B"/>
-          </a:solidFill>
-          <a:ln>
-            <a:noFill/>
-          </a:ln>
-        </p:spPr>
-        <p:txBody>
-          <a:bodyPr anchorCtr="0" anchor="ctr" bIns="91425" lIns="91425" spcFirstLastPara="1" rIns="91425" wrap="square" tIns="91425">
-            <a:noAutofit/>
-          </a:bodyPr>
-          <a:lstStyle/>
-          <a:p>
-            <a:pPr indent="0" lvl="0" marL="0" rtl="0" algn="l">
-              <a:spcBef>
-                <a:spcPts val="0"/>
-              </a:spcBef>
-              <a:spcAft>
-                <a:spcPts val="0"/>
-              </a:spcAft>
-              <a:buNone/>
-            </a:pPr>
-            <a:r>
-              <a:t/>
-            </a:r>
-            <a:endParaRPr/>
-          </a:p>
-        </p:txBody>
-      </p:sp>
-      <p:sp>
-        <p:nvSpPr>
-          <p:cNvPr id="206" name="Google Shape;206;p23"/>
-          <p:cNvSpPr/>
-          <p:nvPr/>
-        </p:nvSpPr>
-        <p:spPr>
-          <a:xfrm>
-            <a:off x="548640" y="2852928"/>
-            <a:ext cx="8046720" cy="274320"/>
-          </a:xfrm>
-          <a:prstGeom prst="rect">
-            <a:avLst/>
-          </a:prstGeom>
-          <a:noFill/>
-          <a:ln>
-            <a:noFill/>
-          </a:ln>
-        </p:spPr>
-        <p:txBody>
-          <a:bodyPr anchorCtr="0" anchor="ctr" bIns="45700" lIns="91425" spcFirstLastPara="1" rIns="91425" wrap="square" tIns="45700">
-            <a:noAutofit/>
-          </a:bodyPr>
-          <a:lstStyle/>
-          <a:p>
-            <a:pPr indent="0" lvl="0" marL="0" marR="0" rtl="0" algn="l">
-              <a:spcBef>
-                <a:spcPts val="0"/>
-              </a:spcBef>
-              <a:spcAft>
-                <a:spcPts val="0"/>
-              </a:spcAft>
-              <a:buClr>
-                <a:srgbClr val="1E293B"/>
-              </a:buClr>
-              <a:buSzPts val="900"/>
-              <a:buFont typeface="Arial"/>
-              <a:buNone/>
-            </a:pPr>
-            <a:r>
-              <a:rPr b="1" i="0" lang="en-GB" sz="900" u="none" cap="none" strike="noStrike">
-                <a:solidFill>
-                  <a:srgbClr val="1E293B"/>
-                </a:solidFill>
-                <a:latin typeface="Arial"/>
-                <a:ea typeface="Arial"/>
-                <a:cs typeface="Arial"/>
-                <a:sym typeface="Arial"/>
-              </a:rPr>
-              <a:t>PRIORITY 2 — 45 DAYS</a:t>
-            </a:r>
-            <a:endParaRPr b="0" i="0" sz="900" u="none" cap="none" strike="noStrike">
-              <a:solidFill>
-                <a:schemeClr val="dk1"/>
-              </a:solidFill>
-              <a:latin typeface="Calibri"/>
-              <a:ea typeface="Calibri"/>
-              <a:cs typeface="Calibri"/>
-              <a:sym typeface="Calibri"/>
-            </a:endParaRPr>
-          </a:p>
-        </p:txBody>
-      </p:sp>
-      <p:sp>
-        <p:nvSpPr>
-          <p:cNvPr id="207" name="Google Shape;207;p23"/>
-          <p:cNvSpPr/>
-          <p:nvPr/>
-        </p:nvSpPr>
-        <p:spPr>
-          <a:xfrm>
-            <a:off x="457200" y="3200400"/>
-            <a:ext cx="8229600" cy="1554480"/>
-          </a:xfrm>
-          <a:prstGeom prst="rect">
-            <a:avLst/>
-          </a:prstGeom>
-          <a:noFill/>
-          <a:ln>
-            <a:noFill/>
-          </a:ln>
-        </p:spPr>
-        <p:txBody>
-          <a:bodyPr anchorCtr="0" anchor="ctr" bIns="45700" lIns="91425" spcFirstLastPara="1" rIns="91425" wrap="square" tIns="45700">
-            <a:noAutofit/>
-          </a:bodyPr>
-          <a:lstStyle/>
-          <a:p>
-            <a:pPr indent="0" lvl="0" marL="0" marR="0" rtl="0" algn="l">
-              <a:lnSpc>
-                <a:spcPct val="133333"/>
-              </a:lnSpc>
-              <a:spcBef>
-                <a:spcPts val="0"/>
-              </a:spcBef>
-              <a:spcAft>
-                <a:spcPts val="0"/>
-              </a:spcAft>
-              <a:buClr>
-                <a:srgbClr val="1E293B"/>
-              </a:buClr>
-              <a:buSzPts val="900"/>
-              <a:buFont typeface="Arial"/>
-              <a:buNone/>
-            </a:pPr>
-            <a:r>
-              <a:rPr b="1" i="0" lang="en-GB" sz="900" u="none" cap="none" strike="noStrike">
-                <a:solidFill>
-                  <a:srgbClr val="1E293B"/>
-                </a:solidFill>
-                <a:latin typeface="Arial"/>
-                <a:ea typeface="Arial"/>
-                <a:cs typeface="Arial"/>
-                <a:sym typeface="Arial"/>
-              </a:rPr>
-              <a:t>Tiered escalation framework</a:t>
-            </a:r>
-            <a:endParaRPr b="0" i="0" sz="900" u="none" cap="none" strike="noStrike">
-              <a:solidFill>
-                <a:schemeClr val="dk1"/>
-              </a:solidFill>
-              <a:latin typeface="Calibri"/>
-              <a:ea typeface="Calibri"/>
-              <a:cs typeface="Calibri"/>
-              <a:sym typeface="Calibri"/>
-            </a:endParaRPr>
-          </a:p>
-          <a:p>
-            <a:pPr indent="0" lvl="0" marL="0" marR="0" rtl="0" algn="l">
-              <a:lnSpc>
-                <a:spcPct val="133333"/>
-              </a:lnSpc>
-              <a:spcBef>
-                <a:spcPts val="0"/>
-              </a:spcBef>
-              <a:spcAft>
-                <a:spcPts val="0"/>
-              </a:spcAft>
-              <a:buClr>
-                <a:srgbClr val="1E293B"/>
-              </a:buClr>
-              <a:buSzPts val="900"/>
-              <a:buFont typeface="Arial"/>
-              <a:buNone/>
-            </a:pPr>
-            <a:r>
-              <a:rPr b="0" i="0" lang="en-GB" sz="900" u="none" cap="none" strike="noStrike">
-                <a:solidFill>
-                  <a:srgbClr val="1E293B"/>
-                </a:solidFill>
-                <a:latin typeface="Arial"/>
-                <a:ea typeface="Arial"/>
-                <a:cs typeface="Arial"/>
-                <a:sym typeface="Arial"/>
-              </a:rPr>
-              <a:t>2-day: warehouse reminder → 3-day: manager notification → 4-day: district manager escalation. Targets the 23.68% in the 2–4 day window. Owner: Site Ops. Impact: Cuts late shipments, protects customer experience.</a:t>
-            </a:r>
-            <a:endParaRPr b="0" i="0" sz="900" u="none" cap="none" strike="noStrike">
-              <a:solidFill>
-                <a:schemeClr val="dk1"/>
-              </a:solidFill>
-              <a:latin typeface="Calibri"/>
-              <a:ea typeface="Calibri"/>
-              <a:cs typeface="Calibri"/>
-              <a:sym typeface="Calibri"/>
-            </a:endParaRPr>
-          </a:p>
-          <a:p>
-            <a:pPr indent="0" lvl="0" marL="0" marR="0" rtl="0" algn="l">
-              <a:lnSpc>
-                <a:spcPct val="133333"/>
-              </a:lnSpc>
-              <a:spcBef>
-                <a:spcPts val="0"/>
-              </a:spcBef>
-              <a:spcAft>
-                <a:spcPts val="0"/>
-              </a:spcAft>
-              <a:buClr>
-                <a:schemeClr val="dk1"/>
-              </a:buClr>
-              <a:buSzPts val="900"/>
-              <a:buFont typeface="Calibri"/>
-              <a:buNone/>
-            </a:pPr>
-            <a:r>
-              <a:t/>
-            </a:r>
-            <a:endParaRPr b="0" i="0" sz="900" u="none" cap="none" strike="noStrike">
-              <a:solidFill>
-                <a:schemeClr val="dk1"/>
-              </a:solidFill>
-              <a:latin typeface="Calibri"/>
-              <a:ea typeface="Calibri"/>
-              <a:cs typeface="Calibri"/>
-              <a:sym typeface="Calibri"/>
-            </a:endParaRPr>
-          </a:p>
-          <a:p>
-            <a:pPr indent="0" lvl="0" marL="0" marR="0" rtl="0" algn="l">
-              <a:lnSpc>
-                <a:spcPct val="133333"/>
-              </a:lnSpc>
-              <a:spcBef>
-                <a:spcPts val="0"/>
-              </a:spcBef>
-              <a:spcAft>
-                <a:spcPts val="0"/>
-              </a:spcAft>
-              <a:buClr>
-                <a:srgbClr val="1E293B"/>
-              </a:buClr>
-              <a:buSzPts val="900"/>
-              <a:buFont typeface="Arial"/>
-              <a:buNone/>
-            </a:pPr>
-            <a:r>
-              <a:rPr b="1" i="0" lang="en-GB" sz="900" u="none" cap="none" strike="noStrike">
-                <a:solidFill>
-                  <a:srgbClr val="1E293B"/>
-                </a:solidFill>
-                <a:latin typeface="Arial"/>
-                <a:ea typeface="Arial"/>
-                <a:cs typeface="Arial"/>
-                <a:sym typeface="Arial"/>
-              </a:rPr>
-              <a:t>Deprioritize/restrict First Class for high-bleed categories</a:t>
-            </a:r>
-            <a:endParaRPr b="0" i="0" sz="900" u="none" cap="none" strike="noStrike">
-              <a:solidFill>
-                <a:schemeClr val="dk1"/>
-              </a:solidFill>
-              <a:latin typeface="Calibri"/>
-              <a:ea typeface="Calibri"/>
-              <a:cs typeface="Calibri"/>
-              <a:sym typeface="Calibri"/>
-            </a:endParaRPr>
-          </a:p>
-          <a:p>
-            <a:pPr indent="0" lvl="0" marL="0" marR="0" rtl="0" algn="l">
-              <a:lnSpc>
-                <a:spcPct val="133333"/>
-              </a:lnSpc>
-              <a:spcBef>
-                <a:spcPts val="0"/>
-              </a:spcBef>
-              <a:spcAft>
-                <a:spcPts val="0"/>
-              </a:spcAft>
-              <a:buClr>
-                <a:srgbClr val="1E293B"/>
-              </a:buClr>
-              <a:buSzPts val="900"/>
-              <a:buFont typeface="Arial"/>
-              <a:buNone/>
-            </a:pPr>
-            <a:r>
-              <a:rPr b="0" i="0" lang="en-GB" sz="900" u="none" cap="none" strike="noStrike">
-                <a:solidFill>
-                  <a:srgbClr val="1E293B"/>
-                </a:solidFill>
-                <a:latin typeface="Arial"/>
-                <a:ea typeface="Arial"/>
-                <a:cs typeface="Arial"/>
-                <a:sym typeface="Arial"/>
-              </a:rPr>
-              <a:t>Immediately limit First Class for Fishing, Cleats, Camping &amp; Hiking (highest failure categories). Owner: Logistics. Impact: Kills 95%+ late rate on premium service.</a:t>
-            </a:r>
-            <a:endParaRPr b="0" i="0" sz="900" u="none" cap="none" strike="noStrike">
-              <a:solidFill>
-                <a:schemeClr val="dk1"/>
-              </a:solidFill>
-              <a:latin typeface="Calibri"/>
-              <a:ea typeface="Calibri"/>
-              <a:cs typeface="Calibri"/>
-              <a:sym typeface="Calibri"/>
-            </a:endParaRPr>
-          </a:p>
-        </p:txBody>
-      </p:sp>
-    </p:spTree>
-  </p:cSld>
-  <p:clrMapOvr>
-    <a:masterClrMapping/>
-  </p:clrMapOvr>
-  <p:timing>
-    <p:tnLst>
-      <p:par>
-        <p:cTn dur="indefinite" nodeType="tmRoot" restart="never">
-          <p:childTnLst>
-            <p:seq concurrent="1" nextAc="seek">
-              <p:cTn dur="indefinite" id="2" nodeType="mainSeq">
-                <p:childTnLst>
-                  <p:par>
-                    <p:cTn fill="hold">
-                      <p:stCondLst>
-                        <p:cond delay="indefinite"/>
-                      </p:stCondLst>
-                      <p:childTnLst>
-                        <p:par>
-                          <p:cTn fill="hold">
-                            <p:stCondLst>
-                              <p:cond delay="0"/>
-                            </p:stCondLst>
-                            <p:childTnLst>
-                              <p:par>
-                                <p:cTn fill="hold" nodeType="clickEffect" presetClass="entr" presetID="10" presetSubtype="0">
-                                  <p:stCondLst>
-                                    <p:cond delay="0"/>
-                                  </p:stCondLst>
-                                  <p:childTnLst>
-                                    <p:set>
-                                      <p:cBhvr>
-                                        <p:cTn dur="1" fill="hold">
-                                          <p:stCondLst>
-                                            <p:cond delay="0"/>
-                                          </p:stCondLst>
-                                        </p:cTn>
-                                        <p:tgtEl>
-                                          <p:spTgt spid="203"/>
-                                        </p:tgtEl>
-                                        <p:attrNameLst>
-                                          <p:attrName>style.visibility</p:attrName>
-                                        </p:attrNameLst>
-                                      </p:cBhvr>
-                                      <p:to>
-                                        <p:strVal val="visible"/>
-                                      </p:to>
-                                    </p:set>
-                                    <p:animEffect filter="fade" transition="in">
-                                      <p:cBhvr>
-                                        <p:cTn dur="1000"/>
-                                        <p:tgtEl>
-                                          <p:spTgt spid="203"/>
-                                        </p:tgtEl>
-                                      </p:cBhvr>
-                                    </p:animEffect>
-                                  </p:childTnLst>
-                                </p:cTn>
-                              </p:par>
-                              <p:par>
-                                <p:cTn fill="hold" nodeType="withEffect" presetClass="entr" presetID="2" presetSubtype="2">
-                                  <p:stCondLst>
-                                    <p:cond delay="0"/>
-                                  </p:stCondLst>
-                                  <p:childTnLst>
-                                    <p:set>
-                                      <p:cBhvr>
-                                        <p:cTn dur="1" fill="hold">
-                                          <p:stCondLst>
-                                            <p:cond delay="0"/>
-                                          </p:stCondLst>
-                                        </p:cTn>
-                                        <p:tgtEl>
-                                          <p:spTgt spid="204"/>
-                                        </p:tgtEl>
-                                        <p:attrNameLst>
-                                          <p:attrName>style.visibility</p:attrName>
-                                        </p:attrNameLst>
-                                      </p:cBhvr>
-                                      <p:to>
-                                        <p:strVal val="visible"/>
-                                      </p:to>
-                                    </p:set>
-                                    <p:anim calcmode="lin" valueType="num">
-                                      <p:cBhvr additive="base">
-                                        <p:cTn dur="1000"/>
-                                        <p:tgtEl>
-                                          <p:spTgt spid="204"/>
-                                        </p:tgtEl>
-                                        <p:attrNameLst>
-                                          <p:attrName>ppt_x</p:attrName>
-                                        </p:attrNameLst>
-                                      </p:cBhvr>
-                                      <p:tavLst>
-                                        <p:tav fmla="" tm="0">
-                                          <p:val>
-                                            <p:strVal val="#ppt_x+1"/>
-                                          </p:val>
-                                        </p:tav>
-                                        <p:tav fmla="" tm="100000">
-                                          <p:val>
-                                            <p:strVal val="#ppt_x"/>
                                           </p:val>
                                         </p:tav>
                                       </p:tavLst>
@@ -23138,6 +25037,255 @@
                                   </p:childTnLst>
                                 </p:cTn>
                               </p:par>
+                              <p:par>
+                                <p:cTn fill="hold" nodeType="withEffect" presetClass="entr" presetID="23" presetSubtype="16">
+                                  <p:stCondLst>
+                                    <p:cond delay="0"/>
+                                  </p:stCondLst>
+                                  <p:childTnLst>
+                                    <p:set>
+                                      <p:cBhvr>
+                                        <p:cTn dur="1" fill="hold">
+                                          <p:stCondLst>
+                                            <p:cond delay="0"/>
+                                          </p:stCondLst>
+                                        </p:cTn>
+                                        <p:tgtEl>
+                                          <p:spTgt spid="208"/>
+                                        </p:tgtEl>
+                                        <p:attrNameLst>
+                                          <p:attrName>style.visibility</p:attrName>
+                                        </p:attrNameLst>
+                                      </p:cBhvr>
+                                      <p:to>
+                                        <p:strVal val="visible"/>
+                                      </p:to>
+                                    </p:set>
+                                    <p:anim calcmode="lin" valueType="num">
+                                      <p:cBhvr additive="base">
+                                        <p:cTn dur="1000"/>
+                                        <p:tgtEl>
+                                          <p:spTgt spid="208"/>
+                                        </p:tgtEl>
+                                        <p:attrNameLst>
+                                          <p:attrName>ppt_w</p:attrName>
+                                        </p:attrNameLst>
+                                      </p:cBhvr>
+                                      <p:tavLst>
+                                        <p:tav fmla="" tm="0">
+                                          <p:val>
+                                            <p:strVal val="0"/>
+                                          </p:val>
+                                        </p:tav>
+                                        <p:tav fmla="" tm="100000">
+                                          <p:val>
+                                            <p:strVal val="#ppt_w"/>
+                                          </p:val>
+                                        </p:tav>
+                                      </p:tavLst>
+                                    </p:anim>
+                                    <p:anim calcmode="lin" valueType="num">
+                                      <p:cBhvr additive="base">
+                                        <p:cTn dur="1000"/>
+                                        <p:tgtEl>
+                                          <p:spTgt spid="208"/>
+                                        </p:tgtEl>
+                                        <p:attrNameLst>
+                                          <p:attrName>ppt_h</p:attrName>
+                                        </p:attrNameLst>
+                                      </p:cBhvr>
+                                      <p:tavLst>
+                                        <p:tav fmla="" tm="0">
+                                          <p:val>
+                                            <p:strVal val="0"/>
+                                          </p:val>
+                                        </p:tav>
+                                        <p:tav fmla="" tm="100000">
+                                          <p:val>
+                                            <p:strVal val="#ppt_h"/>
+                                          </p:val>
+                                        </p:tav>
+                                      </p:tavLst>
+                                    </p:anim>
+                                  </p:childTnLst>
+                                </p:cTn>
+                              </p:par>
+                            </p:childTnLst>
+                          </p:cTn>
+                        </p:par>
+                      </p:childTnLst>
+                    </p:cTn>
+                  </p:par>
+                  <p:par>
+                    <p:cTn fill="hold">
+                      <p:stCondLst>
+                        <p:cond delay="indefinite"/>
+                      </p:stCondLst>
+                      <p:childTnLst>
+                        <p:par>
+                          <p:cTn fill="hold">
+                            <p:stCondLst>
+                              <p:cond delay="0"/>
+                            </p:stCondLst>
+                            <p:childTnLst>
+                              <p:par>
+                                <p:cTn fill="hold" nodeType="clickEffect" presetClass="entr" presetID="10" presetSubtype="0">
+                                  <p:stCondLst>
+                                    <p:cond delay="0"/>
+                                  </p:stCondLst>
+                                  <p:childTnLst>
+                                    <p:set>
+                                      <p:cBhvr>
+                                        <p:cTn dur="1" fill="hold">
+                                          <p:stCondLst>
+                                            <p:cond delay="0"/>
+                                          </p:stCondLst>
+                                        </p:cTn>
+                                        <p:tgtEl>
+                                          <p:spTgt spid="210"/>
+                                        </p:tgtEl>
+                                        <p:attrNameLst>
+                                          <p:attrName>style.visibility</p:attrName>
+                                        </p:attrNameLst>
+                                      </p:cBhvr>
+                                      <p:to>
+                                        <p:strVal val="visible"/>
+                                      </p:to>
+                                    </p:set>
+                                    <p:animEffect filter="fade" transition="in">
+                                      <p:cBhvr>
+                                        <p:cTn dur="1000"/>
+                                        <p:tgtEl>
+                                          <p:spTgt spid="210"/>
+                                        </p:tgtEl>
+                                      </p:cBhvr>
+                                    </p:animEffect>
+                                  </p:childTnLst>
+                                </p:cTn>
+                              </p:par>
+                              <p:par>
+                                <p:cTn fill="hold" nodeType="withEffect" presetClass="entr" presetID="2" presetSubtype="2">
+                                  <p:stCondLst>
+                                    <p:cond delay="0"/>
+                                  </p:stCondLst>
+                                  <p:childTnLst>
+                                    <p:set>
+                                      <p:cBhvr>
+                                        <p:cTn dur="1" fill="hold">
+                                          <p:stCondLst>
+                                            <p:cond delay="0"/>
+                                          </p:stCondLst>
+                                        </p:cTn>
+                                        <p:tgtEl>
+                                          <p:spTgt spid="211"/>
+                                        </p:tgtEl>
+                                        <p:attrNameLst>
+                                          <p:attrName>style.visibility</p:attrName>
+                                        </p:attrNameLst>
+                                      </p:cBhvr>
+                                      <p:to>
+                                        <p:strVal val="visible"/>
+                                      </p:to>
+                                    </p:set>
+                                    <p:anim calcmode="lin" valueType="num">
+                                      <p:cBhvr additive="base">
+                                        <p:cTn dur="1000"/>
+                                        <p:tgtEl>
+                                          <p:spTgt spid="211"/>
+                                        </p:tgtEl>
+                                        <p:attrNameLst>
+                                          <p:attrName>ppt_x</p:attrName>
+                                        </p:attrNameLst>
+                                      </p:cBhvr>
+                                      <p:tavLst>
+                                        <p:tav fmla="" tm="0">
+                                          <p:val>
+                                            <p:strVal val="#ppt_x+1"/>
+                                          </p:val>
+                                        </p:tav>
+                                        <p:tav fmla="" tm="100000">
+                                          <p:val>
+                                            <p:strVal val="#ppt_x"/>
+                                          </p:val>
+                                        </p:tav>
+                                      </p:tavLst>
+                                    </p:anim>
+                                  </p:childTnLst>
+                                </p:cTn>
+                              </p:par>
+                              <p:par>
+                                <p:cTn fill="hold" nodeType="withEffect" presetClass="entr" presetID="23" presetSubtype="16">
+                                  <p:stCondLst>
+                                    <p:cond delay="0"/>
+                                  </p:stCondLst>
+                                  <p:childTnLst>
+                                    <p:set>
+                                      <p:cBhvr>
+                                        <p:cTn dur="1" fill="hold">
+                                          <p:stCondLst>
+                                            <p:cond delay="0"/>
+                                          </p:stCondLst>
+                                        </p:cTn>
+                                        <p:tgtEl>
+                                          <p:spTgt spid="212"/>
+                                        </p:tgtEl>
+                                        <p:attrNameLst>
+                                          <p:attrName>style.visibility</p:attrName>
+                                        </p:attrNameLst>
+                                      </p:cBhvr>
+                                      <p:to>
+                                        <p:strVal val="visible"/>
+                                      </p:to>
+                                    </p:set>
+                                    <p:anim calcmode="lin" valueType="num">
+                                      <p:cBhvr additive="base">
+                                        <p:cTn dur="1000"/>
+                                        <p:tgtEl>
+                                          <p:spTgt spid="212"/>
+                                        </p:tgtEl>
+                                        <p:attrNameLst>
+                                          <p:attrName>ppt_w</p:attrName>
+                                        </p:attrNameLst>
+                                      </p:cBhvr>
+                                      <p:tavLst>
+                                        <p:tav fmla="" tm="0">
+                                          <p:val>
+                                            <p:strVal val="0"/>
+                                          </p:val>
+                                        </p:tav>
+                                        <p:tav fmla="" tm="100000">
+                                          <p:val>
+                                            <p:strVal val="#ppt_w"/>
+                                          </p:val>
+                                        </p:tav>
+                                      </p:tavLst>
+                                    </p:anim>
+                                    <p:anim calcmode="lin" valueType="num">
+                                      <p:cBhvr additive="base">
+                                        <p:cTn dur="1000"/>
+                                        <p:tgtEl>
+                                          <p:spTgt spid="212"/>
+                                        </p:tgtEl>
+                                        <p:attrNameLst>
+                                          <p:attrName>ppt_h</p:attrName>
+                                        </p:attrNameLst>
+                                      </p:cBhvr>
+                                      <p:tavLst>
+                                        <p:tav fmla="" tm="0">
+                                          <p:val>
+                                            <p:strVal val="0"/>
+                                          </p:val>
+                                        </p:tav>
+                                        <p:tav fmla="" tm="100000">
+                                          <p:val>
+                                            <p:strVal val="#ppt_h"/>
+                                          </p:val>
+                                        </p:tav>
+                                      </p:tavLst>
+                                    </p:anim>
+                                  </p:childTnLst>
+                                </p:cTn>
+                              </p:par>
                             </p:childTnLst>
                           </p:cTn>
                         </p:par>
@@ -23170,285 +25318,6 @@
 </file>
 
 <file path=ppt/theme/theme1.xml><?xml version="1.0" encoding="utf-8"?>
-<a:theme xmlns:a="http://schemas.openxmlformats.org/drawingml/2006/main" xmlns:r="http://schemas.openxmlformats.org/officeDocument/2006/relationships" name="Simple Light">
-  <a:themeElements>
-    <a:clrScheme name="Simple Light">
-      <a:dk1>
-        <a:srgbClr val="000000"/>
-      </a:dk1>
-      <a:lt1>
-        <a:srgbClr val="FFFFFF"/>
-      </a:lt1>
-      <a:dk2>
-        <a:srgbClr val="595959"/>
-      </a:dk2>
-      <a:lt2>
-        <a:srgbClr val="EEEEEE"/>
-      </a:lt2>
-      <a:accent1>
-        <a:srgbClr val="4285F4"/>
-      </a:accent1>
-      <a:accent2>
-        <a:srgbClr val="212121"/>
-      </a:accent2>
-      <a:accent3>
-        <a:srgbClr val="78909C"/>
-      </a:accent3>
-      <a:accent4>
-        <a:srgbClr val="FFAB40"/>
-      </a:accent4>
-      <a:accent5>
-        <a:srgbClr val="0097A7"/>
-      </a:accent5>
-      <a:accent6>
-        <a:srgbClr val="EEFF41"/>
-      </a:accent6>
-      <a:hlink>
-        <a:srgbClr val="0097A7"/>
-      </a:hlink>
-      <a:folHlink>
-        <a:srgbClr val="0097A7"/>
-      </a:folHlink>
-    </a:clrScheme>
-    <a:fontScheme name="Office">
-      <a:majorFont>
-        <a:latin typeface="Arial"/>
-        <a:ea typeface=""/>
-        <a:cs typeface=""/>
-        <a:font script="Jpan" typeface="ＭＳ Ｐゴシック"/>
-        <a:font script="Hang" typeface="맑은 고딕"/>
-        <a:font script="Hans" typeface="宋体"/>
-        <a:font script="Hant" typeface="新細明體"/>
-        <a:font script="Arab" typeface="Times New Roman"/>
-        <a:font script="Hebr" typeface="Times New Roman"/>
-        <a:font script="Thai" typeface="Angsana New"/>
-        <a:font script="Ethi" typeface="Nyala"/>
-        <a:font script="Beng" typeface="Vrinda"/>
-        <a:font script="Gujr" typeface="Shruti"/>
-        <a:font script="Khmr" typeface="MoolBoran"/>
-        <a:font script="Knda" typeface="Tunga"/>
-        <a:font script="Guru" typeface="Raavi"/>
-        <a:font script="Cans" typeface="Euphemia"/>
-        <a:font script="Cher" typeface="Plantagenet Cherokee"/>
-        <a:font script="Yiii" typeface="Microsoft Yi Baiti"/>
-        <a:font script="Tibt" typeface="Microsoft Himalaya"/>
-        <a:font script="Thaa" typeface="MV Boli"/>
-        <a:font script="Deva" typeface="Mangal"/>
-        <a:font script="Telu" typeface="Gautami"/>
-        <a:font script="Taml" typeface="Latha"/>
-        <a:font script="Syrc" typeface="Estrangelo Edessa"/>
-        <a:font script="Orya" typeface="Kalinga"/>
-        <a:font script="Mlym" typeface="Kartika"/>
-        <a:font script="Laoo" typeface="DokChampa"/>
-        <a:font script="Sinh" typeface="Iskoola Pota"/>
-        <a:font script="Mong" typeface="Mongolian Baiti"/>
-        <a:font script="Viet" typeface="Times New Roman"/>
-        <a:font script="Uigh" typeface="Microsoft Uighur"/>
-        <a:font script="Geor" typeface="Sylfaen"/>
-      </a:majorFont>
-      <a:minorFont>
-        <a:latin typeface="Arial"/>
-        <a:ea typeface=""/>
-        <a:cs typeface=""/>
-        <a:font script="Jpan" typeface="ＭＳ Ｐゴシック"/>
-        <a:font script="Hang" typeface="맑은 고딕"/>
-        <a:font script="Hans" typeface="宋体"/>
-        <a:font script="Hant" typeface="新細明體"/>
-        <a:font script="Arab" typeface="Arial"/>
-        <a:font script="Hebr" typeface="Arial"/>
-        <a:font script="Thai" typeface="Cordia New"/>
-        <a:font script="Ethi" typeface="Nyala"/>
-        <a:font script="Beng" typeface="Vrinda"/>
-        <a:font script="Gujr" typeface="Shruti"/>
-        <a:font script="Khmr" typeface="DaunPenh"/>
-        <a:font script="Knda" typeface="Tunga"/>
-        <a:font script="Guru" typeface="Raavi"/>
-        <a:font script="Cans" typeface="Euphemia"/>
-        <a:font script="Cher" typeface="Plantagenet Cherokee"/>
-        <a:font script="Yiii" typeface="Microsoft Yi Baiti"/>
-        <a:font script="Tibt" typeface="Microsoft Himalaya"/>
-        <a:font script="Thaa" typeface="MV Boli"/>
-        <a:font script="Deva" typeface="Mangal"/>
-        <a:font script="Telu" typeface="Gautami"/>
-        <a:font script="Taml" typeface="Latha"/>
-        <a:font script="Syrc" typeface="Estrangelo Edessa"/>
-        <a:font script="Orya" typeface="Kalinga"/>
-        <a:font script="Mlym" typeface="Kartika"/>
-        <a:font script="Laoo" typeface="DokChampa"/>
-        <a:font script="Sinh" typeface="Iskoola Pota"/>
-        <a:font script="Mong" typeface="Mongolian Baiti"/>
-        <a:font script="Viet" typeface="Arial"/>
-        <a:font script="Uigh" typeface="Microsoft Uighur"/>
-        <a:font script="Geor" typeface="Sylfaen"/>
-      </a:minorFont>
-    </a:fontScheme>
-    <a:fmtScheme name="Office">
-      <a:fillStyleLst>
-        <a:solidFill>
-          <a:schemeClr val="phClr"/>
-        </a:solidFill>
-        <a:gradFill rotWithShape="1">
-          <a:gsLst>
-            <a:gs pos="0">
-              <a:schemeClr val="phClr">
-                <a:tint val="50000"/>
-                <a:satMod val="300000"/>
-              </a:schemeClr>
-            </a:gs>
-            <a:gs pos="35000">
-              <a:schemeClr val="phClr">
-                <a:tint val="37000"/>
-                <a:satMod val="300000"/>
-              </a:schemeClr>
-            </a:gs>
-            <a:gs pos="100000">
-              <a:schemeClr val="phClr">
-                <a:tint val="15000"/>
-                <a:satMod val="350000"/>
-              </a:schemeClr>
-            </a:gs>
-          </a:gsLst>
-          <a:lin ang="16200000" scaled="1"/>
-        </a:gradFill>
-        <a:gradFill rotWithShape="1">
-          <a:gsLst>
-            <a:gs pos="0">
-              <a:schemeClr val="phClr">
-                <a:tint val="100000"/>
-                <a:shade val="100000"/>
-                <a:satMod val="130000"/>
-              </a:schemeClr>
-            </a:gs>
-            <a:gs pos="100000">
-              <a:schemeClr val="phClr">
-                <a:tint val="50000"/>
-                <a:shade val="100000"/>
-                <a:satMod val="350000"/>
-              </a:schemeClr>
-            </a:gs>
-          </a:gsLst>
-          <a:lin ang="16200000" scaled="0"/>
-        </a:gradFill>
-      </a:fillStyleLst>
-      <a:lnStyleLst>
-        <a:ln w="9525" cap="flat" cmpd="sng" algn="ctr">
-          <a:solidFill>
-            <a:schemeClr val="phClr">
-              <a:shade val="95000"/>
-              <a:satMod val="105000"/>
-            </a:schemeClr>
-          </a:solidFill>
-          <a:prstDash val="solid"/>
-        </a:ln>
-        <a:ln w="25400" cap="flat" cmpd="sng" algn="ctr">
-          <a:solidFill>
-            <a:schemeClr val="phClr"/>
-          </a:solidFill>
-          <a:prstDash val="solid"/>
-        </a:ln>
-        <a:ln w="38100" cap="flat" cmpd="sng" algn="ctr">
-          <a:solidFill>
-            <a:schemeClr val="phClr"/>
-          </a:solidFill>
-          <a:prstDash val="solid"/>
-        </a:ln>
-      </a:lnStyleLst>
-      <a:effectStyleLst>
-        <a:effectStyle>
-          <a:effectLst>
-            <a:outerShdw blurRad="40000" dist="20000" dir="5400000" rotWithShape="0">
-              <a:srgbClr val="000000">
-                <a:alpha val="38000"/>
-              </a:srgbClr>
-            </a:outerShdw>
-          </a:effectLst>
-        </a:effectStyle>
-        <a:effectStyle>
-          <a:effectLst>
-            <a:outerShdw blurRad="40000" dist="23000" dir="5400000" rotWithShape="0">
-              <a:srgbClr val="000000">
-                <a:alpha val="35000"/>
-              </a:srgbClr>
-            </a:outerShdw>
-          </a:effectLst>
-        </a:effectStyle>
-        <a:effectStyle>
-          <a:effectLst>
-            <a:outerShdw blurRad="40000" dist="23000" dir="5400000" rotWithShape="0">
-              <a:srgbClr val="000000">
-                <a:alpha val="35000"/>
-              </a:srgbClr>
-            </a:outerShdw>
-          </a:effectLst>
-          <a:scene3d>
-            <a:camera prst="orthographicFront">
-              <a:rot lat="0" lon="0" rev="0"/>
-            </a:camera>
-            <a:lightRig rig="threePt" dir="t">
-              <a:rot lat="0" lon="0" rev="1200000"/>
-            </a:lightRig>
-          </a:scene3d>
-          <a:sp3d>
-            <a:bevelT w="63500" h="25400"/>
-          </a:sp3d>
-        </a:effectStyle>
-      </a:effectStyleLst>
-      <a:bgFillStyleLst>
-        <a:solidFill>
-          <a:schemeClr val="phClr"/>
-        </a:solidFill>
-        <a:gradFill rotWithShape="1">
-          <a:gsLst>
-            <a:gs pos="0">
-              <a:schemeClr val="phClr">
-                <a:tint val="40000"/>
-                <a:satMod val="350000"/>
-              </a:schemeClr>
-            </a:gs>
-            <a:gs pos="40000">
-              <a:schemeClr val="phClr">
-                <a:tint val="45000"/>
-                <a:shade val="99000"/>
-                <a:satMod val="350000"/>
-              </a:schemeClr>
-            </a:gs>
-            <a:gs pos="100000">
-              <a:schemeClr val="phClr">
-                <a:shade val="20000"/>
-                <a:satMod val="255000"/>
-              </a:schemeClr>
-            </a:gs>
-          </a:gsLst>
-          <a:path path="circle">
-            <a:fillToRect l="50000" t="-80000" r="50000" b="180000"/>
-          </a:path>
-        </a:gradFill>
-        <a:gradFill rotWithShape="1">
-          <a:gsLst>
-            <a:gs pos="0">
-              <a:schemeClr val="phClr">
-                <a:tint val="80000"/>
-                <a:satMod val="300000"/>
-              </a:schemeClr>
-            </a:gs>
-            <a:gs pos="100000">
-              <a:schemeClr val="phClr">
-                <a:shade val="30000"/>
-                <a:satMod val="200000"/>
-              </a:schemeClr>
-            </a:gs>
-          </a:gsLst>
-          <a:path path="circle">
-            <a:fillToRect l="50000" t="50000" r="50000" b="50000"/>
-          </a:path>
-        </a:gradFill>
-      </a:bgFillStyleLst>
-    </a:fmtScheme>
-  </a:themeElements>
-</a:theme>
-</file>
-
-<file path=ppt/theme/theme2.xml><?xml version="1.0" encoding="utf-8"?>
 <a:theme xmlns:a="http://schemas.openxmlformats.org/drawingml/2006/main" xmlns:r="http://schemas.openxmlformats.org/officeDocument/2006/relationships" name="Office Theme">
   <a:themeElements>
     <a:clrScheme name="Office">
@@ -23727,7 +25596,7 @@
 </a:theme>
 </file>
 
-<file path=ppt/theme/theme3.xml><?xml version="1.0" encoding="utf-8"?>
+<file path=ppt/theme/theme2.xml><?xml version="1.0" encoding="utf-8"?>
 <a:theme xmlns:a="http://schemas.openxmlformats.org/drawingml/2006/main" xmlns:r="http://schemas.openxmlformats.org/officeDocument/2006/relationships">
   <a:themeElements>
     <a:clrScheme name="Default">
@@ -24004,4 +25873,283 @@
     </a:fmtScheme>
   </a:themeElements>
 </a:theme>
+</file>
+
+<file path=ppt/theme/theme3.xml><?xml version="1.0" encoding="utf-8"?>
+<a:theme xmlns:a="http://schemas.openxmlformats.org/drawingml/2006/main" xmlns:r="http://schemas.openxmlformats.org/officeDocument/2006/relationships" name="Simple Light">
+  <a:themeElements>
+    <a:clrScheme name="Simple Light">
+      <a:dk1>
+        <a:srgbClr val="000000"/>
+      </a:dk1>
+      <a:lt1>
+        <a:srgbClr val="FFFFFF"/>
+      </a:lt1>
+      <a:dk2>
+        <a:srgbClr val="595959"/>
+      </a:dk2>
+      <a:lt2>
+        <a:srgbClr val="EEEEEE"/>
+      </a:lt2>
+      <a:accent1>
+        <a:srgbClr val="4285F4"/>
+      </a:accent1>
+      <a:accent2>
+        <a:srgbClr val="212121"/>
+      </a:accent2>
+      <a:accent3>
+        <a:srgbClr val="78909C"/>
+      </a:accent3>
+      <a:accent4>
+        <a:srgbClr val="FFAB40"/>
+      </a:accent4>
+      <a:accent5>
+        <a:srgbClr val="0097A7"/>
+      </a:accent5>
+      <a:accent6>
+        <a:srgbClr val="EEFF41"/>
+      </a:accent6>
+      <a:hlink>
+        <a:srgbClr val="0097A7"/>
+      </a:hlink>
+      <a:folHlink>
+        <a:srgbClr val="0097A7"/>
+      </a:folHlink>
+    </a:clrScheme>
+    <a:fontScheme name="Office">
+      <a:majorFont>
+        <a:latin typeface="Arial"/>
+        <a:ea typeface=""/>
+        <a:cs typeface=""/>
+        <a:font script="Jpan" typeface="ＭＳ Ｐゴシック"/>
+        <a:font script="Hang" typeface="맑은 고딕"/>
+        <a:font script="Hans" typeface="宋体"/>
+        <a:font script="Hant" typeface="新細明體"/>
+        <a:font script="Arab" typeface="Times New Roman"/>
+        <a:font script="Hebr" typeface="Times New Roman"/>
+        <a:font script="Thai" typeface="Angsana New"/>
+        <a:font script="Ethi" typeface="Nyala"/>
+        <a:font script="Beng" typeface="Vrinda"/>
+        <a:font script="Gujr" typeface="Shruti"/>
+        <a:font script="Khmr" typeface="MoolBoran"/>
+        <a:font script="Knda" typeface="Tunga"/>
+        <a:font script="Guru" typeface="Raavi"/>
+        <a:font script="Cans" typeface="Euphemia"/>
+        <a:font script="Cher" typeface="Plantagenet Cherokee"/>
+        <a:font script="Yiii" typeface="Microsoft Yi Baiti"/>
+        <a:font script="Tibt" typeface="Microsoft Himalaya"/>
+        <a:font script="Thaa" typeface="MV Boli"/>
+        <a:font script="Deva" typeface="Mangal"/>
+        <a:font script="Telu" typeface="Gautami"/>
+        <a:font script="Taml" typeface="Latha"/>
+        <a:font script="Syrc" typeface="Estrangelo Edessa"/>
+        <a:font script="Orya" typeface="Kalinga"/>
+        <a:font script="Mlym" typeface="Kartika"/>
+        <a:font script="Laoo" typeface="DokChampa"/>
+        <a:font script="Sinh" typeface="Iskoola Pota"/>
+        <a:font script="Mong" typeface="Mongolian Baiti"/>
+        <a:font script="Viet" typeface="Times New Roman"/>
+        <a:font script="Uigh" typeface="Microsoft Uighur"/>
+        <a:font script="Geor" typeface="Sylfaen"/>
+      </a:majorFont>
+      <a:minorFont>
+        <a:latin typeface="Arial"/>
+        <a:ea typeface=""/>
+        <a:cs typeface=""/>
+        <a:font script="Jpan" typeface="ＭＳ Ｐゴシック"/>
+        <a:font script="Hang" typeface="맑은 고딕"/>
+        <a:font script="Hans" typeface="宋体"/>
+        <a:font script="Hant" typeface="新細明體"/>
+        <a:font script="Arab" typeface="Arial"/>
+        <a:font script="Hebr" typeface="Arial"/>
+        <a:font script="Thai" typeface="Cordia New"/>
+        <a:font script="Ethi" typeface="Nyala"/>
+        <a:font script="Beng" typeface="Vrinda"/>
+        <a:font script="Gujr" typeface="Shruti"/>
+        <a:font script="Khmr" typeface="DaunPenh"/>
+        <a:font script="Knda" typeface="Tunga"/>
+        <a:font script="Guru" typeface="Raavi"/>
+        <a:font script="Cans" typeface="Euphemia"/>
+        <a:font script="Cher" typeface="Plantagenet Cherokee"/>
+        <a:font script="Yiii" typeface="Microsoft Yi Baiti"/>
+        <a:font script="Tibt" typeface="Microsoft Himalaya"/>
+        <a:font script="Thaa" typeface="MV Boli"/>
+        <a:font script="Deva" typeface="Mangal"/>
+        <a:font script="Telu" typeface="Gautami"/>
+        <a:font script="Taml" typeface="Latha"/>
+        <a:font script="Syrc" typeface="Estrangelo Edessa"/>
+        <a:font script="Orya" typeface="Kalinga"/>
+        <a:font script="Mlym" typeface="Kartika"/>
+        <a:font script="Laoo" typeface="DokChampa"/>
+        <a:font script="Sinh" typeface="Iskoola Pota"/>
+        <a:font script="Mong" typeface="Mongolian Baiti"/>
+        <a:font script="Viet" typeface="Arial"/>
+        <a:font script="Uigh" typeface="Microsoft Uighur"/>
+        <a:font script="Geor" typeface="Sylfaen"/>
+      </a:minorFont>
+    </a:fontScheme>
+    <a:fmtScheme name="Office">
+      <a:fillStyleLst>
+        <a:solidFill>
+          <a:schemeClr val="phClr"/>
+        </a:solidFill>
+        <a:gradFill rotWithShape="1">
+          <a:gsLst>
+            <a:gs pos="0">
+              <a:schemeClr val="phClr">
+                <a:tint val="50000"/>
+                <a:satMod val="300000"/>
+              </a:schemeClr>
+            </a:gs>
+            <a:gs pos="35000">
+              <a:schemeClr val="phClr">
+                <a:tint val="37000"/>
+                <a:satMod val="300000"/>
+              </a:schemeClr>
+            </a:gs>
+            <a:gs pos="100000">
+              <a:schemeClr val="phClr">
+                <a:tint val="15000"/>
+                <a:satMod val="350000"/>
+              </a:schemeClr>
+            </a:gs>
+          </a:gsLst>
+          <a:lin ang="16200000" scaled="1"/>
+        </a:gradFill>
+        <a:gradFill rotWithShape="1">
+          <a:gsLst>
+            <a:gs pos="0">
+              <a:schemeClr val="phClr">
+                <a:tint val="100000"/>
+                <a:shade val="100000"/>
+                <a:satMod val="130000"/>
+              </a:schemeClr>
+            </a:gs>
+            <a:gs pos="100000">
+              <a:schemeClr val="phClr">
+                <a:tint val="50000"/>
+                <a:shade val="100000"/>
+                <a:satMod val="350000"/>
+              </a:schemeClr>
+            </a:gs>
+          </a:gsLst>
+          <a:lin ang="16200000" scaled="0"/>
+        </a:gradFill>
+      </a:fillStyleLst>
+      <a:lnStyleLst>
+        <a:ln w="9525" cap="flat" cmpd="sng" algn="ctr">
+          <a:solidFill>
+            <a:schemeClr val="phClr">
+              <a:shade val="95000"/>
+              <a:satMod val="105000"/>
+            </a:schemeClr>
+          </a:solidFill>
+          <a:prstDash val="solid"/>
+        </a:ln>
+        <a:ln w="25400" cap="flat" cmpd="sng" algn="ctr">
+          <a:solidFill>
+            <a:schemeClr val="phClr"/>
+          </a:solidFill>
+          <a:prstDash val="solid"/>
+        </a:ln>
+        <a:ln w="38100" cap="flat" cmpd="sng" algn="ctr">
+          <a:solidFill>
+            <a:schemeClr val="phClr"/>
+          </a:solidFill>
+          <a:prstDash val="solid"/>
+        </a:ln>
+      </a:lnStyleLst>
+      <a:effectStyleLst>
+        <a:effectStyle>
+          <a:effectLst>
+            <a:outerShdw blurRad="40000" dist="20000" dir="5400000" rotWithShape="0">
+              <a:srgbClr val="000000">
+                <a:alpha val="38000"/>
+              </a:srgbClr>
+            </a:outerShdw>
+          </a:effectLst>
+        </a:effectStyle>
+        <a:effectStyle>
+          <a:effectLst>
+            <a:outerShdw blurRad="40000" dist="23000" dir="5400000" rotWithShape="0">
+              <a:srgbClr val="000000">
+                <a:alpha val="35000"/>
+              </a:srgbClr>
+            </a:outerShdw>
+          </a:effectLst>
+        </a:effectStyle>
+        <a:effectStyle>
+          <a:effectLst>
+            <a:outerShdw blurRad="40000" dist="23000" dir="5400000" rotWithShape="0">
+              <a:srgbClr val="000000">
+                <a:alpha val="35000"/>
+              </a:srgbClr>
+            </a:outerShdw>
+          </a:effectLst>
+          <a:scene3d>
+            <a:camera prst="orthographicFront">
+              <a:rot lat="0" lon="0" rev="0"/>
+            </a:camera>
+            <a:lightRig rig="threePt" dir="t">
+              <a:rot lat="0" lon="0" rev="1200000"/>
+            </a:lightRig>
+          </a:scene3d>
+          <a:sp3d>
+            <a:bevelT w="63500" h="25400"/>
+          </a:sp3d>
+        </a:effectStyle>
+      </a:effectStyleLst>
+      <a:bgFillStyleLst>
+        <a:solidFill>
+          <a:schemeClr val="phClr"/>
+        </a:solidFill>
+        <a:gradFill rotWithShape="1">
+          <a:gsLst>
+            <a:gs pos="0">
+              <a:schemeClr val="phClr">
+                <a:tint val="40000"/>
+                <a:satMod val="350000"/>
+              </a:schemeClr>
+            </a:gs>
+            <a:gs pos="40000">
+              <a:schemeClr val="phClr">
+                <a:tint val="45000"/>
+                <a:shade val="99000"/>
+                <a:satMod val="350000"/>
+              </a:schemeClr>
+            </a:gs>
+            <a:gs pos="100000">
+              <a:schemeClr val="phClr">
+                <a:shade val="20000"/>
+                <a:satMod val="255000"/>
+              </a:schemeClr>
+            </a:gs>
+          </a:gsLst>
+          <a:path path="circle">
+            <a:fillToRect l="50000" t="-80000" r="50000" b="180000"/>
+          </a:path>
+        </a:gradFill>
+        <a:gradFill rotWithShape="1">
+          <a:gsLst>
+            <a:gs pos="0">
+              <a:schemeClr val="phClr">
+                <a:tint val="80000"/>
+                <a:satMod val="300000"/>
+              </a:schemeClr>
+            </a:gs>
+            <a:gs pos="100000">
+              <a:schemeClr val="phClr">
+                <a:shade val="30000"/>
+                <a:satMod val="200000"/>
+              </a:schemeClr>
+            </a:gs>
+          </a:gsLst>
+          <a:path path="circle">
+            <a:fillToRect l="50000" t="50000" r="50000" b="50000"/>
+          </a:path>
+        </a:gradFill>
+      </a:bgFillStyleLst>
+    </a:fmtScheme>
+  </a:themeElements>
+</a:theme>
 </file>